--- a/Task3_Paper_Review/part3_mdpo_review_slides.pptx
+++ b/Task3_Paper_Review/part3_mdpo_review_slides.pptx
@@ -3091,7 +3091,7 @@
     <p:bg>
       <p:bgPr>
         <a:solidFill>
-          <a:srgbClr val="FAFAF8"/>
+          <a:srgbClr val="F6F9F9"/>
         </a:solidFill>
         <a:effectLst/>
       </p:bgPr>
@@ -3111,8 +3111,8 @@
         </p:nvSpPr>
         <p:spPr>
           <a:xfrm>
-            <a:off x="594360" y="411480"/>
-            <a:ext cx="10881360" cy="731520"/>
+            <a:off x="658368" y="566928"/>
+            <a:ext cx="9875520" cy="457200"/>
           </a:xfrm>
           <a:prstGeom prst="rect">
             <a:avLst/>
@@ -3120,20 +3120,20 @@
           <a:noFill/>
         </p:spPr>
         <p:txBody>
-          <a:bodyPr wrap="none">
+          <a:bodyPr wrap="none" lIns="45720" rIns="45720" anchor="t">
             <a:spAutoFit/>
           </a:bodyPr>
           <a:lstStyle/>
           <a:p>
-            <a:pPr>
-              <a:defRPr b="1" sz="3400">
-                <a:solidFill>
-                  <a:srgbClr val="1E2D46"/>
-                </a:solidFill>
-              </a:defRPr>
-            </a:pPr>
-            <a:r>
-              <a:t>MDPO</a:t>
+            <a:pPr algn="l">
+              <a:defRPr sz="1600" b="1">
+                <a:solidFill>
+                  <a:srgbClr val="008080"/>
+                </a:solidFill>
+              </a:defRPr>
+            </a:pPr>
+            <a:r>
+              <a:t>Scientific Peer Review</a:t>
             </a:r>
           </a:p>
         </p:txBody>
@@ -3146,8 +3146,8 @@
         </p:nvSpPr>
         <p:spPr>
           <a:xfrm>
-            <a:off x="822960" y="1417320"/>
-            <a:ext cx="10424160" cy="4389120"/>
+            <a:off x="658368" y="1143000"/>
+            <a:ext cx="9692640" cy="914400"/>
           </a:xfrm>
           <a:prstGeom prst="rect">
             <a:avLst/>
@@ -3155,52 +3155,347 @@
           <a:noFill/>
         </p:spPr>
         <p:txBody>
-          <a:bodyPr wrap="none">
+          <a:bodyPr wrap="none" lIns="45720" rIns="45720" anchor="t">
             <a:spAutoFit/>
           </a:bodyPr>
           <a:lstStyle/>
           <a:p>
+            <a:pPr algn="l">
+              <a:defRPr sz="3200" b="1">
+                <a:solidFill>
+                  <a:srgbClr val="162236"/>
+                </a:solidFill>
+              </a:defRPr>
+            </a:pPr>
+            <a:r>
+              <a:t>MDPO: Conditional Preference Optimization for Multimodal Large Language Models</a:t>
+            </a:r>
+          </a:p>
+        </p:txBody>
+      </p:sp>
+      <p:sp>
+        <p:nvSpPr>
+          <p:cNvPr id="4" name="TextBox 3"/>
+          <p:cNvSpPr txBox="1"/>
+          <p:nvPr/>
+        </p:nvSpPr>
+        <p:spPr>
+          <a:xfrm>
+            <a:off x="685800" y="2304288"/>
+            <a:ext cx="9418320" cy="502920"/>
+          </a:xfrm>
+          <a:prstGeom prst="rect">
+            <a:avLst/>
+          </a:prstGeom>
+          <a:noFill/>
+        </p:spPr>
+        <p:txBody>
+          <a:bodyPr wrap="none" lIns="45720" rIns="45720" anchor="t">
+            <a:spAutoFit/>
+          </a:bodyPr>
+          <a:lstStyle/>
+          <a:p>
+            <a:pPr algn="l">
+              <a:defRPr sz="1500" b="0">
+                <a:solidFill>
+                  <a:srgbClr val="23272F"/>
+                </a:solidFill>
+              </a:defRPr>
+            </a:pPr>
+            <a:r>
+              <a:t>Fei Wang, Wenxuan Zhou, James Y. Huang, Nan Xu, Sheng Zhang, Hoifung Poon, Muhao Chen</a:t>
+            </a:r>
+          </a:p>
+        </p:txBody>
+      </p:sp>
+      <p:sp>
+        <p:nvSpPr>
+          <p:cNvPr id="5" name="TextBox 4"/>
+          <p:cNvSpPr txBox="1"/>
+          <p:nvPr/>
+        </p:nvSpPr>
+        <p:spPr>
+          <a:xfrm>
+            <a:off x="685800" y="2761488"/>
+            <a:ext cx="9144000" cy="320040"/>
+          </a:xfrm>
+          <a:prstGeom prst="rect">
+            <a:avLst/>
+          </a:prstGeom>
+          <a:noFill/>
+        </p:spPr>
+        <p:txBody>
+          <a:bodyPr wrap="none" lIns="45720" rIns="45720" anchor="t">
+            <a:spAutoFit/>
+          </a:bodyPr>
+          <a:lstStyle/>
+          <a:p>
+            <a:pPr algn="l">
+              <a:defRPr sz="1200" b="0">
+                <a:solidFill>
+                  <a:srgbClr val="69707A"/>
+                </a:solidFill>
+              </a:defRPr>
+            </a:pPr>
+            <a:r>
+              <a:t>arXiv:2406.11839v2, October 2024</a:t>
+            </a:r>
+          </a:p>
+        </p:txBody>
+      </p:sp>
+      <p:sp>
+        <p:nvSpPr>
+          <p:cNvPr id="6" name="Rounded Rectangle 5"/>
+          <p:cNvSpPr/>
+          <p:nvPr/>
+        </p:nvSpPr>
+        <p:spPr>
+          <a:xfrm>
+            <a:off x="685800" y="3822191"/>
+            <a:ext cx="1920240" cy="420624"/>
+          </a:xfrm>
+          <a:prstGeom prst="roundRect">
+            <a:avLst/>
+          </a:prstGeom>
+          <a:solidFill>
+            <a:srgbClr val="C2841C"/>
+          </a:solidFill>
+          <a:ln>
+            <a:solidFill>
+              <a:srgbClr val="C2841C"/>
+            </a:solidFill>
+          </a:ln>
+        </p:spPr>
+        <p:style>
+          <a:lnRef idx="1">
+            <a:schemeClr val="accent1"/>
+          </a:lnRef>
+          <a:fillRef idx="3">
+            <a:schemeClr val="accent1"/>
+          </a:fillRef>
+          <a:effectRef idx="2">
+            <a:schemeClr val="accent1"/>
+          </a:effectRef>
+          <a:fontRef idx="minor">
+            <a:schemeClr val="lt1"/>
+          </a:fontRef>
+        </p:style>
+        <p:txBody>
+          <a:bodyPr rtlCol="0" anchor="ctr"/>
+          <a:lstStyle/>
+          <a:p>
+            <a:pPr algn="ctr"/>
+          </a:p>
+        </p:txBody>
+      </p:sp>
+      <p:sp>
+        <p:nvSpPr>
+          <p:cNvPr id="7" name="TextBox 6"/>
+          <p:cNvSpPr txBox="1"/>
+          <p:nvPr/>
+        </p:nvSpPr>
+        <p:spPr>
+          <a:xfrm>
+            <a:off x="685800" y="3877055"/>
+            <a:ext cx="1920240" cy="347472"/>
+          </a:xfrm>
+          <a:prstGeom prst="rect">
+            <a:avLst/>
+          </a:prstGeom>
+          <a:noFill/>
+        </p:spPr>
+        <p:txBody>
+          <a:bodyPr wrap="none" lIns="45720" rIns="45720" anchor="t">
+            <a:spAutoFit/>
+          </a:bodyPr>
+          <a:lstStyle/>
+          <a:p>
+            <a:pPr algn="ctr">
+              <a:defRPr sz="1300" b="1">
+                <a:solidFill>
+                  <a:srgbClr val="FFFFFF"/>
+                </a:solidFill>
+              </a:defRPr>
+            </a:pPr>
+            <a:r>
+              <a:t>Verdict: Weak Accept</a:t>
+            </a:r>
+          </a:p>
+        </p:txBody>
+      </p:sp>
+      <p:sp>
+        <p:nvSpPr>
+          <p:cNvPr id="8" name="Rounded Rectangle 7"/>
+          <p:cNvSpPr/>
+          <p:nvPr/>
+        </p:nvSpPr>
+        <p:spPr>
+          <a:xfrm>
+            <a:off x="2907792" y="3529584"/>
+            <a:ext cx="7909560" cy="1078992"/>
+          </a:xfrm>
+          <a:prstGeom prst="roundRect">
+            <a:avLst/>
+          </a:prstGeom>
+          <a:solidFill>
+            <a:srgbClr val="FFFFFF"/>
+          </a:solidFill>
+          <a:ln>
+            <a:solidFill>
+              <a:srgbClr val="DADEE2"/>
+            </a:solidFill>
+          </a:ln>
+        </p:spPr>
+        <p:style>
+          <a:lnRef idx="1">
+            <a:schemeClr val="accent1"/>
+          </a:lnRef>
+          <a:fillRef idx="3">
+            <a:schemeClr val="accent1"/>
+          </a:fillRef>
+          <a:effectRef idx="2">
+            <a:schemeClr val="accent1"/>
+          </a:effectRef>
+          <a:fontRef idx="minor">
+            <a:schemeClr val="lt1"/>
+          </a:fontRef>
+        </p:style>
+        <p:txBody>
+          <a:bodyPr rtlCol="0" anchor="ctr"/>
+          <a:lstStyle/>
+          <a:p>
+            <a:pPr algn="ctr"/>
+          </a:p>
+        </p:txBody>
+      </p:sp>
+      <p:sp>
+        <p:nvSpPr>
+          <p:cNvPr id="9" name="Rectangle 8"/>
+          <p:cNvSpPr/>
+          <p:nvPr/>
+        </p:nvSpPr>
+        <p:spPr>
+          <a:xfrm>
+            <a:off x="2907792" y="3529584"/>
+            <a:ext cx="73152" cy="1078992"/>
+          </a:xfrm>
+          <a:prstGeom prst="rect">
+            <a:avLst/>
+          </a:prstGeom>
+          <a:solidFill>
+            <a:srgbClr val="008080"/>
+          </a:solidFill>
+          <a:ln>
+            <a:solidFill>
+              <a:srgbClr val="008080"/>
+            </a:solidFill>
+          </a:ln>
+        </p:spPr>
+        <p:style>
+          <a:lnRef idx="1">
+            <a:schemeClr val="accent1"/>
+          </a:lnRef>
+          <a:fillRef idx="3">
+            <a:schemeClr val="accent1"/>
+          </a:fillRef>
+          <a:effectRef idx="2">
+            <a:schemeClr val="accent1"/>
+          </a:effectRef>
+          <a:fontRef idx="minor">
+            <a:schemeClr val="lt1"/>
+          </a:fontRef>
+        </p:style>
+        <p:txBody>
+          <a:bodyPr rtlCol="0" anchor="ctr"/>
+          <a:lstStyle/>
+          <a:p>
+            <a:pPr algn="ctr"/>
+          </a:p>
+        </p:txBody>
+      </p:sp>
+      <p:sp>
+        <p:nvSpPr>
+          <p:cNvPr id="10" name="TextBox 9"/>
+          <p:cNvSpPr txBox="1"/>
+          <p:nvPr/>
+        </p:nvSpPr>
+        <p:spPr>
+          <a:xfrm>
+            <a:off x="3108960" y="3694176"/>
+            <a:ext cx="7562088" cy="292608"/>
+          </a:xfrm>
+          <a:prstGeom prst="rect">
+            <a:avLst/>
+          </a:prstGeom>
+          <a:noFill/>
+        </p:spPr>
+        <p:txBody>
+          <a:bodyPr wrap="none" lIns="45720" rIns="45720" anchor="t">
+            <a:spAutoFit/>
+          </a:bodyPr>
+          <a:lstStyle/>
+          <a:p>
+            <a:pPr algn="l">
+              <a:defRPr sz="1600" b="1">
+                <a:solidFill>
+                  <a:srgbClr val="162236"/>
+                </a:solidFill>
+              </a:defRPr>
+            </a:pPr>
+            <a:r>
+              <a:t>One-sentence thesis</a:t>
+            </a:r>
+          </a:p>
+        </p:txBody>
+      </p:sp>
+      <p:sp>
+        <p:nvSpPr>
+          <p:cNvPr id="11" name="TextBox 10"/>
+          <p:cNvSpPr txBox="1"/>
+          <p:nvPr/>
+        </p:nvSpPr>
+        <p:spPr>
+          <a:xfrm>
+            <a:off x="3108960" y="4096511"/>
+            <a:ext cx="7525512" cy="402335"/>
+          </a:xfrm>
+          <a:prstGeom prst="rect">
+            <a:avLst/>
+          </a:prstGeom>
+          <a:noFill/>
+        </p:spPr>
+        <p:txBody>
+          <a:bodyPr wrap="square">
+            <a:spAutoFit/>
+          </a:bodyPr>
+          <a:lstStyle/>
+          <a:p>
             <a:pPr>
               <a:spcAft>
-                <a:spcPts val="1400"/>
+                <a:spcPts val="900"/>
               </a:spcAft>
-              <a:defRPr sz="2400">
-                <a:solidFill>
-                  <a:srgbClr val="232323"/>
-                </a:solidFill>
-              </a:defRPr>
-            </a:pPr>
-            <a:r>
-              <a:t>Scientific peer review of Wang et al. (arXiv:2406.11839v2)</a:t>
-            </a:r>
-          </a:p>
-          <a:p>
-            <a:pPr>
-              <a:spcAft>
-                <a:spcPts val="1400"/>
-              </a:spcAft>
-              <a:defRPr sz="2400">
-                <a:solidFill>
-                  <a:srgbClr val="232323"/>
-                </a:solidFill>
-              </a:defRPr>
-            </a:pPr>
-            <a:r>
-              <a:t>Core claim: multimodal DPO may ignore the image condition.</a:t>
-            </a:r>
-          </a:p>
-        </p:txBody>
-      </p:sp>
-      <p:sp>
-        <p:nvSpPr>
-          <p:cNvPr id="4" name="TextBox 3"/>
+              <a:defRPr sz="1300">
+                <a:solidFill>
+                  <a:srgbClr val="23272F"/>
+                </a:solidFill>
+              </a:defRPr>
+            </a:pPr>
+            <a:r>
+              <a:t>Standard multimodal DPO can learn text-only preference shortcuts; MDPO adds image-conditional preference learning to reduce hallucination.</a:t>
+            </a:r>
+          </a:p>
+        </p:txBody>
+      </p:sp>
+      <p:sp>
+        <p:nvSpPr>
+          <p:cNvPr id="12" name="TextBox 11"/>
           <p:cNvSpPr txBox="1"/>
           <p:nvPr/>
         </p:nvSpPr>
         <p:spPr>
           <a:xfrm>
-            <a:off x="502920" y="6263640"/>
-            <a:ext cx="11155680" cy="228600"/>
+            <a:off x="594360" y="6446520"/>
+            <a:ext cx="5029200" cy="228600"/>
           </a:xfrm>
           <a:prstGeom prst="rect">
             <a:avLst/>
@@ -3208,20 +3503,55 @@
           <a:noFill/>
         </p:spPr>
         <p:txBody>
-          <a:bodyPr wrap="none">
+          <a:bodyPr wrap="none" lIns="45720" rIns="45720" anchor="t">
             <a:spAutoFit/>
           </a:bodyPr>
           <a:lstStyle/>
           <a:p>
+            <a:pPr algn="l">
+              <a:defRPr sz="800" b="0">
+                <a:solidFill>
+                  <a:srgbClr val="69707A"/>
+                </a:solidFill>
+              </a:defRPr>
+            </a:pPr>
+            <a:r>
+              <a:t>MDPO paper review</a:t>
+            </a:r>
+          </a:p>
+        </p:txBody>
+      </p:sp>
+      <p:sp>
+        <p:nvSpPr>
+          <p:cNvPr id="13" name="TextBox 12"/>
+          <p:cNvSpPr txBox="1"/>
+          <p:nvPr/>
+        </p:nvSpPr>
+        <p:spPr>
+          <a:xfrm>
+            <a:off x="10698480" y="6446520"/>
+            <a:ext cx="822960" cy="228600"/>
+          </a:xfrm>
+          <a:prstGeom prst="rect">
+            <a:avLst/>
+          </a:prstGeom>
+          <a:noFill/>
+        </p:spPr>
+        <p:txBody>
+          <a:bodyPr wrap="none" lIns="45720" rIns="45720" anchor="t">
+            <a:spAutoFit/>
+          </a:bodyPr>
+          <a:lstStyle/>
+          <a:p>
             <a:pPr algn="r">
-              <a:defRPr sz="800">
-                <a:solidFill>
-                  <a:srgbClr val="5F5F5F"/>
-                </a:solidFill>
-              </a:defRPr>
-            </a:pPr>
-            <a:r>
-              <a:t>MDPO paper review | Slide 1</a:t>
+              <a:defRPr sz="800" b="0">
+                <a:solidFill>
+                  <a:srgbClr val="69707A"/>
+                </a:solidFill>
+              </a:defRPr>
+            </a:pPr>
+            <a:r>
+              <a:t>1</a:t>
             </a:r>
           </a:p>
         </p:txBody>
@@ -3240,7 +3570,7 @@
     <p:bg>
       <p:bgPr>
         <a:solidFill>
-          <a:srgbClr val="FAFAF8"/>
+          <a:srgbClr val="FCFCFA"/>
         </a:solidFill>
         <a:effectLst/>
       </p:bgPr>
@@ -3260,8 +3590,8 @@
         </p:nvSpPr>
         <p:spPr>
           <a:xfrm>
-            <a:off x="594360" y="411480"/>
-            <a:ext cx="10881360" cy="731520"/>
+            <a:off x="594360" y="384048"/>
+            <a:ext cx="10789920" cy="502920"/>
           </a:xfrm>
           <a:prstGeom prst="rect">
             <a:avLst/>
@@ -3269,20 +3599,20 @@
           <a:noFill/>
         </p:spPr>
         <p:txBody>
-          <a:bodyPr wrap="none">
+          <a:bodyPr wrap="none" lIns="45720" rIns="45720" anchor="t">
             <a:spAutoFit/>
           </a:bodyPr>
           <a:lstStyle/>
           <a:p>
-            <a:pPr>
-              <a:defRPr b="1" sz="3400">
-                <a:solidFill>
-                  <a:srgbClr val="1E2D46"/>
-                </a:solidFill>
-              </a:defRPr>
-            </a:pPr>
-            <a:r>
-              <a:t>Background</a:t>
+            <a:pPr algn="l">
+              <a:defRPr sz="3000" b="1">
+                <a:solidFill>
+                  <a:srgbClr val="162236"/>
+                </a:solidFill>
+              </a:defRPr>
+            </a:pPr>
+            <a:r>
+              <a:t>Why This Paper Matters</a:t>
             </a:r>
           </a:p>
         </p:txBody>
@@ -3295,8 +3625,8 @@
         </p:nvSpPr>
         <p:spPr>
           <a:xfrm>
-            <a:off x="822960" y="1417320"/>
-            <a:ext cx="10424160" cy="4389120"/>
+            <a:off x="621792" y="877824"/>
+            <a:ext cx="10424160" cy="320040"/>
           </a:xfrm>
           <a:prstGeom prst="rect">
             <a:avLst/>
@@ -3304,67 +3634,525 @@
           <a:noFill/>
         </p:spPr>
         <p:txBody>
-          <a:bodyPr wrap="none">
+          <a:bodyPr wrap="none" lIns="45720" rIns="45720" anchor="t">
             <a:spAutoFit/>
           </a:bodyPr>
           <a:lstStyle/>
           <a:p>
+            <a:pPr algn="l">
+              <a:defRPr sz="1200" b="0">
+                <a:solidFill>
+                  <a:srgbClr val="69707A"/>
+                </a:solidFill>
+              </a:defRPr>
+            </a:pPr>
+            <a:r>
+              <a:t>Multimodal alignment should be grounded in both image and language.</a:t>
+            </a:r>
+          </a:p>
+        </p:txBody>
+      </p:sp>
+      <p:sp>
+        <p:nvSpPr>
+          <p:cNvPr id="4" name="Rectangle 3"/>
+          <p:cNvSpPr/>
+          <p:nvPr/>
+        </p:nvSpPr>
+        <p:spPr>
+          <a:xfrm>
+            <a:off x="621792" y="1170432"/>
+            <a:ext cx="1051560" cy="36576"/>
+          </a:xfrm>
+          <a:prstGeom prst="rect">
+            <a:avLst/>
+          </a:prstGeom>
+          <a:solidFill>
+            <a:srgbClr val="008080"/>
+          </a:solidFill>
+          <a:ln>
+            <a:solidFill>
+              <a:srgbClr val="008080"/>
+            </a:solidFill>
+          </a:ln>
+        </p:spPr>
+        <p:style>
+          <a:lnRef idx="1">
+            <a:schemeClr val="accent1"/>
+          </a:lnRef>
+          <a:fillRef idx="3">
+            <a:schemeClr val="accent1"/>
+          </a:fillRef>
+          <a:effectRef idx="2">
+            <a:schemeClr val="accent1"/>
+          </a:effectRef>
+          <a:fontRef idx="minor">
+            <a:schemeClr val="lt1"/>
+          </a:fontRef>
+        </p:style>
+        <p:txBody>
+          <a:bodyPr rtlCol="0" anchor="ctr"/>
+          <a:lstStyle/>
+          <a:p>
+            <a:pPr algn="ctr"/>
+          </a:p>
+        </p:txBody>
+      </p:sp>
+      <p:sp>
+        <p:nvSpPr>
+          <p:cNvPr id="5" name="Rounded Rectangle 4"/>
+          <p:cNvSpPr/>
+          <p:nvPr/>
+        </p:nvSpPr>
+        <p:spPr>
+          <a:xfrm>
+            <a:off x="685800" y="1508760"/>
+            <a:ext cx="3429000" cy="3291840"/>
+          </a:xfrm>
+          <a:prstGeom prst="roundRect">
+            <a:avLst/>
+          </a:prstGeom>
+          <a:solidFill>
+            <a:srgbClr val="E0F4EE"/>
+          </a:solidFill>
+          <a:ln>
+            <a:solidFill>
+              <a:srgbClr val="DADEE2"/>
+            </a:solidFill>
+          </a:ln>
+        </p:spPr>
+        <p:style>
+          <a:lnRef idx="1">
+            <a:schemeClr val="accent1"/>
+          </a:lnRef>
+          <a:fillRef idx="3">
+            <a:schemeClr val="accent1"/>
+          </a:fillRef>
+          <a:effectRef idx="2">
+            <a:schemeClr val="accent1"/>
+          </a:effectRef>
+          <a:fontRef idx="minor">
+            <a:schemeClr val="lt1"/>
+          </a:fontRef>
+        </p:style>
+        <p:txBody>
+          <a:bodyPr rtlCol="0" anchor="ctr"/>
+          <a:lstStyle/>
+          <a:p>
+            <a:pPr algn="ctr"/>
+          </a:p>
+        </p:txBody>
+      </p:sp>
+      <p:sp>
+        <p:nvSpPr>
+          <p:cNvPr id="6" name="Rectangle 5"/>
+          <p:cNvSpPr/>
+          <p:nvPr/>
+        </p:nvSpPr>
+        <p:spPr>
+          <a:xfrm>
+            <a:off x="685800" y="1508760"/>
+            <a:ext cx="73152" cy="3291840"/>
+          </a:xfrm>
+          <a:prstGeom prst="rect">
+            <a:avLst/>
+          </a:prstGeom>
+          <a:solidFill>
+            <a:srgbClr val="238756"/>
+          </a:solidFill>
+          <a:ln>
+            <a:solidFill>
+              <a:srgbClr val="238756"/>
+            </a:solidFill>
+          </a:ln>
+        </p:spPr>
+        <p:style>
+          <a:lnRef idx="1">
+            <a:schemeClr val="accent1"/>
+          </a:lnRef>
+          <a:fillRef idx="3">
+            <a:schemeClr val="accent1"/>
+          </a:fillRef>
+          <a:effectRef idx="2">
+            <a:schemeClr val="accent1"/>
+          </a:effectRef>
+          <a:fontRef idx="minor">
+            <a:schemeClr val="lt1"/>
+          </a:fontRef>
+        </p:style>
+        <p:txBody>
+          <a:bodyPr rtlCol="0" anchor="ctr"/>
+          <a:lstStyle/>
+          <a:p>
+            <a:pPr algn="ctr"/>
+          </a:p>
+        </p:txBody>
+      </p:sp>
+      <p:sp>
+        <p:nvSpPr>
+          <p:cNvPr id="7" name="TextBox 6"/>
+          <p:cNvSpPr txBox="1"/>
+          <p:nvPr/>
+        </p:nvSpPr>
+        <p:spPr>
+          <a:xfrm>
+            <a:off x="886968" y="1673351"/>
+            <a:ext cx="3081528" cy="292608"/>
+          </a:xfrm>
+          <a:prstGeom prst="rect">
+            <a:avLst/>
+          </a:prstGeom>
+          <a:noFill/>
+        </p:spPr>
+        <p:txBody>
+          <a:bodyPr wrap="none" lIns="45720" rIns="45720" anchor="t">
+            <a:spAutoFit/>
+          </a:bodyPr>
+          <a:lstStyle/>
+          <a:p>
+            <a:pPr algn="l">
+              <a:defRPr sz="1600" b="1">
+                <a:solidFill>
+                  <a:srgbClr val="162236"/>
+                </a:solidFill>
+              </a:defRPr>
+            </a:pPr>
+            <a:r>
+              <a:t>Expected behavior</a:t>
+            </a:r>
+          </a:p>
+        </p:txBody>
+      </p:sp>
+      <p:sp>
+        <p:nvSpPr>
+          <p:cNvPr id="8" name="TextBox 7"/>
+          <p:cNvSpPr txBox="1"/>
+          <p:nvPr/>
+        </p:nvSpPr>
+        <p:spPr>
+          <a:xfrm>
+            <a:off x="886968" y="2075688"/>
+            <a:ext cx="3044952" cy="2615184"/>
+          </a:xfrm>
+          <a:prstGeom prst="rect">
+            <a:avLst/>
+          </a:prstGeom>
+          <a:noFill/>
+        </p:spPr>
+        <p:txBody>
+          <a:bodyPr wrap="square">
+            <a:spAutoFit/>
+          </a:bodyPr>
+          <a:lstStyle/>
+          <a:p>
             <a:pPr>
               <a:spcAft>
-                <a:spcPts val="1400"/>
+                <a:spcPts val="900"/>
               </a:spcAft>
-              <a:defRPr sz="2400">
-                <a:solidFill>
-                  <a:srgbClr val="232323"/>
-                </a:solidFill>
-              </a:defRPr>
-            </a:pPr>
-            <a:r>
-              <a:t>DPO aligns models using chosen and rejected responses.</a:t>
+              <a:defRPr sz="1300">
+                <a:solidFill>
+                  <a:srgbClr val="23272F"/>
+                </a:solidFill>
+              </a:defRPr>
+            </a:pPr>
+            <a:r>
+              <a:t>Given an image, question, chosen response, and rejected response:</a:t>
             </a:r>
           </a:p>
           <a:p>
             <a:pPr>
               <a:spcAft>
-                <a:spcPts val="1400"/>
+                <a:spcPts val="900"/>
               </a:spcAft>
-              <a:defRPr sz="2400">
-                <a:solidFill>
-                  <a:srgbClr val="232323"/>
-                </a:solidFill>
-              </a:defRPr>
-            </a:pPr>
-            <a:r>
-              <a:t>In multimodal DPO, preferences should depend on both image and text.</a:t>
-            </a:r>
-          </a:p>
+              <a:defRPr sz="1300">
+                <a:solidFill>
+                  <a:srgbClr val="23272F"/>
+                </a:solidFill>
+              </a:defRPr>
+            </a:pPr>
+            <a:r>
+              <a:t>the model should prefer the answer that is correct for the image.</a:t>
+            </a:r>
+          </a:p>
+        </p:txBody>
+      </p:sp>
+      <p:sp>
+        <p:nvSpPr>
+          <p:cNvPr id="9" name="Rounded Rectangle 8"/>
+          <p:cNvSpPr/>
+          <p:nvPr/>
+        </p:nvSpPr>
+        <p:spPr>
+          <a:xfrm>
+            <a:off x="4389120" y="1508760"/>
+            <a:ext cx="3429000" cy="3291840"/>
+          </a:xfrm>
+          <a:prstGeom prst="roundRect">
+            <a:avLst/>
+          </a:prstGeom>
+          <a:solidFill>
+            <a:srgbClr val="FFF4E6"/>
+          </a:solidFill>
+          <a:ln>
+            <a:solidFill>
+              <a:srgbClr val="DADEE2"/>
+            </a:solidFill>
+          </a:ln>
+        </p:spPr>
+        <p:style>
+          <a:lnRef idx="1">
+            <a:schemeClr val="accent1"/>
+          </a:lnRef>
+          <a:fillRef idx="3">
+            <a:schemeClr val="accent1"/>
+          </a:fillRef>
+          <a:effectRef idx="2">
+            <a:schemeClr val="accent1"/>
+          </a:effectRef>
+          <a:fontRef idx="minor">
+            <a:schemeClr val="lt1"/>
+          </a:fontRef>
+        </p:style>
+        <p:txBody>
+          <a:bodyPr rtlCol="0" anchor="ctr"/>
+          <a:lstStyle/>
+          <a:p>
+            <a:pPr algn="ctr"/>
+          </a:p>
+        </p:txBody>
+      </p:sp>
+      <p:sp>
+        <p:nvSpPr>
+          <p:cNvPr id="10" name="Rectangle 9"/>
+          <p:cNvSpPr/>
+          <p:nvPr/>
+        </p:nvSpPr>
+        <p:spPr>
+          <a:xfrm>
+            <a:off x="4389120" y="1508760"/>
+            <a:ext cx="73152" cy="3291840"/>
+          </a:xfrm>
+          <a:prstGeom prst="rect">
+            <a:avLst/>
+          </a:prstGeom>
+          <a:solidFill>
+            <a:srgbClr val="C2841C"/>
+          </a:solidFill>
+          <a:ln>
+            <a:solidFill>
+              <a:srgbClr val="C2841C"/>
+            </a:solidFill>
+          </a:ln>
+        </p:spPr>
+        <p:style>
+          <a:lnRef idx="1">
+            <a:schemeClr val="accent1"/>
+          </a:lnRef>
+          <a:fillRef idx="3">
+            <a:schemeClr val="accent1"/>
+          </a:fillRef>
+          <a:effectRef idx="2">
+            <a:schemeClr val="accent1"/>
+          </a:effectRef>
+          <a:fontRef idx="minor">
+            <a:schemeClr val="lt1"/>
+          </a:fontRef>
+        </p:style>
+        <p:txBody>
+          <a:bodyPr rtlCol="0" anchor="ctr"/>
+          <a:lstStyle/>
+          <a:p>
+            <a:pPr algn="ctr"/>
+          </a:p>
+        </p:txBody>
+      </p:sp>
+      <p:sp>
+        <p:nvSpPr>
+          <p:cNvPr id="11" name="TextBox 10"/>
+          <p:cNvSpPr txBox="1"/>
+          <p:nvPr/>
+        </p:nvSpPr>
+        <p:spPr>
+          <a:xfrm>
+            <a:off x="4590288" y="1673351"/>
+            <a:ext cx="3081528" cy="292608"/>
+          </a:xfrm>
+          <a:prstGeom prst="rect">
+            <a:avLst/>
+          </a:prstGeom>
+          <a:noFill/>
+        </p:spPr>
+        <p:txBody>
+          <a:bodyPr wrap="none" lIns="45720" rIns="45720" anchor="t">
+            <a:spAutoFit/>
+          </a:bodyPr>
+          <a:lstStyle/>
+          <a:p>
+            <a:pPr algn="l">
+              <a:defRPr sz="1600" b="1">
+                <a:solidFill>
+                  <a:srgbClr val="162236"/>
+                </a:solidFill>
+              </a:defRPr>
+            </a:pPr>
+            <a:r>
+              <a:t>Observed risk</a:t>
+            </a:r>
+          </a:p>
+        </p:txBody>
+      </p:sp>
+      <p:sp>
+        <p:nvSpPr>
+          <p:cNvPr id="12" name="TextBox 11"/>
+          <p:cNvSpPr txBox="1"/>
+          <p:nvPr/>
+        </p:nvSpPr>
+        <p:spPr>
+          <a:xfrm>
+            <a:off x="4590288" y="2075688"/>
+            <a:ext cx="3044952" cy="2615184"/>
+          </a:xfrm>
+          <a:prstGeom prst="rect">
+            <a:avLst/>
+          </a:prstGeom>
+          <a:noFill/>
+        </p:spPr>
+        <p:txBody>
+          <a:bodyPr wrap="square">
+            <a:spAutoFit/>
+          </a:bodyPr>
+          <a:lstStyle/>
           <a:p>
             <a:pPr>
               <a:spcAft>
-                <a:spcPts val="1400"/>
+                <a:spcPts val="900"/>
               </a:spcAft>
-              <a:defRPr sz="2400">
-                <a:solidFill>
-                  <a:srgbClr val="232323"/>
-                </a:solidFill>
-              </a:defRPr>
-            </a:pPr>
-            <a:r>
-              <a:t>Standard DPO can learn language-only shortcuts instead of visual grounding.</a:t>
-            </a:r>
-          </a:p>
-        </p:txBody>
-      </p:sp>
-      <p:sp>
-        <p:nvSpPr>
-          <p:cNvPr id="4" name="TextBox 3"/>
+              <a:defRPr sz="1300">
+                <a:solidFill>
+                  <a:srgbClr val="23272F"/>
+                </a:solidFill>
+              </a:defRPr>
+            </a:pPr>
+            <a:r>
+              <a:t>The model may learn that one response simply sounds better.</a:t>
+            </a:r>
+          </a:p>
+          <a:p>
+            <a:pPr>
+              <a:spcAft>
+                <a:spcPts val="900"/>
+              </a:spcAft>
+              <a:defRPr sz="1300">
+                <a:solidFill>
+                  <a:srgbClr val="23272F"/>
+                </a:solidFill>
+              </a:defRPr>
+            </a:pPr>
+            <a:r>
+              <a:t>The image condition becomes weak or ignored.</a:t>
+            </a:r>
+          </a:p>
+        </p:txBody>
+      </p:sp>
+      <p:sp>
+        <p:nvSpPr>
+          <p:cNvPr id="13" name="Rounded Rectangle 12"/>
+          <p:cNvSpPr/>
+          <p:nvPr/>
+        </p:nvSpPr>
+        <p:spPr>
+          <a:xfrm>
+            <a:off x="8092440" y="1508760"/>
+            <a:ext cx="3429000" cy="3291840"/>
+          </a:xfrm>
+          <a:prstGeom prst="roundRect">
+            <a:avLst/>
+          </a:prstGeom>
+          <a:solidFill>
+            <a:srgbClr val="FFEDED"/>
+          </a:solidFill>
+          <a:ln>
+            <a:solidFill>
+              <a:srgbClr val="DADEE2"/>
+            </a:solidFill>
+          </a:ln>
+        </p:spPr>
+        <p:style>
+          <a:lnRef idx="1">
+            <a:schemeClr val="accent1"/>
+          </a:lnRef>
+          <a:fillRef idx="3">
+            <a:schemeClr val="accent1"/>
+          </a:fillRef>
+          <a:effectRef idx="2">
+            <a:schemeClr val="accent1"/>
+          </a:effectRef>
+          <a:fontRef idx="minor">
+            <a:schemeClr val="lt1"/>
+          </a:fontRef>
+        </p:style>
+        <p:txBody>
+          <a:bodyPr rtlCol="0" anchor="ctr"/>
+          <a:lstStyle/>
+          <a:p>
+            <a:pPr algn="ctr"/>
+          </a:p>
+        </p:txBody>
+      </p:sp>
+      <p:sp>
+        <p:nvSpPr>
+          <p:cNvPr id="14" name="Rectangle 13"/>
+          <p:cNvSpPr/>
+          <p:nvPr/>
+        </p:nvSpPr>
+        <p:spPr>
+          <a:xfrm>
+            <a:off x="8092440" y="1508760"/>
+            <a:ext cx="73152" cy="3291840"/>
+          </a:xfrm>
+          <a:prstGeom prst="rect">
+            <a:avLst/>
+          </a:prstGeom>
+          <a:solidFill>
+            <a:srgbClr val="B43A3A"/>
+          </a:solidFill>
+          <a:ln>
+            <a:solidFill>
+              <a:srgbClr val="B43A3A"/>
+            </a:solidFill>
+          </a:ln>
+        </p:spPr>
+        <p:style>
+          <a:lnRef idx="1">
+            <a:schemeClr val="accent1"/>
+          </a:lnRef>
+          <a:fillRef idx="3">
+            <a:schemeClr val="accent1"/>
+          </a:fillRef>
+          <a:effectRef idx="2">
+            <a:schemeClr val="accent1"/>
+          </a:effectRef>
+          <a:fontRef idx="minor">
+            <a:schemeClr val="lt1"/>
+          </a:fontRef>
+        </p:style>
+        <p:txBody>
+          <a:bodyPr rtlCol="0" anchor="ctr"/>
+          <a:lstStyle/>
+          <a:p>
+            <a:pPr algn="ctr"/>
+          </a:p>
+        </p:txBody>
+      </p:sp>
+      <p:sp>
+        <p:nvSpPr>
+          <p:cNvPr id="15" name="TextBox 14"/>
           <p:cNvSpPr txBox="1"/>
           <p:nvPr/>
         </p:nvSpPr>
         <p:spPr>
           <a:xfrm>
-            <a:off x="502920" y="6263640"/>
-            <a:ext cx="11155680" cy="228600"/>
+            <a:off x="8293608" y="1673351"/>
+            <a:ext cx="3081528" cy="292608"/>
           </a:xfrm>
           <a:prstGeom prst="rect">
             <a:avLst/>
@@ -3372,20 +4160,143 @@
           <a:noFill/>
         </p:spPr>
         <p:txBody>
-          <a:bodyPr wrap="none">
+          <a:bodyPr wrap="none" lIns="45720" rIns="45720" anchor="t">
             <a:spAutoFit/>
           </a:bodyPr>
           <a:lstStyle/>
           <a:p>
+            <a:pPr algn="l">
+              <a:defRPr sz="1600" b="1">
+                <a:solidFill>
+                  <a:srgbClr val="162236"/>
+                </a:solidFill>
+              </a:defRPr>
+            </a:pPr>
+            <a:r>
+              <a:t>Consequence</a:t>
+            </a:r>
+          </a:p>
+        </p:txBody>
+      </p:sp>
+      <p:sp>
+        <p:nvSpPr>
+          <p:cNvPr id="16" name="TextBox 15"/>
+          <p:cNvSpPr txBox="1"/>
+          <p:nvPr/>
+        </p:nvSpPr>
+        <p:spPr>
+          <a:xfrm>
+            <a:off x="8293608" y="2075688"/>
+            <a:ext cx="3044952" cy="2615184"/>
+          </a:xfrm>
+          <a:prstGeom prst="rect">
+            <a:avLst/>
+          </a:prstGeom>
+          <a:noFill/>
+        </p:spPr>
+        <p:txBody>
+          <a:bodyPr wrap="square">
+            <a:spAutoFit/>
+          </a:bodyPr>
+          <a:lstStyle/>
+          <a:p>
+            <a:pPr>
+              <a:spcAft>
+                <a:spcPts val="900"/>
+              </a:spcAft>
+              <a:defRPr sz="1300">
+                <a:solidFill>
+                  <a:srgbClr val="23272F"/>
+                </a:solidFill>
+              </a:defRPr>
+            </a:pPr>
+            <a:r>
+              <a:t>Preference optimization can increase fluent but visually unsupported answers.</a:t>
+            </a:r>
+          </a:p>
+          <a:p>
+            <a:pPr>
+              <a:spcAft>
+                <a:spcPts val="900"/>
+              </a:spcAft>
+              <a:defRPr sz="1300">
+                <a:solidFill>
+                  <a:srgbClr val="23272F"/>
+                </a:solidFill>
+              </a:defRPr>
+            </a:pPr>
+            <a:r>
+              <a:t>This is directly tied to hallucination.</a:t>
+            </a:r>
+          </a:p>
+        </p:txBody>
+      </p:sp>
+      <p:sp>
+        <p:nvSpPr>
+          <p:cNvPr id="17" name="TextBox 16"/>
+          <p:cNvSpPr txBox="1"/>
+          <p:nvPr/>
+        </p:nvSpPr>
+        <p:spPr>
+          <a:xfrm>
+            <a:off x="594360" y="6446520"/>
+            <a:ext cx="5029200" cy="228600"/>
+          </a:xfrm>
+          <a:prstGeom prst="rect">
+            <a:avLst/>
+          </a:prstGeom>
+          <a:noFill/>
+        </p:spPr>
+        <p:txBody>
+          <a:bodyPr wrap="none" lIns="45720" rIns="45720" anchor="t">
+            <a:spAutoFit/>
+          </a:bodyPr>
+          <a:lstStyle/>
+          <a:p>
+            <a:pPr algn="l">
+              <a:defRPr sz="800" b="0">
+                <a:solidFill>
+                  <a:srgbClr val="69707A"/>
+                </a:solidFill>
+              </a:defRPr>
+            </a:pPr>
+            <a:r>
+              <a:t>MDPO paper review</a:t>
+            </a:r>
+          </a:p>
+        </p:txBody>
+      </p:sp>
+      <p:sp>
+        <p:nvSpPr>
+          <p:cNvPr id="18" name="TextBox 17"/>
+          <p:cNvSpPr txBox="1"/>
+          <p:nvPr/>
+        </p:nvSpPr>
+        <p:spPr>
+          <a:xfrm>
+            <a:off x="10698480" y="6446520"/>
+            <a:ext cx="822960" cy="228600"/>
+          </a:xfrm>
+          <a:prstGeom prst="rect">
+            <a:avLst/>
+          </a:prstGeom>
+          <a:noFill/>
+        </p:spPr>
+        <p:txBody>
+          <a:bodyPr wrap="none" lIns="45720" rIns="45720" anchor="t">
+            <a:spAutoFit/>
+          </a:bodyPr>
+          <a:lstStyle/>
+          <a:p>
             <a:pPr algn="r">
-              <a:defRPr sz="800">
-                <a:solidFill>
-                  <a:srgbClr val="5F5F5F"/>
-                </a:solidFill>
-              </a:defRPr>
-            </a:pPr>
-            <a:r>
-              <a:t>MDPO paper review | Slide 2</a:t>
+              <a:defRPr sz="800" b="0">
+                <a:solidFill>
+                  <a:srgbClr val="69707A"/>
+                </a:solidFill>
+              </a:defRPr>
+            </a:pPr>
+            <a:r>
+              <a:t>2</a:t>
             </a:r>
           </a:p>
         </p:txBody>
@@ -3404,7 +4315,7 @@
     <p:bg>
       <p:bgPr>
         <a:solidFill>
-          <a:srgbClr val="FAFAF8"/>
+          <a:srgbClr val="FCFCFA"/>
         </a:solidFill>
         <a:effectLst/>
       </p:bgPr>
@@ -3424,8 +4335,8 @@
         </p:nvSpPr>
         <p:spPr>
           <a:xfrm>
-            <a:off x="594360" y="411480"/>
-            <a:ext cx="10881360" cy="731520"/>
+            <a:off x="594360" y="384048"/>
+            <a:ext cx="10789920" cy="502920"/>
           </a:xfrm>
           <a:prstGeom prst="rect">
             <a:avLst/>
@@ -3433,20 +4344,20 @@
           <a:noFill/>
         </p:spPr>
         <p:txBody>
-          <a:bodyPr wrap="none">
+          <a:bodyPr wrap="none" lIns="45720" rIns="45720" anchor="t">
             <a:spAutoFit/>
           </a:bodyPr>
           <a:lstStyle/>
           <a:p>
-            <a:pPr>
-              <a:defRPr b="1" sz="3400">
-                <a:solidFill>
-                  <a:srgbClr val="1E2D46"/>
-                </a:solidFill>
-              </a:defRPr>
-            </a:pPr>
-            <a:r>
-              <a:t>Key Diagnosis</a:t>
+            <a:pPr algn="l">
+              <a:defRPr sz="3000" b="1">
+                <a:solidFill>
+                  <a:srgbClr val="162236"/>
+                </a:solidFill>
+              </a:defRPr>
+            </a:pPr>
+            <a:r>
+              <a:t>Core Diagnosis: Unconditional Preference</a:t>
             </a:r>
           </a:p>
         </p:txBody>
@@ -3459,8 +4370,8 @@
         </p:nvSpPr>
         <p:spPr>
           <a:xfrm>
-            <a:off x="822960" y="1417320"/>
-            <a:ext cx="10424160" cy="4389120"/>
+            <a:off x="621792" y="877824"/>
+            <a:ext cx="10424160" cy="320040"/>
           </a:xfrm>
           <a:prstGeom prst="rect">
             <a:avLst/>
@@ -3468,67 +4379,79 @@
           <a:noFill/>
         </p:spPr>
         <p:txBody>
-          <a:bodyPr wrap="none">
+          <a:bodyPr wrap="none" lIns="45720" rIns="45720" anchor="t">
             <a:spAutoFit/>
           </a:bodyPr>
           <a:lstStyle/>
           <a:p>
-            <a:pPr>
-              <a:spcAft>
-                <a:spcPts val="1400"/>
-              </a:spcAft>
-              <a:defRPr sz="2400">
-                <a:solidFill>
-                  <a:srgbClr val="232323"/>
-                </a:solidFill>
-              </a:defRPr>
-            </a:pPr>
-            <a:r>
-              <a:t>DPO without images performs similarly to DPO with images on MMHalBench.</a:t>
-            </a:r>
-          </a:p>
-          <a:p>
-            <a:pPr>
-              <a:spcAft>
-                <a:spcPts val="1400"/>
-              </a:spcAft>
-              <a:defRPr sz="2400">
-                <a:solidFill>
-                  <a:srgbClr val="232323"/>
-                </a:solidFill>
-              </a:defRPr>
-            </a:pPr>
-            <a:r>
-              <a:t>This reveals an unconditional preference problem.</a:t>
-            </a:r>
-          </a:p>
-          <a:p>
-            <a:pPr>
-              <a:spcAft>
-                <a:spcPts val="1400"/>
-              </a:spcAft>
-              <a:defRPr sz="2400">
-                <a:solidFill>
-                  <a:srgbClr val="232323"/>
-                </a:solidFill>
-              </a:defRPr>
-            </a:pPr>
-            <a:r>
-              <a:t>The model may optimize response quality without using the visual input.</a:t>
-            </a:r>
-          </a:p>
-        </p:txBody>
-      </p:sp>
-      <p:sp>
-        <p:nvSpPr>
-          <p:cNvPr id="4" name="TextBox 3"/>
+            <a:pPr algn="l">
+              <a:defRPr sz="1200" b="0">
+                <a:solidFill>
+                  <a:srgbClr val="69707A"/>
+                </a:solidFill>
+              </a:defRPr>
+            </a:pPr>
+            <a:r>
+              <a:t>The most convincing part of the paper is the no-image control.</a:t>
+            </a:r>
+          </a:p>
+        </p:txBody>
+      </p:sp>
+      <p:sp>
+        <p:nvSpPr>
+          <p:cNvPr id="4" name="Rectangle 3"/>
+          <p:cNvSpPr/>
+          <p:nvPr/>
+        </p:nvSpPr>
+        <p:spPr>
+          <a:xfrm>
+            <a:off x="621792" y="1170432"/>
+            <a:ext cx="1051560" cy="36576"/>
+          </a:xfrm>
+          <a:prstGeom prst="rect">
+            <a:avLst/>
+          </a:prstGeom>
+          <a:solidFill>
+            <a:srgbClr val="008080"/>
+          </a:solidFill>
+          <a:ln>
+            <a:solidFill>
+              <a:srgbClr val="008080"/>
+            </a:solidFill>
+          </a:ln>
+        </p:spPr>
+        <p:style>
+          <a:lnRef idx="1">
+            <a:schemeClr val="accent1"/>
+          </a:lnRef>
+          <a:fillRef idx="3">
+            <a:schemeClr val="accent1"/>
+          </a:fillRef>
+          <a:effectRef idx="2">
+            <a:schemeClr val="accent1"/>
+          </a:effectRef>
+          <a:fontRef idx="minor">
+            <a:schemeClr val="lt1"/>
+          </a:fontRef>
+        </p:style>
+        <p:txBody>
+          <a:bodyPr rtlCol="0" anchor="ctr"/>
+          <a:lstStyle/>
+          <a:p>
+            <a:pPr algn="ctr"/>
+          </a:p>
+        </p:txBody>
+      </p:sp>
+      <p:sp>
+        <p:nvSpPr>
+          <p:cNvPr id="5" name="TextBox 4"/>
           <p:cNvSpPr txBox="1"/>
           <p:nvPr/>
         </p:nvSpPr>
         <p:spPr>
           <a:xfrm>
-            <a:off x="502920" y="6263640"/>
-            <a:ext cx="11155680" cy="228600"/>
+            <a:off x="822960" y="1508760"/>
+            <a:ext cx="2743200" cy="310896"/>
           </a:xfrm>
           <a:prstGeom prst="rect">
             <a:avLst/>
@@ -3536,20 +4459,517 @@
           <a:noFill/>
         </p:spPr>
         <p:txBody>
-          <a:bodyPr wrap="none">
+          <a:bodyPr wrap="none" lIns="45720" rIns="45720" anchor="t">
             <a:spAutoFit/>
           </a:bodyPr>
           <a:lstStyle/>
           <a:p>
+            <a:pPr algn="ctr">
+              <a:defRPr sz="1600" b="1">
+                <a:solidFill>
+                  <a:srgbClr val="162236"/>
+                </a:solidFill>
+              </a:defRPr>
+            </a:pPr>
+            <a:r>
+              <a:t>DPO with images</a:t>
+            </a:r>
+          </a:p>
+        </p:txBody>
+      </p:sp>
+      <p:sp>
+        <p:nvSpPr>
+          <p:cNvPr id="6" name="TextBox 5"/>
+          <p:cNvSpPr txBox="1"/>
+          <p:nvPr/>
+        </p:nvSpPr>
+        <p:spPr>
+          <a:xfrm>
+            <a:off x="4663440" y="1508760"/>
+            <a:ext cx="2743200" cy="310896"/>
+          </a:xfrm>
+          <a:prstGeom prst="rect">
+            <a:avLst/>
+          </a:prstGeom>
+          <a:noFill/>
+        </p:spPr>
+        <p:txBody>
+          <a:bodyPr wrap="none" lIns="45720" rIns="45720" anchor="t">
+            <a:spAutoFit/>
+          </a:bodyPr>
+          <a:lstStyle/>
+          <a:p>
+            <a:pPr algn="ctr">
+              <a:defRPr sz="1600" b="1">
+                <a:solidFill>
+                  <a:srgbClr val="162236"/>
+                </a:solidFill>
+              </a:defRPr>
+            </a:pPr>
+            <a:r>
+              <a:t>DPO without images</a:t>
+            </a:r>
+          </a:p>
+        </p:txBody>
+      </p:sp>
+      <p:sp>
+        <p:nvSpPr>
+          <p:cNvPr id="7" name="TextBox 6"/>
+          <p:cNvSpPr txBox="1"/>
+          <p:nvPr/>
+        </p:nvSpPr>
+        <p:spPr>
+          <a:xfrm>
+            <a:off x="8321040" y="1508760"/>
+            <a:ext cx="2926080" cy="310896"/>
+          </a:xfrm>
+          <a:prstGeom prst="rect">
+            <a:avLst/>
+          </a:prstGeom>
+          <a:noFill/>
+        </p:spPr>
+        <p:txBody>
+          <a:bodyPr wrap="none" lIns="45720" rIns="45720" anchor="t">
+            <a:spAutoFit/>
+          </a:bodyPr>
+          <a:lstStyle/>
+          <a:p>
+            <a:pPr algn="ctr">
+              <a:defRPr sz="1600" b="1">
+                <a:solidFill>
+                  <a:srgbClr val="162236"/>
+                </a:solidFill>
+              </a:defRPr>
+            </a:pPr>
+            <a:r>
+              <a:t>Similar MMHalBench score</a:t>
+            </a:r>
+          </a:p>
+        </p:txBody>
+      </p:sp>
+      <p:sp>
+        <p:nvSpPr>
+          <p:cNvPr id="8" name="Rounded Rectangle 7"/>
+          <p:cNvSpPr/>
+          <p:nvPr/>
+        </p:nvSpPr>
+        <p:spPr>
+          <a:xfrm>
+            <a:off x="1143000" y="2084831"/>
+            <a:ext cx="2148840" cy="1143000"/>
+          </a:xfrm>
+          <a:prstGeom prst="roundRect">
+            <a:avLst/>
+          </a:prstGeom>
+          <a:solidFill>
+            <a:srgbClr val="FFFFFF"/>
+          </a:solidFill>
+          <a:ln w="25400">
+            <a:solidFill>
+              <a:srgbClr val="238756"/>
+            </a:solidFill>
+          </a:ln>
+        </p:spPr>
+        <p:style>
+          <a:lnRef idx="1">
+            <a:schemeClr val="accent1"/>
+          </a:lnRef>
+          <a:fillRef idx="3">
+            <a:schemeClr val="accent1"/>
+          </a:fillRef>
+          <a:effectRef idx="2">
+            <a:schemeClr val="accent1"/>
+          </a:effectRef>
+          <a:fontRef idx="minor">
+            <a:schemeClr val="lt1"/>
+          </a:fontRef>
+        </p:style>
+        <p:txBody>
+          <a:bodyPr rtlCol="0" anchor="ctr"/>
+          <a:lstStyle/>
+          <a:p>
+            <a:pPr algn="ctr"/>
+          </a:p>
+        </p:txBody>
+      </p:sp>
+      <p:sp>
+        <p:nvSpPr>
+          <p:cNvPr id="9" name="TextBox 8"/>
+          <p:cNvSpPr txBox="1"/>
+          <p:nvPr/>
+        </p:nvSpPr>
+        <p:spPr>
+          <a:xfrm>
+            <a:off x="1234440" y="2331720"/>
+            <a:ext cx="1965960" cy="640080"/>
+          </a:xfrm>
+          <a:prstGeom prst="rect">
+            <a:avLst/>
+          </a:prstGeom>
+          <a:noFill/>
+        </p:spPr>
+        <p:txBody>
+          <a:bodyPr wrap="none" lIns="45720" rIns="45720" anchor="t">
+            <a:spAutoFit/>
+          </a:bodyPr>
+          <a:lstStyle/>
+          <a:p>
+            <a:pPr algn="ctr">
+              <a:defRPr sz="1400" b="1">
+                <a:solidFill>
+                  <a:srgbClr val="23272F"/>
+                </a:solidFill>
+              </a:defRPr>
+            </a:pPr>
+            <a:r>
+              <a:t>Image + Question</a:t>
+            </a:r>
+            <a:br/>
+            <a:r>
+              <a:t>Chosen vs. Rejected</a:t>
+            </a:r>
+          </a:p>
+        </p:txBody>
+      </p:sp>
+      <p:sp>
+        <p:nvSpPr>
+          <p:cNvPr id="10" name="Rounded Rectangle 9"/>
+          <p:cNvSpPr/>
+          <p:nvPr/>
+        </p:nvSpPr>
+        <p:spPr>
+          <a:xfrm>
+            <a:off x="4983480" y="2084831"/>
+            <a:ext cx="2148840" cy="1143000"/>
+          </a:xfrm>
+          <a:prstGeom prst="roundRect">
+            <a:avLst/>
+          </a:prstGeom>
+          <a:solidFill>
+            <a:srgbClr val="FFFFFF"/>
+          </a:solidFill>
+          <a:ln w="25400">
+            <a:solidFill>
+              <a:srgbClr val="C2841C"/>
+            </a:solidFill>
+          </a:ln>
+        </p:spPr>
+        <p:style>
+          <a:lnRef idx="1">
+            <a:schemeClr val="accent1"/>
+          </a:lnRef>
+          <a:fillRef idx="3">
+            <a:schemeClr val="accent1"/>
+          </a:fillRef>
+          <a:effectRef idx="2">
+            <a:schemeClr val="accent1"/>
+          </a:effectRef>
+          <a:fontRef idx="minor">
+            <a:schemeClr val="lt1"/>
+          </a:fontRef>
+        </p:style>
+        <p:txBody>
+          <a:bodyPr rtlCol="0" anchor="ctr"/>
+          <a:lstStyle/>
+          <a:p>
+            <a:pPr algn="ctr"/>
+          </a:p>
+        </p:txBody>
+      </p:sp>
+      <p:sp>
+        <p:nvSpPr>
+          <p:cNvPr id="11" name="TextBox 10"/>
+          <p:cNvSpPr txBox="1"/>
+          <p:nvPr/>
+        </p:nvSpPr>
+        <p:spPr>
+          <a:xfrm>
+            <a:off x="5074920" y="2331720"/>
+            <a:ext cx="1965960" cy="640080"/>
+          </a:xfrm>
+          <a:prstGeom prst="rect">
+            <a:avLst/>
+          </a:prstGeom>
+          <a:noFill/>
+        </p:spPr>
+        <p:txBody>
+          <a:bodyPr wrap="none" lIns="45720" rIns="45720" anchor="t">
+            <a:spAutoFit/>
+          </a:bodyPr>
+          <a:lstStyle/>
+          <a:p>
+            <a:pPr algn="ctr">
+              <a:defRPr sz="1400" b="1">
+                <a:solidFill>
+                  <a:srgbClr val="23272F"/>
+                </a:solidFill>
+              </a:defRPr>
+            </a:pPr>
+            <a:r>
+              <a:t>Question only</a:t>
+            </a:r>
+            <a:br/>
+            <a:r>
+              <a:t>Chosen vs. Rejected</a:t>
+            </a:r>
+          </a:p>
+        </p:txBody>
+      </p:sp>
+      <p:sp>
+        <p:nvSpPr>
+          <p:cNvPr id="12" name="Rounded Rectangle 11"/>
+          <p:cNvSpPr/>
+          <p:nvPr/>
+        </p:nvSpPr>
+        <p:spPr>
+          <a:xfrm>
+            <a:off x="8641080" y="2084831"/>
+            <a:ext cx="2148840" cy="1143000"/>
+          </a:xfrm>
+          <a:prstGeom prst="roundRect">
+            <a:avLst/>
+          </a:prstGeom>
+          <a:solidFill>
+            <a:srgbClr val="FFFFFF"/>
+          </a:solidFill>
+          <a:ln w="25400">
+            <a:solidFill>
+              <a:srgbClr val="B43A3A"/>
+            </a:solidFill>
+          </a:ln>
+        </p:spPr>
+        <p:style>
+          <a:lnRef idx="1">
+            <a:schemeClr val="accent1"/>
+          </a:lnRef>
+          <a:fillRef idx="3">
+            <a:schemeClr val="accent1"/>
+          </a:fillRef>
+          <a:effectRef idx="2">
+            <a:schemeClr val="accent1"/>
+          </a:effectRef>
+          <a:fontRef idx="minor">
+            <a:schemeClr val="lt1"/>
+          </a:fontRef>
+        </p:style>
+        <p:txBody>
+          <a:bodyPr rtlCol="0" anchor="ctr"/>
+          <a:lstStyle/>
+          <a:p>
+            <a:pPr algn="ctr"/>
+          </a:p>
+        </p:txBody>
+      </p:sp>
+      <p:sp>
+        <p:nvSpPr>
+          <p:cNvPr id="13" name="TextBox 12"/>
+          <p:cNvSpPr txBox="1"/>
+          <p:nvPr/>
+        </p:nvSpPr>
+        <p:spPr>
+          <a:xfrm>
+            <a:off x="8732519" y="2331720"/>
+            <a:ext cx="1965960" cy="640080"/>
+          </a:xfrm>
+          <a:prstGeom prst="rect">
+            <a:avLst/>
+          </a:prstGeom>
+          <a:noFill/>
+        </p:spPr>
+        <p:txBody>
+          <a:bodyPr wrap="none" lIns="45720" rIns="45720" anchor="t">
+            <a:spAutoFit/>
+          </a:bodyPr>
+          <a:lstStyle/>
+          <a:p>
+            <a:pPr algn="ctr">
+              <a:defRPr sz="1400" b="1">
+                <a:solidFill>
+                  <a:srgbClr val="23272F"/>
+                </a:solidFill>
+              </a:defRPr>
+            </a:pPr>
+            <a:r>
+              <a:t>Visual grounding</a:t>
+            </a:r>
+            <a:br/>
+            <a:r>
+              <a:t>not guaranteed</a:t>
+            </a:r>
+          </a:p>
+        </p:txBody>
+      </p:sp>
+      <p:cxnSp>
+        <p:nvCxnSpPr>
+          <p:cNvPr id="14" name="Connector 13"/>
+          <p:cNvCxnSpPr/>
+          <p:nvPr/>
+        </p:nvCxnSpPr>
+        <p:spPr>
+          <a:xfrm>
+            <a:off x="3337560" y="2651760"/>
+            <a:ext cx="1554480" cy="0"/>
+          </a:xfrm>
+          <a:prstGeom prst="line">
+            <a:avLst/>
+          </a:prstGeom>
+          <a:ln w="19050">
+            <a:solidFill>
+              <a:srgbClr val="69707A"/>
+            </a:solidFill>
+          </a:ln>
+        </p:spPr>
+        <p:style>
+          <a:lnRef idx="2">
+            <a:schemeClr val="accent1"/>
+          </a:lnRef>
+          <a:fillRef idx="0">
+            <a:schemeClr val="accent1"/>
+          </a:fillRef>
+          <a:effectRef idx="1">
+            <a:schemeClr val="accent1"/>
+          </a:effectRef>
+          <a:fontRef idx="minor">
+            <a:schemeClr val="tx1"/>
+          </a:fontRef>
+        </p:style>
+      </p:cxnSp>
+      <p:cxnSp>
+        <p:nvCxnSpPr>
+          <p:cNvPr id="15" name="Connector 14"/>
+          <p:cNvCxnSpPr/>
+          <p:nvPr/>
+        </p:nvCxnSpPr>
+        <p:spPr>
+          <a:xfrm>
+            <a:off x="7178040" y="2651760"/>
+            <a:ext cx="1371600" cy="0"/>
+          </a:xfrm>
+          <a:prstGeom prst="line">
+            <a:avLst/>
+          </a:prstGeom>
+          <a:ln w="19050">
+            <a:solidFill>
+              <a:srgbClr val="69707A"/>
+            </a:solidFill>
+          </a:ln>
+        </p:spPr>
+        <p:style>
+          <a:lnRef idx="2">
+            <a:schemeClr val="accent1"/>
+          </a:lnRef>
+          <a:fillRef idx="0">
+            <a:schemeClr val="accent1"/>
+          </a:fillRef>
+          <a:effectRef idx="1">
+            <a:schemeClr val="accent1"/>
+          </a:effectRef>
+          <a:fontRef idx="minor">
+            <a:schemeClr val="tx1"/>
+          </a:fontRef>
+        </p:style>
+      </p:cxnSp>
+      <p:sp>
+        <p:nvSpPr>
+          <p:cNvPr id="16" name="TextBox 15"/>
+          <p:cNvSpPr txBox="1"/>
+          <p:nvPr/>
+        </p:nvSpPr>
+        <p:spPr>
+          <a:xfrm>
+            <a:off x="914400" y="4224528"/>
+            <a:ext cx="10424160" cy="713232"/>
+          </a:xfrm>
+          <a:prstGeom prst="rect">
+            <a:avLst/>
+          </a:prstGeom>
+          <a:noFill/>
+        </p:spPr>
+        <p:txBody>
+          <a:bodyPr wrap="none" lIns="45720" rIns="45720" anchor="t">
+            <a:spAutoFit/>
+          </a:bodyPr>
+          <a:lstStyle/>
+          <a:p>
+            <a:pPr algn="l">
+              <a:defRPr sz="1800" b="0">
+                <a:solidFill>
+                  <a:srgbClr val="23272F"/>
+                </a:solidFill>
+              </a:defRPr>
+            </a:pPr>
+            <a:r>
+              <a:t>Reviewer take: this diagnostic is strong because it isolates the failure mode. If removing images barely hurts DPO, the objective is not reliably enforcing multimodal conditioning.</a:t>
+            </a:r>
+          </a:p>
+        </p:txBody>
+      </p:sp>
+      <p:sp>
+        <p:nvSpPr>
+          <p:cNvPr id="17" name="TextBox 16"/>
+          <p:cNvSpPr txBox="1"/>
+          <p:nvPr/>
+        </p:nvSpPr>
+        <p:spPr>
+          <a:xfrm>
+            <a:off x="594360" y="6446520"/>
+            <a:ext cx="5029200" cy="228600"/>
+          </a:xfrm>
+          <a:prstGeom prst="rect">
+            <a:avLst/>
+          </a:prstGeom>
+          <a:noFill/>
+        </p:spPr>
+        <p:txBody>
+          <a:bodyPr wrap="none" lIns="45720" rIns="45720" anchor="t">
+            <a:spAutoFit/>
+          </a:bodyPr>
+          <a:lstStyle/>
+          <a:p>
+            <a:pPr algn="l">
+              <a:defRPr sz="800" b="0">
+                <a:solidFill>
+                  <a:srgbClr val="69707A"/>
+                </a:solidFill>
+              </a:defRPr>
+            </a:pPr>
+            <a:r>
+              <a:t>MDPO paper review</a:t>
+            </a:r>
+          </a:p>
+        </p:txBody>
+      </p:sp>
+      <p:sp>
+        <p:nvSpPr>
+          <p:cNvPr id="18" name="TextBox 17"/>
+          <p:cNvSpPr txBox="1"/>
+          <p:nvPr/>
+        </p:nvSpPr>
+        <p:spPr>
+          <a:xfrm>
+            <a:off x="10698480" y="6446520"/>
+            <a:ext cx="822960" cy="228600"/>
+          </a:xfrm>
+          <a:prstGeom prst="rect">
+            <a:avLst/>
+          </a:prstGeom>
+          <a:noFill/>
+        </p:spPr>
+        <p:txBody>
+          <a:bodyPr wrap="none" lIns="45720" rIns="45720" anchor="t">
+            <a:spAutoFit/>
+          </a:bodyPr>
+          <a:lstStyle/>
+          <a:p>
             <a:pPr algn="r">
-              <a:defRPr sz="800">
-                <a:solidFill>
-                  <a:srgbClr val="5F5F5F"/>
-                </a:solidFill>
-              </a:defRPr>
-            </a:pPr>
-            <a:r>
-              <a:t>MDPO paper review | Slide 3</a:t>
+              <a:defRPr sz="800" b="0">
+                <a:solidFill>
+                  <a:srgbClr val="69707A"/>
+                </a:solidFill>
+              </a:defRPr>
+            </a:pPr>
+            <a:r>
+              <a:t>3</a:t>
             </a:r>
           </a:p>
         </p:txBody>
@@ -3568,7 +4988,7 @@
     <p:bg>
       <p:bgPr>
         <a:solidFill>
-          <a:srgbClr val="FAFAF8"/>
+          <a:srgbClr val="FCFCFA"/>
         </a:solidFill>
         <a:effectLst/>
       </p:bgPr>
@@ -3588,8 +5008,8 @@
         </p:nvSpPr>
         <p:spPr>
           <a:xfrm>
-            <a:off x="594360" y="411480"/>
-            <a:ext cx="10881360" cy="731520"/>
+            <a:off x="594360" y="384048"/>
+            <a:ext cx="10789920" cy="502920"/>
           </a:xfrm>
           <a:prstGeom prst="rect">
             <a:avLst/>
@@ -3597,20 +5017,20 @@
           <a:noFill/>
         </p:spPr>
         <p:txBody>
-          <a:bodyPr wrap="none">
+          <a:bodyPr wrap="none" lIns="45720" rIns="45720" anchor="t">
             <a:spAutoFit/>
           </a:bodyPr>
           <a:lstStyle/>
           <a:p>
-            <a:pPr>
-              <a:defRPr b="1" sz="3400">
-                <a:solidFill>
-                  <a:srgbClr val="1E2D46"/>
-                </a:solidFill>
-              </a:defRPr>
-            </a:pPr>
-            <a:r>
-              <a:t>MDPO Method</a:t>
+            <a:pPr algn="l">
+              <a:defRPr sz="3000" b="1">
+                <a:solidFill>
+                  <a:srgbClr val="162236"/>
+                </a:solidFill>
+              </a:defRPr>
+            </a:pPr>
+            <a:r>
+              <a:t>MDPO: What Changes?</a:t>
             </a:r>
           </a:p>
         </p:txBody>
@@ -3623,8 +5043,8 @@
         </p:nvSpPr>
         <p:spPr>
           <a:xfrm>
-            <a:off x="822960" y="1417320"/>
-            <a:ext cx="10424160" cy="4389120"/>
+            <a:off x="621792" y="877824"/>
+            <a:ext cx="10424160" cy="320040"/>
           </a:xfrm>
           <a:prstGeom prst="rect">
             <a:avLst/>
@@ -3632,82 +5052,540 @@
           <a:noFill/>
         </p:spPr>
         <p:txBody>
-          <a:bodyPr wrap="none">
+          <a:bodyPr wrap="none" lIns="45720" rIns="45720" anchor="t">
             <a:spAutoFit/>
           </a:bodyPr>
           <a:lstStyle/>
           <a:p>
+            <a:pPr algn="l">
+              <a:defRPr sz="1200" b="0">
+                <a:solidFill>
+                  <a:srgbClr val="69707A"/>
+                </a:solidFill>
+              </a:defRPr>
+            </a:pPr>
+            <a:r>
+              <a:t>The method adds two terms to standard multimodal DPO.</a:t>
+            </a:r>
+          </a:p>
+        </p:txBody>
+      </p:sp>
+      <p:sp>
+        <p:nvSpPr>
+          <p:cNvPr id="4" name="Rectangle 3"/>
+          <p:cNvSpPr/>
+          <p:nvPr/>
+        </p:nvSpPr>
+        <p:spPr>
+          <a:xfrm>
+            <a:off x="621792" y="1170432"/>
+            <a:ext cx="1051560" cy="36576"/>
+          </a:xfrm>
+          <a:prstGeom prst="rect">
+            <a:avLst/>
+          </a:prstGeom>
+          <a:solidFill>
+            <a:srgbClr val="008080"/>
+          </a:solidFill>
+          <a:ln>
+            <a:solidFill>
+              <a:srgbClr val="008080"/>
+            </a:solidFill>
+          </a:ln>
+        </p:spPr>
+        <p:style>
+          <a:lnRef idx="1">
+            <a:schemeClr val="accent1"/>
+          </a:lnRef>
+          <a:fillRef idx="3">
+            <a:schemeClr val="accent1"/>
+          </a:fillRef>
+          <a:effectRef idx="2">
+            <a:schemeClr val="accent1"/>
+          </a:effectRef>
+          <a:fontRef idx="minor">
+            <a:schemeClr val="lt1"/>
+          </a:fontRef>
+        </p:style>
+        <p:txBody>
+          <a:bodyPr rtlCol="0" anchor="ctr"/>
+          <a:lstStyle/>
+          <a:p>
+            <a:pPr algn="ctr"/>
+          </a:p>
+        </p:txBody>
+      </p:sp>
+      <p:sp>
+        <p:nvSpPr>
+          <p:cNvPr id="5" name="Rounded Rectangle 4"/>
+          <p:cNvSpPr/>
+          <p:nvPr/>
+        </p:nvSpPr>
+        <p:spPr>
+          <a:xfrm>
+            <a:off x="731520" y="1508760"/>
+            <a:ext cx="3474720" cy="3291840"/>
+          </a:xfrm>
+          <a:prstGeom prst="roundRect">
+            <a:avLst/>
+          </a:prstGeom>
+          <a:solidFill>
+            <a:srgbClr val="FFFFFF"/>
+          </a:solidFill>
+          <a:ln>
+            <a:solidFill>
+              <a:srgbClr val="DADEE2"/>
+            </a:solidFill>
+          </a:ln>
+        </p:spPr>
+        <p:style>
+          <a:lnRef idx="1">
+            <a:schemeClr val="accent1"/>
+          </a:lnRef>
+          <a:fillRef idx="3">
+            <a:schemeClr val="accent1"/>
+          </a:fillRef>
+          <a:effectRef idx="2">
+            <a:schemeClr val="accent1"/>
+          </a:effectRef>
+          <a:fontRef idx="minor">
+            <a:schemeClr val="lt1"/>
+          </a:fontRef>
+        </p:style>
+        <p:txBody>
+          <a:bodyPr rtlCol="0" anchor="ctr"/>
+          <a:lstStyle/>
+          <a:p>
+            <a:pPr algn="ctr"/>
+          </a:p>
+        </p:txBody>
+      </p:sp>
+      <p:sp>
+        <p:nvSpPr>
+          <p:cNvPr id="6" name="Rectangle 5"/>
+          <p:cNvSpPr/>
+          <p:nvPr/>
+        </p:nvSpPr>
+        <p:spPr>
+          <a:xfrm>
+            <a:off x="731520" y="1508760"/>
+            <a:ext cx="73152" cy="3291840"/>
+          </a:xfrm>
+          <a:prstGeom prst="rect">
+            <a:avLst/>
+          </a:prstGeom>
+          <a:solidFill>
+            <a:srgbClr val="285E96"/>
+          </a:solidFill>
+          <a:ln>
+            <a:solidFill>
+              <a:srgbClr val="285E96"/>
+            </a:solidFill>
+          </a:ln>
+        </p:spPr>
+        <p:style>
+          <a:lnRef idx="1">
+            <a:schemeClr val="accent1"/>
+          </a:lnRef>
+          <a:fillRef idx="3">
+            <a:schemeClr val="accent1"/>
+          </a:fillRef>
+          <a:effectRef idx="2">
+            <a:schemeClr val="accent1"/>
+          </a:effectRef>
+          <a:fontRef idx="minor">
+            <a:schemeClr val="lt1"/>
+          </a:fontRef>
+        </p:style>
+        <p:txBody>
+          <a:bodyPr rtlCol="0" anchor="ctr"/>
+          <a:lstStyle/>
+          <a:p>
+            <a:pPr algn="ctr"/>
+          </a:p>
+        </p:txBody>
+      </p:sp>
+      <p:sp>
+        <p:nvSpPr>
+          <p:cNvPr id="7" name="TextBox 6"/>
+          <p:cNvSpPr txBox="1"/>
+          <p:nvPr/>
+        </p:nvSpPr>
+        <p:spPr>
+          <a:xfrm>
+            <a:off x="932688" y="1673351"/>
+            <a:ext cx="3127248" cy="292608"/>
+          </a:xfrm>
+          <a:prstGeom prst="rect">
+            <a:avLst/>
+          </a:prstGeom>
+          <a:noFill/>
+        </p:spPr>
+        <p:txBody>
+          <a:bodyPr wrap="none" lIns="45720" rIns="45720" anchor="t">
+            <a:spAutoFit/>
+          </a:bodyPr>
+          <a:lstStyle/>
+          <a:p>
+            <a:pPr algn="l">
+              <a:defRPr sz="1600" b="1">
+                <a:solidFill>
+                  <a:srgbClr val="162236"/>
+                </a:solidFill>
+              </a:defRPr>
+            </a:pPr>
+            <a:r>
+              <a:t>1. Standard DPO</a:t>
+            </a:r>
+          </a:p>
+        </p:txBody>
+      </p:sp>
+      <p:sp>
+        <p:nvSpPr>
+          <p:cNvPr id="8" name="TextBox 7"/>
+          <p:cNvSpPr txBox="1"/>
+          <p:nvPr/>
+        </p:nvSpPr>
+        <p:spPr>
+          <a:xfrm>
+            <a:off x="932688" y="2075688"/>
+            <a:ext cx="3090672" cy="2615184"/>
+          </a:xfrm>
+          <a:prstGeom prst="rect">
+            <a:avLst/>
+          </a:prstGeom>
+          <a:noFill/>
+        </p:spPr>
+        <p:txBody>
+          <a:bodyPr wrap="square">
+            <a:spAutoFit/>
+          </a:bodyPr>
+          <a:lstStyle/>
+          <a:p>
             <a:pPr>
               <a:spcAft>
-                <a:spcPts val="1400"/>
+                <a:spcPts val="900"/>
               </a:spcAft>
-              <a:defRPr sz="2400">
-                <a:solidFill>
-                  <a:srgbClr val="232323"/>
-                </a:solidFill>
-              </a:defRPr>
-            </a:pPr>
-            <a:r>
-              <a:t>Keep the standard multimodal DPO objective.</a:t>
+              <a:defRPr sz="1300">
+                <a:solidFill>
+                  <a:srgbClr val="23272F"/>
+                </a:solidFill>
+              </a:defRPr>
+            </a:pPr>
+            <a:r>
+              <a:t>Learns preference between chosen and rejected responses.</a:t>
             </a:r>
           </a:p>
           <a:p>
             <a:pPr>
               <a:spcAft>
-                <a:spcPts val="1400"/>
+                <a:spcPts val="900"/>
               </a:spcAft>
-              <a:defRPr sz="2400">
-                <a:solidFill>
-                  <a:srgbClr val="232323"/>
-                </a:solidFill>
-              </a:defRPr>
-            </a:pPr>
-            <a:r>
-              <a:t>Add conditional preference optimization over image pairs.</a:t>
-            </a:r>
-          </a:p>
+              <a:defRPr sz="1300">
+                <a:solidFill>
+                  <a:srgbClr val="23272F"/>
+                </a:solidFill>
+              </a:defRPr>
+            </a:pPr>
+            <a:r>
+              <a:t>Risk: may rely on text-only priors.</a:t>
+            </a:r>
+          </a:p>
+        </p:txBody>
+      </p:sp>
+      <p:sp>
+        <p:nvSpPr>
+          <p:cNvPr id="9" name="Rounded Rectangle 8"/>
+          <p:cNvSpPr/>
+          <p:nvPr/>
+        </p:nvSpPr>
+        <p:spPr>
+          <a:xfrm>
+            <a:off x="4434840" y="1508760"/>
+            <a:ext cx="3474720" cy="3291840"/>
+          </a:xfrm>
+          <a:prstGeom prst="roundRect">
+            <a:avLst/>
+          </a:prstGeom>
+          <a:solidFill>
+            <a:srgbClr val="E0F4EE"/>
+          </a:solidFill>
+          <a:ln>
+            <a:solidFill>
+              <a:srgbClr val="DADEE2"/>
+            </a:solidFill>
+          </a:ln>
+        </p:spPr>
+        <p:style>
+          <a:lnRef idx="1">
+            <a:schemeClr val="accent1"/>
+          </a:lnRef>
+          <a:fillRef idx="3">
+            <a:schemeClr val="accent1"/>
+          </a:fillRef>
+          <a:effectRef idx="2">
+            <a:schemeClr val="accent1"/>
+          </a:effectRef>
+          <a:fontRef idx="minor">
+            <a:schemeClr val="lt1"/>
+          </a:fontRef>
+        </p:style>
+        <p:txBody>
+          <a:bodyPr rtlCol="0" anchor="ctr"/>
+          <a:lstStyle/>
+          <a:p>
+            <a:pPr algn="ctr"/>
+          </a:p>
+        </p:txBody>
+      </p:sp>
+      <p:sp>
+        <p:nvSpPr>
+          <p:cNvPr id="10" name="Rectangle 9"/>
+          <p:cNvSpPr/>
+          <p:nvPr/>
+        </p:nvSpPr>
+        <p:spPr>
+          <a:xfrm>
+            <a:off x="4434840" y="1508760"/>
+            <a:ext cx="73152" cy="3291840"/>
+          </a:xfrm>
+          <a:prstGeom prst="rect">
+            <a:avLst/>
+          </a:prstGeom>
+          <a:solidFill>
+            <a:srgbClr val="008080"/>
+          </a:solidFill>
+          <a:ln>
+            <a:solidFill>
+              <a:srgbClr val="008080"/>
+            </a:solidFill>
+          </a:ln>
+        </p:spPr>
+        <p:style>
+          <a:lnRef idx="1">
+            <a:schemeClr val="accent1"/>
+          </a:lnRef>
+          <a:fillRef idx="3">
+            <a:schemeClr val="accent1"/>
+          </a:fillRef>
+          <a:effectRef idx="2">
+            <a:schemeClr val="accent1"/>
+          </a:effectRef>
+          <a:fontRef idx="minor">
+            <a:schemeClr val="lt1"/>
+          </a:fontRef>
+        </p:style>
+        <p:txBody>
+          <a:bodyPr rtlCol="0" anchor="ctr"/>
+          <a:lstStyle/>
+          <a:p>
+            <a:pPr algn="ctr"/>
+          </a:p>
+        </p:txBody>
+      </p:sp>
+      <p:sp>
+        <p:nvSpPr>
+          <p:cNvPr id="11" name="TextBox 10"/>
+          <p:cNvSpPr txBox="1"/>
+          <p:nvPr/>
+        </p:nvSpPr>
+        <p:spPr>
+          <a:xfrm>
+            <a:off x="4636007" y="1673351"/>
+            <a:ext cx="3127248" cy="292608"/>
+          </a:xfrm>
+          <a:prstGeom prst="rect">
+            <a:avLst/>
+          </a:prstGeom>
+          <a:noFill/>
+        </p:spPr>
+        <p:txBody>
+          <a:bodyPr wrap="none" lIns="45720" rIns="45720" anchor="t">
+            <a:spAutoFit/>
+          </a:bodyPr>
+          <a:lstStyle/>
+          <a:p>
+            <a:pPr algn="l">
+              <a:defRPr sz="1600" b="1">
+                <a:solidFill>
+                  <a:srgbClr val="162236"/>
+                </a:solidFill>
+              </a:defRPr>
+            </a:pPr>
+            <a:r>
+              <a:t>2. Conditional Preference</a:t>
+            </a:r>
+          </a:p>
+        </p:txBody>
+      </p:sp>
+      <p:sp>
+        <p:nvSpPr>
+          <p:cNvPr id="12" name="TextBox 11"/>
+          <p:cNvSpPr txBox="1"/>
+          <p:nvPr/>
+        </p:nvSpPr>
+        <p:spPr>
+          <a:xfrm>
+            <a:off x="4636007" y="2075688"/>
+            <a:ext cx="3090672" cy="2615184"/>
+          </a:xfrm>
+          <a:prstGeom prst="rect">
+            <a:avLst/>
+          </a:prstGeom>
+          <a:noFill/>
+        </p:spPr>
+        <p:txBody>
+          <a:bodyPr wrap="square">
+            <a:spAutoFit/>
+          </a:bodyPr>
+          <a:lstStyle/>
           <a:p>
             <a:pPr>
               <a:spcAft>
-                <a:spcPts val="1400"/>
+                <a:spcPts val="900"/>
               </a:spcAft>
-              <a:defRPr sz="2400">
-                <a:solidFill>
-                  <a:srgbClr val="232323"/>
-                </a:solidFill>
-              </a:defRPr>
-            </a:pPr>
-            <a:r>
-              <a:t>Use cropped/degraded images as hard negatives.</a:t>
+              <a:defRPr sz="1300">
+                <a:solidFill>
+                  <a:srgbClr val="23272F"/>
+                </a:solidFill>
+              </a:defRPr>
+            </a:pPr>
+            <a:r>
+              <a:t>Keeps question and response fixed.</a:t>
             </a:r>
           </a:p>
           <a:p>
             <a:pPr>
               <a:spcAft>
-                <a:spcPts val="1400"/>
+                <a:spcPts val="900"/>
               </a:spcAft>
-              <a:defRPr sz="2400">
-                <a:solidFill>
-                  <a:srgbClr val="232323"/>
-                </a:solidFill>
-              </a:defRPr>
-            </a:pPr>
-            <a:r>
-              <a:t>Add anchored preference optimization for chosen responses.</a:t>
-            </a:r>
-          </a:p>
-        </p:txBody>
-      </p:sp>
-      <p:sp>
-        <p:nvSpPr>
-          <p:cNvPr id="4" name="TextBox 3"/>
+              <a:defRPr sz="1300">
+                <a:solidFill>
+                  <a:srgbClr val="23272F"/>
+                </a:solidFill>
+              </a:defRPr>
+            </a:pPr>
+            <a:r>
+              <a:t>Contrasts correct image with degraded image.</a:t>
+            </a:r>
+          </a:p>
+          <a:p>
+            <a:pPr>
+              <a:spcAft>
+                <a:spcPts val="900"/>
+              </a:spcAft>
+              <a:defRPr sz="1300">
+                <a:solidFill>
+                  <a:srgbClr val="23272F"/>
+                </a:solidFill>
+              </a:defRPr>
+            </a:pPr>
+            <a:r>
+              <a:t>Forces visual evidence to matter.</a:t>
+            </a:r>
+          </a:p>
+        </p:txBody>
+      </p:sp>
+      <p:sp>
+        <p:nvSpPr>
+          <p:cNvPr id="13" name="Rounded Rectangle 12"/>
+          <p:cNvSpPr/>
+          <p:nvPr/>
+        </p:nvSpPr>
+        <p:spPr>
+          <a:xfrm>
+            <a:off x="8138160" y="1508760"/>
+            <a:ext cx="3474720" cy="3291840"/>
+          </a:xfrm>
+          <a:prstGeom prst="roundRect">
+            <a:avLst/>
+          </a:prstGeom>
+          <a:solidFill>
+            <a:srgbClr val="FFF4E6"/>
+          </a:solidFill>
+          <a:ln>
+            <a:solidFill>
+              <a:srgbClr val="DADEE2"/>
+            </a:solidFill>
+          </a:ln>
+        </p:spPr>
+        <p:style>
+          <a:lnRef idx="1">
+            <a:schemeClr val="accent1"/>
+          </a:lnRef>
+          <a:fillRef idx="3">
+            <a:schemeClr val="accent1"/>
+          </a:fillRef>
+          <a:effectRef idx="2">
+            <a:schemeClr val="accent1"/>
+          </a:effectRef>
+          <a:fontRef idx="minor">
+            <a:schemeClr val="lt1"/>
+          </a:fontRef>
+        </p:style>
+        <p:txBody>
+          <a:bodyPr rtlCol="0" anchor="ctr"/>
+          <a:lstStyle/>
+          <a:p>
+            <a:pPr algn="ctr"/>
+          </a:p>
+        </p:txBody>
+      </p:sp>
+      <p:sp>
+        <p:nvSpPr>
+          <p:cNvPr id="14" name="Rectangle 13"/>
+          <p:cNvSpPr/>
+          <p:nvPr/>
+        </p:nvSpPr>
+        <p:spPr>
+          <a:xfrm>
+            <a:off x="8138160" y="1508760"/>
+            <a:ext cx="73152" cy="3291840"/>
+          </a:xfrm>
+          <a:prstGeom prst="rect">
+            <a:avLst/>
+          </a:prstGeom>
+          <a:solidFill>
+            <a:srgbClr val="C2841C"/>
+          </a:solidFill>
+          <a:ln>
+            <a:solidFill>
+              <a:srgbClr val="C2841C"/>
+            </a:solidFill>
+          </a:ln>
+        </p:spPr>
+        <p:style>
+          <a:lnRef idx="1">
+            <a:schemeClr val="accent1"/>
+          </a:lnRef>
+          <a:fillRef idx="3">
+            <a:schemeClr val="accent1"/>
+          </a:fillRef>
+          <a:effectRef idx="2">
+            <a:schemeClr val="accent1"/>
+          </a:effectRef>
+          <a:fontRef idx="minor">
+            <a:schemeClr val="lt1"/>
+          </a:fontRef>
+        </p:style>
+        <p:txBody>
+          <a:bodyPr rtlCol="0" anchor="ctr"/>
+          <a:lstStyle/>
+          <a:p>
+            <a:pPr algn="ctr"/>
+          </a:p>
+        </p:txBody>
+      </p:sp>
+      <p:sp>
+        <p:nvSpPr>
+          <p:cNvPr id="15" name="TextBox 14"/>
           <p:cNvSpPr txBox="1"/>
           <p:nvPr/>
         </p:nvSpPr>
         <p:spPr>
           <a:xfrm>
-            <a:off x="502920" y="6263640"/>
-            <a:ext cx="11155680" cy="228600"/>
+            <a:off x="8339328" y="1673351"/>
+            <a:ext cx="3127248" cy="292608"/>
           </a:xfrm>
           <a:prstGeom prst="rect">
             <a:avLst/>
@@ -3715,20 +5593,178 @@
           <a:noFill/>
         </p:spPr>
         <p:txBody>
-          <a:bodyPr wrap="none">
+          <a:bodyPr wrap="none" lIns="45720" rIns="45720" anchor="t">
             <a:spAutoFit/>
           </a:bodyPr>
           <a:lstStyle/>
           <a:p>
+            <a:pPr algn="l">
+              <a:defRPr sz="1600" b="1">
+                <a:solidFill>
+                  <a:srgbClr val="162236"/>
+                </a:solidFill>
+              </a:defRPr>
+            </a:pPr>
+            <a:r>
+              <a:t>3. Anchor Term</a:t>
+            </a:r>
+          </a:p>
+        </p:txBody>
+      </p:sp>
+      <p:sp>
+        <p:nvSpPr>
+          <p:cNvPr id="16" name="TextBox 15"/>
+          <p:cNvSpPr txBox="1"/>
+          <p:nvPr/>
+        </p:nvSpPr>
+        <p:spPr>
+          <a:xfrm>
+            <a:off x="8339328" y="2075688"/>
+            <a:ext cx="3090672" cy="2615184"/>
+          </a:xfrm>
+          <a:prstGeom prst="rect">
+            <a:avLst/>
+          </a:prstGeom>
+          <a:noFill/>
+        </p:spPr>
+        <p:txBody>
+          <a:bodyPr wrap="square">
+            <a:spAutoFit/>
+          </a:bodyPr>
+          <a:lstStyle/>
+          <a:p>
+            <a:pPr>
+              <a:spcAft>
+                <a:spcPts val="900"/>
+              </a:spcAft>
+              <a:defRPr sz="1300">
+                <a:solidFill>
+                  <a:srgbClr val="23272F"/>
+                </a:solidFill>
+              </a:defRPr>
+            </a:pPr>
+            <a:r>
+              <a:t>Regularizes chosen-response reward.</a:t>
+            </a:r>
+          </a:p>
+          <a:p>
+            <a:pPr>
+              <a:spcAft>
+                <a:spcPts val="900"/>
+              </a:spcAft>
+              <a:defRPr sz="1300">
+                <a:solidFill>
+                  <a:srgbClr val="23272F"/>
+                </a:solidFill>
+              </a:defRPr>
+            </a:pPr>
+            <a:r>
+              <a:t>Prevents relative preference learning from lowering good-response likelihood.</a:t>
+            </a:r>
+          </a:p>
+        </p:txBody>
+      </p:sp>
+      <p:sp>
+        <p:nvSpPr>
+          <p:cNvPr id="17" name="TextBox 16"/>
+          <p:cNvSpPr txBox="1"/>
+          <p:nvPr/>
+        </p:nvSpPr>
+        <p:spPr>
+          <a:xfrm>
+            <a:off x="960120" y="5285232"/>
+            <a:ext cx="10241280" cy="384048"/>
+          </a:xfrm>
+          <a:prstGeom prst="rect">
+            <a:avLst/>
+          </a:prstGeom>
+          <a:noFill/>
+        </p:spPr>
+        <p:txBody>
+          <a:bodyPr wrap="none" lIns="45720" rIns="45720" anchor="t">
+            <a:spAutoFit/>
+          </a:bodyPr>
+          <a:lstStyle/>
+          <a:p>
+            <a:pPr algn="ctr">
+              <a:defRPr sz="1700" b="1">
+                <a:solidFill>
+                  <a:srgbClr val="162236"/>
+                </a:solidFill>
+              </a:defRPr>
+            </a:pPr>
+            <a:r>
+              <a:t>MDPO = multimodal DPO + image-conditional preference optimization + anchored preference optimization</a:t>
+            </a:r>
+          </a:p>
+        </p:txBody>
+      </p:sp>
+      <p:sp>
+        <p:nvSpPr>
+          <p:cNvPr id="18" name="TextBox 17"/>
+          <p:cNvSpPr txBox="1"/>
+          <p:nvPr/>
+        </p:nvSpPr>
+        <p:spPr>
+          <a:xfrm>
+            <a:off x="594360" y="6446520"/>
+            <a:ext cx="5029200" cy="228600"/>
+          </a:xfrm>
+          <a:prstGeom prst="rect">
+            <a:avLst/>
+          </a:prstGeom>
+          <a:noFill/>
+        </p:spPr>
+        <p:txBody>
+          <a:bodyPr wrap="none" lIns="45720" rIns="45720" anchor="t">
+            <a:spAutoFit/>
+          </a:bodyPr>
+          <a:lstStyle/>
+          <a:p>
+            <a:pPr algn="l">
+              <a:defRPr sz="800" b="0">
+                <a:solidFill>
+                  <a:srgbClr val="69707A"/>
+                </a:solidFill>
+              </a:defRPr>
+            </a:pPr>
+            <a:r>
+              <a:t>MDPO paper review</a:t>
+            </a:r>
+          </a:p>
+        </p:txBody>
+      </p:sp>
+      <p:sp>
+        <p:nvSpPr>
+          <p:cNvPr id="19" name="TextBox 18"/>
+          <p:cNvSpPr txBox="1"/>
+          <p:nvPr/>
+        </p:nvSpPr>
+        <p:spPr>
+          <a:xfrm>
+            <a:off x="10698480" y="6446520"/>
+            <a:ext cx="822960" cy="228600"/>
+          </a:xfrm>
+          <a:prstGeom prst="rect">
+            <a:avLst/>
+          </a:prstGeom>
+          <a:noFill/>
+        </p:spPr>
+        <p:txBody>
+          <a:bodyPr wrap="none" lIns="45720" rIns="45720" anchor="t">
+            <a:spAutoFit/>
+          </a:bodyPr>
+          <a:lstStyle/>
+          <a:p>
             <a:pPr algn="r">
-              <a:defRPr sz="800">
-                <a:solidFill>
-                  <a:srgbClr val="5F5F5F"/>
-                </a:solidFill>
-              </a:defRPr>
-            </a:pPr>
-            <a:r>
-              <a:t>MDPO paper review | Slide 4</a:t>
+              <a:defRPr sz="800" b="0">
+                <a:solidFill>
+                  <a:srgbClr val="69707A"/>
+                </a:solidFill>
+              </a:defRPr>
+            </a:pPr>
+            <a:r>
+              <a:t>4</a:t>
             </a:r>
           </a:p>
         </p:txBody>
@@ -3747,7 +5783,7 @@
     <p:bg>
       <p:bgPr>
         <a:solidFill>
-          <a:srgbClr val="FAFAF8"/>
+          <a:srgbClr val="FCFCFA"/>
         </a:solidFill>
         <a:effectLst/>
       </p:bgPr>
@@ -3767,8 +5803,8 @@
         </p:nvSpPr>
         <p:spPr>
           <a:xfrm>
-            <a:off x="594360" y="411480"/>
-            <a:ext cx="10881360" cy="731520"/>
+            <a:off x="594360" y="384048"/>
+            <a:ext cx="10789920" cy="502920"/>
           </a:xfrm>
           <a:prstGeom prst="rect">
             <a:avLst/>
@@ -3776,20 +5812,20 @@
           <a:noFill/>
         </p:spPr>
         <p:txBody>
-          <a:bodyPr wrap="none">
+          <a:bodyPr wrap="none" lIns="45720" rIns="45720" anchor="t">
             <a:spAutoFit/>
           </a:bodyPr>
           <a:lstStyle/>
           <a:p>
-            <a:pPr>
-              <a:defRPr b="1" sz="3400">
-                <a:solidFill>
-                  <a:srgbClr val="1E2D46"/>
-                </a:solidFill>
-              </a:defRPr>
-            </a:pPr>
-            <a:r>
-              <a:t>Key Results</a:t>
+            <a:pPr algn="l">
+              <a:defRPr sz="3000" b="1">
+                <a:solidFill>
+                  <a:srgbClr val="162236"/>
+                </a:solidFill>
+              </a:defRPr>
+            </a:pPr>
+            <a:r>
+              <a:t>Experimental Setup</a:t>
             </a:r>
           </a:p>
         </p:txBody>
@@ -3802,8 +5838,8 @@
         </p:nvSpPr>
         <p:spPr>
           <a:xfrm>
-            <a:off x="822960" y="1417320"/>
-            <a:ext cx="10424160" cy="4389120"/>
+            <a:off x="621792" y="877824"/>
+            <a:ext cx="10424160" cy="320040"/>
           </a:xfrm>
           <a:prstGeom prst="rect">
             <a:avLst/>
@@ -3811,82 +5847,540 @@
           <a:noFill/>
         </p:spPr>
         <p:txBody>
-          <a:bodyPr wrap="none">
+          <a:bodyPr wrap="none" lIns="45720" rIns="45720" anchor="t">
             <a:spAutoFit/>
           </a:bodyPr>
           <a:lstStyle/>
           <a:p>
+            <a:pPr algn="l">
+              <a:defRPr sz="1200" b="0">
+                <a:solidFill>
+                  <a:srgbClr val="69707A"/>
+                </a:solidFill>
+              </a:defRPr>
+            </a:pPr>
+            <a:r>
+              <a:t>The evaluation is centered on hallucination reduction.</a:t>
+            </a:r>
+          </a:p>
+        </p:txBody>
+      </p:sp>
+      <p:sp>
+        <p:nvSpPr>
+          <p:cNvPr id="4" name="Rectangle 3"/>
+          <p:cNvSpPr/>
+          <p:nvPr/>
+        </p:nvSpPr>
+        <p:spPr>
+          <a:xfrm>
+            <a:off x="621792" y="1170432"/>
+            <a:ext cx="1051560" cy="36576"/>
+          </a:xfrm>
+          <a:prstGeom prst="rect">
+            <a:avLst/>
+          </a:prstGeom>
+          <a:solidFill>
+            <a:srgbClr val="008080"/>
+          </a:solidFill>
+          <a:ln>
+            <a:solidFill>
+              <a:srgbClr val="008080"/>
+            </a:solidFill>
+          </a:ln>
+        </p:spPr>
+        <p:style>
+          <a:lnRef idx="1">
+            <a:schemeClr val="accent1"/>
+          </a:lnRef>
+          <a:fillRef idx="3">
+            <a:schemeClr val="accent1"/>
+          </a:fillRef>
+          <a:effectRef idx="2">
+            <a:schemeClr val="accent1"/>
+          </a:effectRef>
+          <a:fontRef idx="minor">
+            <a:schemeClr val="lt1"/>
+          </a:fontRef>
+        </p:style>
+        <p:txBody>
+          <a:bodyPr rtlCol="0" anchor="ctr"/>
+          <a:lstStyle/>
+          <a:p>
+            <a:pPr algn="ctr"/>
+          </a:p>
+        </p:txBody>
+      </p:sp>
+      <p:sp>
+        <p:nvSpPr>
+          <p:cNvPr id="5" name="Rounded Rectangle 4"/>
+          <p:cNvSpPr/>
+          <p:nvPr/>
+        </p:nvSpPr>
+        <p:spPr>
+          <a:xfrm>
+            <a:off x="777240" y="1444752"/>
+            <a:ext cx="3246120" cy="3154680"/>
+          </a:xfrm>
+          <a:prstGeom prst="roundRect">
+            <a:avLst/>
+          </a:prstGeom>
+          <a:solidFill>
+            <a:srgbClr val="FFFFFF"/>
+          </a:solidFill>
+          <a:ln>
+            <a:solidFill>
+              <a:srgbClr val="DADEE2"/>
+            </a:solidFill>
+          </a:ln>
+        </p:spPr>
+        <p:style>
+          <a:lnRef idx="1">
+            <a:schemeClr val="accent1"/>
+          </a:lnRef>
+          <a:fillRef idx="3">
+            <a:schemeClr val="accent1"/>
+          </a:fillRef>
+          <a:effectRef idx="2">
+            <a:schemeClr val="accent1"/>
+          </a:effectRef>
+          <a:fontRef idx="minor">
+            <a:schemeClr val="lt1"/>
+          </a:fontRef>
+        </p:style>
+        <p:txBody>
+          <a:bodyPr rtlCol="0" anchor="ctr"/>
+          <a:lstStyle/>
+          <a:p>
+            <a:pPr algn="ctr"/>
+          </a:p>
+        </p:txBody>
+      </p:sp>
+      <p:sp>
+        <p:nvSpPr>
+          <p:cNvPr id="6" name="Rectangle 5"/>
+          <p:cNvSpPr/>
+          <p:nvPr/>
+        </p:nvSpPr>
+        <p:spPr>
+          <a:xfrm>
+            <a:off x="777240" y="1444752"/>
+            <a:ext cx="73152" cy="3154680"/>
+          </a:xfrm>
+          <a:prstGeom prst="rect">
+            <a:avLst/>
+          </a:prstGeom>
+          <a:solidFill>
+            <a:srgbClr val="285E96"/>
+          </a:solidFill>
+          <a:ln>
+            <a:solidFill>
+              <a:srgbClr val="285E96"/>
+            </a:solidFill>
+          </a:ln>
+        </p:spPr>
+        <p:style>
+          <a:lnRef idx="1">
+            <a:schemeClr val="accent1"/>
+          </a:lnRef>
+          <a:fillRef idx="3">
+            <a:schemeClr val="accent1"/>
+          </a:fillRef>
+          <a:effectRef idx="2">
+            <a:schemeClr val="accent1"/>
+          </a:effectRef>
+          <a:fontRef idx="minor">
+            <a:schemeClr val="lt1"/>
+          </a:fontRef>
+        </p:style>
+        <p:txBody>
+          <a:bodyPr rtlCol="0" anchor="ctr"/>
+          <a:lstStyle/>
+          <a:p>
+            <a:pPr algn="ctr"/>
+          </a:p>
+        </p:txBody>
+      </p:sp>
+      <p:sp>
+        <p:nvSpPr>
+          <p:cNvPr id="7" name="TextBox 6"/>
+          <p:cNvSpPr txBox="1"/>
+          <p:nvPr/>
+        </p:nvSpPr>
+        <p:spPr>
+          <a:xfrm>
+            <a:off x="978408" y="1609344"/>
+            <a:ext cx="2898648" cy="292608"/>
+          </a:xfrm>
+          <a:prstGeom prst="rect">
+            <a:avLst/>
+          </a:prstGeom>
+          <a:noFill/>
+        </p:spPr>
+        <p:txBody>
+          <a:bodyPr wrap="none" lIns="45720" rIns="45720" anchor="t">
+            <a:spAutoFit/>
+          </a:bodyPr>
+          <a:lstStyle/>
+          <a:p>
+            <a:pPr algn="l">
+              <a:defRPr sz="1600" b="1">
+                <a:solidFill>
+                  <a:srgbClr val="162236"/>
+                </a:solidFill>
+              </a:defRPr>
+            </a:pPr>
+            <a:r>
+              <a:t>Models</a:t>
+            </a:r>
+          </a:p>
+        </p:txBody>
+      </p:sp>
+      <p:sp>
+        <p:nvSpPr>
+          <p:cNvPr id="8" name="TextBox 7"/>
+          <p:cNvSpPr txBox="1"/>
+          <p:nvPr/>
+        </p:nvSpPr>
+        <p:spPr>
+          <a:xfrm>
+            <a:off x="978408" y="2011680"/>
+            <a:ext cx="2862072" cy="2478024"/>
+          </a:xfrm>
+          <a:prstGeom prst="rect">
+            <a:avLst/>
+          </a:prstGeom>
+          <a:noFill/>
+        </p:spPr>
+        <p:txBody>
+          <a:bodyPr wrap="square">
+            <a:spAutoFit/>
+          </a:bodyPr>
+          <a:lstStyle/>
+          <a:p>
             <a:pPr>
               <a:spcAft>
-                <a:spcPts val="1400"/>
+                <a:spcPts val="900"/>
               </a:spcAft>
-              <a:defRPr sz="2400">
-                <a:solidFill>
-                  <a:srgbClr val="232323"/>
-                </a:solidFill>
-              </a:defRPr>
-            </a:pPr>
-            <a:r>
-              <a:t>Evaluated on Bunny-v1.0-3B and LLaVA-v1.5-7B.</a:t>
+              <a:defRPr sz="1300">
+                <a:solidFill>
+                  <a:srgbClr val="23272F"/>
+                </a:solidFill>
+              </a:defRPr>
+            </a:pPr>
+            <a:r>
+              <a:t>Bunny-v1.0-3B</a:t>
             </a:r>
           </a:p>
           <a:p>
             <a:pPr>
               <a:spcAft>
-                <a:spcPts val="1400"/>
+                <a:spcPts val="900"/>
               </a:spcAft>
-              <a:defRPr sz="2400">
-                <a:solidFill>
-                  <a:srgbClr val="232323"/>
-                </a:solidFill>
-              </a:defRPr>
-            </a:pPr>
-            <a:r>
-              <a:t>Benchmarks: MMHalBench, Object HalBench, and AMBER.</a:t>
+              <a:defRPr sz="1300">
+                <a:solidFill>
+                  <a:srgbClr val="23272F"/>
+                </a:solidFill>
+              </a:defRPr>
+            </a:pPr>
+            <a:r>
+              <a:t>LLaVA-v1.5-7B</a:t>
             </a:r>
           </a:p>
           <a:p>
             <a:pPr>
               <a:spcAft>
-                <a:spcPts val="1400"/>
+                <a:spcPts val="900"/>
               </a:spcAft>
-              <a:defRPr sz="2400">
-                <a:solidFill>
-                  <a:srgbClr val="232323"/>
-                </a:solidFill>
-              </a:defRPr>
-            </a:pPr>
-            <a:r>
-              <a:t>Bunny MMHalBench score improves from 2.28 with DPO to 2.96 with MDPO.</a:t>
-            </a:r>
-          </a:p>
+              <a:defRPr sz="1300">
+                <a:solidFill>
+                  <a:srgbClr val="23272F"/>
+                </a:solidFill>
+              </a:defRPr>
+            </a:pPr>
+            <a:r>
+              <a:t>LoRA training for DPO and MDPO</a:t>
+            </a:r>
+          </a:p>
+        </p:txBody>
+      </p:sp>
+      <p:sp>
+        <p:nvSpPr>
+          <p:cNvPr id="9" name="Rounded Rectangle 8"/>
+          <p:cNvSpPr/>
+          <p:nvPr/>
+        </p:nvSpPr>
+        <p:spPr>
+          <a:xfrm>
+            <a:off x="4480560" y="1444752"/>
+            <a:ext cx="3246120" cy="3154680"/>
+          </a:xfrm>
+          <a:prstGeom prst="roundRect">
+            <a:avLst/>
+          </a:prstGeom>
+          <a:solidFill>
+            <a:srgbClr val="FFFFFF"/>
+          </a:solidFill>
+          <a:ln>
+            <a:solidFill>
+              <a:srgbClr val="DADEE2"/>
+            </a:solidFill>
+          </a:ln>
+        </p:spPr>
+        <p:style>
+          <a:lnRef idx="1">
+            <a:schemeClr val="accent1"/>
+          </a:lnRef>
+          <a:fillRef idx="3">
+            <a:schemeClr val="accent1"/>
+          </a:fillRef>
+          <a:effectRef idx="2">
+            <a:schemeClr val="accent1"/>
+          </a:effectRef>
+          <a:fontRef idx="minor">
+            <a:schemeClr val="lt1"/>
+          </a:fontRef>
+        </p:style>
+        <p:txBody>
+          <a:bodyPr rtlCol="0" anchor="ctr"/>
+          <a:lstStyle/>
+          <a:p>
+            <a:pPr algn="ctr"/>
+          </a:p>
+        </p:txBody>
+      </p:sp>
+      <p:sp>
+        <p:nvSpPr>
+          <p:cNvPr id="10" name="Rectangle 9"/>
+          <p:cNvSpPr/>
+          <p:nvPr/>
+        </p:nvSpPr>
+        <p:spPr>
+          <a:xfrm>
+            <a:off x="4480560" y="1444752"/>
+            <a:ext cx="73152" cy="3154680"/>
+          </a:xfrm>
+          <a:prstGeom prst="rect">
+            <a:avLst/>
+          </a:prstGeom>
+          <a:solidFill>
+            <a:srgbClr val="008080"/>
+          </a:solidFill>
+          <a:ln>
+            <a:solidFill>
+              <a:srgbClr val="008080"/>
+            </a:solidFill>
+          </a:ln>
+        </p:spPr>
+        <p:style>
+          <a:lnRef idx="1">
+            <a:schemeClr val="accent1"/>
+          </a:lnRef>
+          <a:fillRef idx="3">
+            <a:schemeClr val="accent1"/>
+          </a:fillRef>
+          <a:effectRef idx="2">
+            <a:schemeClr val="accent1"/>
+          </a:effectRef>
+          <a:fontRef idx="minor">
+            <a:schemeClr val="lt1"/>
+          </a:fontRef>
+        </p:style>
+        <p:txBody>
+          <a:bodyPr rtlCol="0" anchor="ctr"/>
+          <a:lstStyle/>
+          <a:p>
+            <a:pPr algn="ctr"/>
+          </a:p>
+        </p:txBody>
+      </p:sp>
+      <p:sp>
+        <p:nvSpPr>
+          <p:cNvPr id="11" name="TextBox 10"/>
+          <p:cNvSpPr txBox="1"/>
+          <p:nvPr/>
+        </p:nvSpPr>
+        <p:spPr>
+          <a:xfrm>
+            <a:off x="4681728" y="1609344"/>
+            <a:ext cx="2898648" cy="292608"/>
+          </a:xfrm>
+          <a:prstGeom prst="rect">
+            <a:avLst/>
+          </a:prstGeom>
+          <a:noFill/>
+        </p:spPr>
+        <p:txBody>
+          <a:bodyPr wrap="none" lIns="45720" rIns="45720" anchor="t">
+            <a:spAutoFit/>
+          </a:bodyPr>
+          <a:lstStyle/>
+          <a:p>
+            <a:pPr algn="l">
+              <a:defRPr sz="1600" b="1">
+                <a:solidFill>
+                  <a:srgbClr val="162236"/>
+                </a:solidFill>
+              </a:defRPr>
+            </a:pPr>
+            <a:r>
+              <a:t>Preference data</a:t>
+            </a:r>
+          </a:p>
+        </p:txBody>
+      </p:sp>
+      <p:sp>
+        <p:nvSpPr>
+          <p:cNvPr id="12" name="TextBox 11"/>
+          <p:cNvSpPr txBox="1"/>
+          <p:nvPr/>
+        </p:nvSpPr>
+        <p:spPr>
+          <a:xfrm>
+            <a:off x="4681728" y="2011680"/>
+            <a:ext cx="2862072" cy="2478024"/>
+          </a:xfrm>
+          <a:prstGeom prst="rect">
+            <a:avLst/>
+          </a:prstGeom>
+          <a:noFill/>
+        </p:spPr>
+        <p:txBody>
+          <a:bodyPr wrap="square">
+            <a:spAutoFit/>
+          </a:bodyPr>
+          <a:lstStyle/>
           <a:p>
             <a:pPr>
               <a:spcAft>
-                <a:spcPts val="1400"/>
+                <a:spcPts val="900"/>
               </a:spcAft>
-              <a:defRPr sz="2400">
-                <a:solidFill>
-                  <a:srgbClr val="232323"/>
-                </a:solidFill>
-              </a:defRPr>
-            </a:pPr>
-            <a:r>
-              <a:t>Bunny hallucination rate drops from 0.56 to 0.42.</a:t>
-            </a:r>
-          </a:p>
-        </p:txBody>
-      </p:sp>
-      <p:sp>
-        <p:nvSpPr>
-          <p:cNvPr id="4" name="TextBox 3"/>
+              <a:defRPr sz="1300">
+                <a:solidFill>
+                  <a:srgbClr val="23272F"/>
+                </a:solidFill>
+              </a:defRPr>
+            </a:pPr>
+            <a:r>
+              <a:t>10K examples sampled from Silkie</a:t>
+            </a:r>
+          </a:p>
+          <a:p>
+            <a:pPr>
+              <a:spcAft>
+                <a:spcPts val="900"/>
+              </a:spcAft>
+              <a:defRPr sz="1300">
+                <a:solidFill>
+                  <a:srgbClr val="23272F"/>
+                </a:solidFill>
+              </a:defRPr>
+            </a:pPr>
+            <a:r>
+              <a:t>Same data and hyperparameters for DPO and MDPO</a:t>
+            </a:r>
+          </a:p>
+        </p:txBody>
+      </p:sp>
+      <p:sp>
+        <p:nvSpPr>
+          <p:cNvPr id="13" name="Rounded Rectangle 12"/>
+          <p:cNvSpPr/>
+          <p:nvPr/>
+        </p:nvSpPr>
+        <p:spPr>
+          <a:xfrm>
+            <a:off x="8183879" y="1444752"/>
+            <a:ext cx="3246120" cy="3154680"/>
+          </a:xfrm>
+          <a:prstGeom prst="roundRect">
+            <a:avLst/>
+          </a:prstGeom>
+          <a:solidFill>
+            <a:srgbClr val="FFFFFF"/>
+          </a:solidFill>
+          <a:ln>
+            <a:solidFill>
+              <a:srgbClr val="DADEE2"/>
+            </a:solidFill>
+          </a:ln>
+        </p:spPr>
+        <p:style>
+          <a:lnRef idx="1">
+            <a:schemeClr val="accent1"/>
+          </a:lnRef>
+          <a:fillRef idx="3">
+            <a:schemeClr val="accent1"/>
+          </a:fillRef>
+          <a:effectRef idx="2">
+            <a:schemeClr val="accent1"/>
+          </a:effectRef>
+          <a:fontRef idx="minor">
+            <a:schemeClr val="lt1"/>
+          </a:fontRef>
+        </p:style>
+        <p:txBody>
+          <a:bodyPr rtlCol="0" anchor="ctr"/>
+          <a:lstStyle/>
+          <a:p>
+            <a:pPr algn="ctr"/>
+          </a:p>
+        </p:txBody>
+      </p:sp>
+      <p:sp>
+        <p:nvSpPr>
+          <p:cNvPr id="14" name="Rectangle 13"/>
+          <p:cNvSpPr/>
+          <p:nvPr/>
+        </p:nvSpPr>
+        <p:spPr>
+          <a:xfrm>
+            <a:off x="8183879" y="1444752"/>
+            <a:ext cx="73152" cy="3154680"/>
+          </a:xfrm>
+          <a:prstGeom prst="rect">
+            <a:avLst/>
+          </a:prstGeom>
+          <a:solidFill>
+            <a:srgbClr val="C2841C"/>
+          </a:solidFill>
+          <a:ln>
+            <a:solidFill>
+              <a:srgbClr val="C2841C"/>
+            </a:solidFill>
+          </a:ln>
+        </p:spPr>
+        <p:style>
+          <a:lnRef idx="1">
+            <a:schemeClr val="accent1"/>
+          </a:lnRef>
+          <a:fillRef idx="3">
+            <a:schemeClr val="accent1"/>
+          </a:fillRef>
+          <a:effectRef idx="2">
+            <a:schemeClr val="accent1"/>
+          </a:effectRef>
+          <a:fontRef idx="minor">
+            <a:schemeClr val="lt1"/>
+          </a:fontRef>
+        </p:style>
+        <p:txBody>
+          <a:bodyPr rtlCol="0" anchor="ctr"/>
+          <a:lstStyle/>
+          <a:p>
+            <a:pPr algn="ctr"/>
+          </a:p>
+        </p:txBody>
+      </p:sp>
+      <p:sp>
+        <p:nvSpPr>
+          <p:cNvPr id="15" name="TextBox 14"/>
           <p:cNvSpPr txBox="1"/>
           <p:nvPr/>
         </p:nvSpPr>
         <p:spPr>
           <a:xfrm>
-            <a:off x="502920" y="6263640"/>
-            <a:ext cx="11155680" cy="228600"/>
+            <a:off x="8385048" y="1609344"/>
+            <a:ext cx="2898648" cy="292608"/>
           </a:xfrm>
           <a:prstGeom prst="rect">
             <a:avLst/>
@@ -3894,20 +6388,208 @@
           <a:noFill/>
         </p:spPr>
         <p:txBody>
-          <a:bodyPr wrap="none">
+          <a:bodyPr wrap="none" lIns="45720" rIns="45720" anchor="t">
             <a:spAutoFit/>
           </a:bodyPr>
           <a:lstStyle/>
           <a:p>
+            <a:pPr algn="l">
+              <a:defRPr sz="1600" b="1">
+                <a:solidFill>
+                  <a:srgbClr val="162236"/>
+                </a:solidFill>
+              </a:defRPr>
+            </a:pPr>
+            <a:r>
+              <a:t>Benchmarks</a:t>
+            </a:r>
+          </a:p>
+        </p:txBody>
+      </p:sp>
+      <p:sp>
+        <p:nvSpPr>
+          <p:cNvPr id="16" name="TextBox 15"/>
+          <p:cNvSpPr txBox="1"/>
+          <p:nvPr/>
+        </p:nvSpPr>
+        <p:spPr>
+          <a:xfrm>
+            <a:off x="8385048" y="2011680"/>
+            <a:ext cx="2862072" cy="2478024"/>
+          </a:xfrm>
+          <a:prstGeom prst="rect">
+            <a:avLst/>
+          </a:prstGeom>
+          <a:noFill/>
+        </p:spPr>
+        <p:txBody>
+          <a:bodyPr wrap="square">
+            <a:spAutoFit/>
+          </a:bodyPr>
+          <a:lstStyle/>
+          <a:p>
+            <a:pPr>
+              <a:spcAft>
+                <a:spcPts val="900"/>
+              </a:spcAft>
+              <a:defRPr sz="1300">
+                <a:solidFill>
+                  <a:srgbClr val="23272F"/>
+                </a:solidFill>
+              </a:defRPr>
+            </a:pPr>
+            <a:r>
+              <a:t>MMHalBench</a:t>
+            </a:r>
+          </a:p>
+          <a:p>
+            <a:pPr>
+              <a:spcAft>
+                <a:spcPts val="900"/>
+              </a:spcAft>
+              <a:defRPr sz="1300">
+                <a:solidFill>
+                  <a:srgbClr val="23272F"/>
+                </a:solidFill>
+              </a:defRPr>
+            </a:pPr>
+            <a:r>
+              <a:t>Object HalBench</a:t>
+            </a:r>
+          </a:p>
+          <a:p>
+            <a:pPr>
+              <a:spcAft>
+                <a:spcPts val="900"/>
+              </a:spcAft>
+              <a:defRPr sz="1300">
+                <a:solidFill>
+                  <a:srgbClr val="23272F"/>
+                </a:solidFill>
+              </a:defRPr>
+            </a:pPr>
+            <a:r>
+              <a:t>AMBER</a:t>
+            </a:r>
+          </a:p>
+          <a:p>
+            <a:pPr>
+              <a:spcAft>
+                <a:spcPts val="900"/>
+              </a:spcAft>
+              <a:defRPr sz="1300">
+                <a:solidFill>
+                  <a:srgbClr val="23272F"/>
+                </a:solidFill>
+              </a:defRPr>
+            </a:pPr>
+            <a:r>
+              <a:t>Human pairwise evaluation</a:t>
+            </a:r>
+          </a:p>
+        </p:txBody>
+      </p:sp>
+      <p:sp>
+        <p:nvSpPr>
+          <p:cNvPr id="17" name="TextBox 16"/>
+          <p:cNvSpPr txBox="1"/>
+          <p:nvPr/>
+        </p:nvSpPr>
+        <p:spPr>
+          <a:xfrm>
+            <a:off x="914400" y="5193792"/>
+            <a:ext cx="10241280" cy="438912"/>
+          </a:xfrm>
+          <a:prstGeom prst="rect">
+            <a:avLst/>
+          </a:prstGeom>
+          <a:noFill/>
+        </p:spPr>
+        <p:txBody>
+          <a:bodyPr wrap="none" lIns="45720" rIns="45720" anchor="t">
+            <a:spAutoFit/>
+          </a:bodyPr>
+          <a:lstStyle/>
+          <a:p>
+            <a:pPr algn="ctr">
+              <a:defRPr sz="1600" b="0">
+                <a:solidFill>
+                  <a:srgbClr val="23272F"/>
+                </a:solidFill>
+              </a:defRPr>
+            </a:pPr>
+            <a:r>
+              <a:t>Reviewer note: the comparison to standard DPO is clean because the training setup is controlled; comparisons to other systems are less direct.</a:t>
+            </a:r>
+          </a:p>
+        </p:txBody>
+      </p:sp>
+      <p:sp>
+        <p:nvSpPr>
+          <p:cNvPr id="18" name="TextBox 17"/>
+          <p:cNvSpPr txBox="1"/>
+          <p:nvPr/>
+        </p:nvSpPr>
+        <p:spPr>
+          <a:xfrm>
+            <a:off x="594360" y="6446520"/>
+            <a:ext cx="5029200" cy="228600"/>
+          </a:xfrm>
+          <a:prstGeom prst="rect">
+            <a:avLst/>
+          </a:prstGeom>
+          <a:noFill/>
+        </p:spPr>
+        <p:txBody>
+          <a:bodyPr wrap="none" lIns="45720" rIns="45720" anchor="t">
+            <a:spAutoFit/>
+          </a:bodyPr>
+          <a:lstStyle/>
+          <a:p>
+            <a:pPr algn="l">
+              <a:defRPr sz="800" b="0">
+                <a:solidFill>
+                  <a:srgbClr val="69707A"/>
+                </a:solidFill>
+              </a:defRPr>
+            </a:pPr>
+            <a:r>
+              <a:t>MDPO paper review</a:t>
+            </a:r>
+          </a:p>
+        </p:txBody>
+      </p:sp>
+      <p:sp>
+        <p:nvSpPr>
+          <p:cNvPr id="19" name="TextBox 18"/>
+          <p:cNvSpPr txBox="1"/>
+          <p:nvPr/>
+        </p:nvSpPr>
+        <p:spPr>
+          <a:xfrm>
+            <a:off x="10698480" y="6446520"/>
+            <a:ext cx="822960" cy="228600"/>
+          </a:xfrm>
+          <a:prstGeom prst="rect">
+            <a:avLst/>
+          </a:prstGeom>
+          <a:noFill/>
+        </p:spPr>
+        <p:txBody>
+          <a:bodyPr wrap="none" lIns="45720" rIns="45720" anchor="t">
+            <a:spAutoFit/>
+          </a:bodyPr>
+          <a:lstStyle/>
+          <a:p>
             <a:pPr algn="r">
-              <a:defRPr sz="800">
-                <a:solidFill>
-                  <a:srgbClr val="5F5F5F"/>
-                </a:solidFill>
-              </a:defRPr>
-            </a:pPr>
-            <a:r>
-              <a:t>MDPO paper review | Slide 5</a:t>
+              <a:defRPr sz="800" b="0">
+                <a:solidFill>
+                  <a:srgbClr val="69707A"/>
+                </a:solidFill>
+              </a:defRPr>
+            </a:pPr>
+            <a:r>
+              <a:t>5</a:t>
             </a:r>
           </a:p>
         </p:txBody>
@@ -3926,7 +6608,7 @@
     <p:bg>
       <p:bgPr>
         <a:solidFill>
-          <a:srgbClr val="FAFAF8"/>
+          <a:srgbClr val="FCFCFA"/>
         </a:solidFill>
         <a:effectLst/>
       </p:bgPr>
@@ -3946,8 +6628,8 @@
         </p:nvSpPr>
         <p:spPr>
           <a:xfrm>
-            <a:off x="594360" y="411480"/>
-            <a:ext cx="10881360" cy="731520"/>
+            <a:off x="594360" y="384048"/>
+            <a:ext cx="10789920" cy="502920"/>
           </a:xfrm>
           <a:prstGeom prst="rect">
             <a:avLst/>
@@ -3955,20 +6637,20 @@
           <a:noFill/>
         </p:spPr>
         <p:txBody>
-          <a:bodyPr wrap="none">
+          <a:bodyPr wrap="none" lIns="45720" rIns="45720" anchor="t">
             <a:spAutoFit/>
           </a:bodyPr>
           <a:lstStyle/>
           <a:p>
-            <a:pPr>
-              <a:defRPr b="1" sz="3400">
-                <a:solidFill>
-                  <a:srgbClr val="1E2D46"/>
-                </a:solidFill>
-              </a:defRPr>
-            </a:pPr>
-            <a:r>
-              <a:t>Strengths</a:t>
+            <a:pPr algn="l">
+              <a:defRPr sz="3000" b="1">
+                <a:solidFill>
+                  <a:srgbClr val="162236"/>
+                </a:solidFill>
+              </a:defRPr>
+            </a:pPr>
+            <a:r>
+              <a:t>Main Results</a:t>
             </a:r>
           </a:p>
         </p:txBody>
@@ -3981,8 +6663,8 @@
         </p:nvSpPr>
         <p:spPr>
           <a:xfrm>
-            <a:off x="822960" y="1417320"/>
-            <a:ext cx="10424160" cy="4389120"/>
+            <a:off x="621792" y="877824"/>
+            <a:ext cx="10424160" cy="320040"/>
           </a:xfrm>
           <a:prstGeom prst="rect">
             <a:avLst/>
@@ -3990,82 +6672,1019 @@
           <a:noFill/>
         </p:spPr>
         <p:txBody>
-          <a:bodyPr wrap="none">
+          <a:bodyPr wrap="none" lIns="45720" rIns="45720" anchor="t">
             <a:spAutoFit/>
           </a:bodyPr>
           <a:lstStyle/>
           <a:p>
+            <a:pPr algn="l">
+              <a:defRPr sz="1200" b="0">
+                <a:solidFill>
+                  <a:srgbClr val="69707A"/>
+                </a:solidFill>
+              </a:defRPr>
+            </a:pPr>
+            <a:r>
+              <a:t>MDPO improves hallucination metrics over standard DPO.</a:t>
+            </a:r>
+          </a:p>
+        </p:txBody>
+      </p:sp>
+      <p:sp>
+        <p:nvSpPr>
+          <p:cNvPr id="4" name="Rectangle 3"/>
+          <p:cNvSpPr/>
+          <p:nvPr/>
+        </p:nvSpPr>
+        <p:spPr>
+          <a:xfrm>
+            <a:off x="621792" y="1170432"/>
+            <a:ext cx="1051560" cy="36576"/>
+          </a:xfrm>
+          <a:prstGeom prst="rect">
+            <a:avLst/>
+          </a:prstGeom>
+          <a:solidFill>
+            <a:srgbClr val="008080"/>
+          </a:solidFill>
+          <a:ln>
+            <a:solidFill>
+              <a:srgbClr val="008080"/>
+            </a:solidFill>
+          </a:ln>
+        </p:spPr>
+        <p:style>
+          <a:lnRef idx="1">
+            <a:schemeClr val="accent1"/>
+          </a:lnRef>
+          <a:fillRef idx="3">
+            <a:schemeClr val="accent1"/>
+          </a:fillRef>
+          <a:effectRef idx="2">
+            <a:schemeClr val="accent1"/>
+          </a:effectRef>
+          <a:fontRef idx="minor">
+            <a:schemeClr val="lt1"/>
+          </a:fontRef>
+        </p:style>
+        <p:txBody>
+          <a:bodyPr rtlCol="0" anchor="ctr"/>
+          <a:lstStyle/>
+          <a:p>
+            <a:pPr algn="ctr"/>
+          </a:p>
+        </p:txBody>
+      </p:sp>
+      <p:graphicFrame>
+        <p:nvGraphicFramePr>
+          <p:cNvPr id="5" name="Table 4"/>
+          <p:cNvGraphicFramePr>
+            <a:graphicFrameLocks noGrp="1"/>
+          </p:cNvGraphicFramePr>
+          <p:nvPr/>
+        </p:nvGraphicFramePr>
+        <p:xfrm>
+          <a:off x="914400" y="1554480"/>
+          <a:ext cx="8092440" cy="2194560"/>
+        </p:xfrm>
+        <a:graphic>
+          <a:graphicData uri="http://schemas.openxmlformats.org/drawingml/2006/table">
+            <a:tbl>
+              <a:tblPr firstRow="1" bandRow="1">
+                <a:tableStyleId>{5C22544A-7EE6-4342-B048-85BDC9FD1C3A}</a:tableStyleId>
+              </a:tblPr>
+              <a:tblGrid>
+                <a:gridCol w="2057400"/>
+                <a:gridCol w="1508760"/>
+                <a:gridCol w="1508760"/>
+                <a:gridCol w="1508760"/>
+                <a:gridCol w="1508760"/>
+              </a:tblGrid>
+              <a:tr h="438912">
+                <a:tc>
+                  <a:txBody>
+                    <a:bodyPr/>
+                    <a:lstStyle/>
+                    <a:p>
+                      <a:pPr algn="l">
+                        <a:defRPr sz="1000" b="1">
+                          <a:solidFill>
+                            <a:srgbClr val="FFFFFF"/>
+                          </a:solidFill>
+                        </a:defRPr>
+                      </a:pPr>
+                      <a:r>
+                        <a:t>Model / Method</a:t>
+                      </a:r>
+                    </a:p>
+                  </a:txBody>
+                  <a:tcPr marL="45720" marR="45720">
+                    <a:solidFill>
+                      <a:srgbClr val="162236"/>
+                    </a:solidFill>
+                  </a:tcPr>
+                </a:tc>
+                <a:tc>
+                  <a:txBody>
+                    <a:bodyPr/>
+                    <a:lstStyle/>
+                    <a:p>
+                      <a:pPr algn="ctr">
+                        <a:defRPr sz="1000" b="1">
+                          <a:solidFill>
+                            <a:srgbClr val="FFFFFF"/>
+                          </a:solidFill>
+                        </a:defRPr>
+                      </a:pPr>
+                      <a:r>
+                        <a:t>MMHal Score</a:t>
+                      </a:r>
+                    </a:p>
+                  </a:txBody>
+                  <a:tcPr marL="45720" marR="45720">
+                    <a:solidFill>
+                      <a:srgbClr val="162236"/>
+                    </a:solidFill>
+                  </a:tcPr>
+                </a:tc>
+                <a:tc>
+                  <a:txBody>
+                    <a:bodyPr/>
+                    <a:lstStyle/>
+                    <a:p>
+                      <a:pPr algn="ctr">
+                        <a:defRPr sz="1000" b="1">
+                          <a:solidFill>
+                            <a:srgbClr val="FFFFFF"/>
+                          </a:solidFill>
+                        </a:defRPr>
+                      </a:pPr>
+                      <a:r>
+                        <a:t>MMHal HalRate</a:t>
+                      </a:r>
+                    </a:p>
+                  </a:txBody>
+                  <a:tcPr marL="45720" marR="45720">
+                    <a:solidFill>
+                      <a:srgbClr val="162236"/>
+                    </a:solidFill>
+                  </a:tcPr>
+                </a:tc>
+                <a:tc>
+                  <a:txBody>
+                    <a:bodyPr/>
+                    <a:lstStyle/>
+                    <a:p>
+                      <a:pPr algn="ctr">
+                        <a:defRPr sz="1000" b="1">
+                          <a:solidFill>
+                            <a:srgbClr val="FFFFFF"/>
+                          </a:solidFill>
+                        </a:defRPr>
+                      </a:pPr>
+                      <a:r>
+                        <a:t>Object CHAIRs</a:t>
+                      </a:r>
+                    </a:p>
+                  </a:txBody>
+                  <a:tcPr marL="45720" marR="45720">
+                    <a:solidFill>
+                      <a:srgbClr val="162236"/>
+                    </a:solidFill>
+                  </a:tcPr>
+                </a:tc>
+                <a:tc>
+                  <a:txBody>
+                    <a:bodyPr/>
+                    <a:lstStyle/>
+                    <a:p>
+                      <a:pPr algn="ctr">
+                        <a:defRPr sz="1000" b="1">
+                          <a:solidFill>
+                            <a:srgbClr val="FFFFFF"/>
+                          </a:solidFill>
+                        </a:defRPr>
+                      </a:pPr>
+                      <a:r>
+                        <a:t>AMBER HalRate</a:t>
+                      </a:r>
+                    </a:p>
+                  </a:txBody>
+                  <a:tcPr marL="45720" marR="45720">
+                    <a:solidFill>
+                      <a:srgbClr val="162236"/>
+                    </a:solidFill>
+                  </a:tcPr>
+                </a:tc>
+              </a:tr>
+              <a:tr h="438912">
+                <a:tc>
+                  <a:txBody>
+                    <a:bodyPr/>
+                    <a:lstStyle/>
+                    <a:p>
+                      <a:pPr algn="l">
+                        <a:defRPr sz="1100" b="0">
+                          <a:solidFill>
+                            <a:srgbClr val="23272F"/>
+                          </a:solidFill>
+                        </a:defRPr>
+                      </a:pPr>
+                      <a:r>
+                        <a:t>Bunny + DPO</a:t>
+                      </a:r>
+                    </a:p>
+                  </a:txBody>
+                  <a:tcPr marL="45720" marR="45720">
+                    <a:solidFill>
+                      <a:srgbClr val="FFFFFF"/>
+                    </a:solidFill>
+                  </a:tcPr>
+                </a:tc>
+                <a:tc>
+                  <a:txBody>
+                    <a:bodyPr/>
+                    <a:lstStyle/>
+                    <a:p>
+                      <a:pPr algn="ctr">
+                        <a:defRPr sz="1100" b="0">
+                          <a:solidFill>
+                            <a:srgbClr val="23272F"/>
+                          </a:solidFill>
+                        </a:defRPr>
+                      </a:pPr>
+                      <a:r>
+                        <a:t>2.28</a:t>
+                      </a:r>
+                    </a:p>
+                  </a:txBody>
+                  <a:tcPr marL="45720" marR="45720">
+                    <a:solidFill>
+                      <a:srgbClr val="FFFFFF"/>
+                    </a:solidFill>
+                  </a:tcPr>
+                </a:tc>
+                <a:tc>
+                  <a:txBody>
+                    <a:bodyPr/>
+                    <a:lstStyle/>
+                    <a:p>
+                      <a:pPr algn="ctr">
+                        <a:defRPr sz="1100" b="0">
+                          <a:solidFill>
+                            <a:srgbClr val="23272F"/>
+                          </a:solidFill>
+                        </a:defRPr>
+                      </a:pPr>
+                      <a:r>
+                        <a:t>0.56</a:t>
+                      </a:r>
+                    </a:p>
+                  </a:txBody>
+                  <a:tcPr marL="45720" marR="45720">
+                    <a:solidFill>
+                      <a:srgbClr val="FFFFFF"/>
+                    </a:solidFill>
+                  </a:tcPr>
+                </a:tc>
+                <a:tc>
+                  <a:txBody>
+                    <a:bodyPr/>
+                    <a:lstStyle/>
+                    <a:p>
+                      <a:pPr algn="ctr">
+                        <a:defRPr sz="1100" b="0">
+                          <a:solidFill>
+                            <a:srgbClr val="23272F"/>
+                          </a:solidFill>
+                        </a:defRPr>
+                      </a:pPr>
+                      <a:r>
+                        <a:t>44.3</a:t>
+                      </a:r>
+                    </a:p>
+                  </a:txBody>
+                  <a:tcPr marL="45720" marR="45720">
+                    <a:solidFill>
+                      <a:srgbClr val="FFFFFF"/>
+                    </a:solidFill>
+                  </a:tcPr>
+                </a:tc>
+                <a:tc>
+                  <a:txBody>
+                    <a:bodyPr/>
+                    <a:lstStyle/>
+                    <a:p>
+                      <a:pPr algn="ctr">
+                        <a:defRPr sz="1100" b="0">
+                          <a:solidFill>
+                            <a:srgbClr val="23272F"/>
+                          </a:solidFill>
+                        </a:defRPr>
+                      </a:pPr>
+                      <a:r>
+                        <a:t>58.9</a:t>
+                      </a:r>
+                    </a:p>
+                  </a:txBody>
+                  <a:tcPr marL="45720" marR="45720">
+                    <a:solidFill>
+                      <a:srgbClr val="FFFFFF"/>
+                    </a:solidFill>
+                  </a:tcPr>
+                </a:tc>
+              </a:tr>
+              <a:tr h="438912">
+                <a:tc>
+                  <a:txBody>
+                    <a:bodyPr/>
+                    <a:lstStyle/>
+                    <a:p>
+                      <a:pPr algn="l">
+                        <a:defRPr sz="1100" b="1">
+                          <a:solidFill>
+                            <a:srgbClr val="23272F"/>
+                          </a:solidFill>
+                        </a:defRPr>
+                      </a:pPr>
+                      <a:r>
+                        <a:t>Bunny + MDPO</a:t>
+                      </a:r>
+                    </a:p>
+                  </a:txBody>
+                  <a:tcPr marL="45720" marR="45720">
+                    <a:solidFill>
+                      <a:srgbClr val="E0F4EE"/>
+                    </a:solidFill>
+                  </a:tcPr>
+                </a:tc>
+                <a:tc>
+                  <a:txBody>
+                    <a:bodyPr/>
+                    <a:lstStyle/>
+                    <a:p>
+                      <a:pPr algn="ctr">
+                        <a:defRPr sz="1100" b="1">
+                          <a:solidFill>
+                            <a:srgbClr val="23272F"/>
+                          </a:solidFill>
+                        </a:defRPr>
+                      </a:pPr>
+                      <a:r>
+                        <a:t>2.96</a:t>
+                      </a:r>
+                    </a:p>
+                  </a:txBody>
+                  <a:tcPr marL="45720" marR="45720">
+                    <a:solidFill>
+                      <a:srgbClr val="E0F4EE"/>
+                    </a:solidFill>
+                  </a:tcPr>
+                </a:tc>
+                <a:tc>
+                  <a:txBody>
+                    <a:bodyPr/>
+                    <a:lstStyle/>
+                    <a:p>
+                      <a:pPr algn="ctr">
+                        <a:defRPr sz="1100" b="1">
+                          <a:solidFill>
+                            <a:srgbClr val="23272F"/>
+                          </a:solidFill>
+                        </a:defRPr>
+                      </a:pPr>
+                      <a:r>
+                        <a:t>0.42</a:t>
+                      </a:r>
+                    </a:p>
+                  </a:txBody>
+                  <a:tcPr marL="45720" marR="45720">
+                    <a:solidFill>
+                      <a:srgbClr val="E0F4EE"/>
+                    </a:solidFill>
+                  </a:tcPr>
+                </a:tc>
+                <a:tc>
+                  <a:txBody>
+                    <a:bodyPr/>
+                    <a:lstStyle/>
+                    <a:p>
+                      <a:pPr algn="ctr">
+                        <a:defRPr sz="1100" b="1">
+                          <a:solidFill>
+                            <a:srgbClr val="23272F"/>
+                          </a:solidFill>
+                        </a:defRPr>
+                      </a:pPr>
+                      <a:r>
+                        <a:t>27.0</a:t>
+                      </a:r>
+                    </a:p>
+                  </a:txBody>
+                  <a:tcPr marL="45720" marR="45720">
+                    <a:solidFill>
+                      <a:srgbClr val="E0F4EE"/>
+                    </a:solidFill>
+                  </a:tcPr>
+                </a:tc>
+                <a:tc>
+                  <a:txBody>
+                    <a:bodyPr/>
+                    <a:lstStyle/>
+                    <a:p>
+                      <a:pPr algn="ctr">
+                        <a:defRPr sz="1100" b="1">
+                          <a:solidFill>
+                            <a:srgbClr val="23272F"/>
+                          </a:solidFill>
+                        </a:defRPr>
+                      </a:pPr>
+                      <a:r>
+                        <a:t>37.7</a:t>
+                      </a:r>
+                    </a:p>
+                  </a:txBody>
+                  <a:tcPr marL="45720" marR="45720">
+                    <a:solidFill>
+                      <a:srgbClr val="E0F4EE"/>
+                    </a:solidFill>
+                  </a:tcPr>
+                </a:tc>
+              </a:tr>
+              <a:tr h="438912">
+                <a:tc>
+                  <a:txBody>
+                    <a:bodyPr/>
+                    <a:lstStyle/>
+                    <a:p>
+                      <a:pPr algn="l">
+                        <a:defRPr sz="1100" b="0">
+                          <a:solidFill>
+                            <a:srgbClr val="23272F"/>
+                          </a:solidFill>
+                        </a:defRPr>
+                      </a:pPr>
+                      <a:r>
+                        <a:t>LLaVA + DPO</a:t>
+                      </a:r>
+                    </a:p>
+                  </a:txBody>
+                  <a:tcPr marL="45720" marR="45720">
+                    <a:solidFill>
+                      <a:srgbClr val="FFFFFF"/>
+                    </a:solidFill>
+                  </a:tcPr>
+                </a:tc>
+                <a:tc>
+                  <a:txBody>
+                    <a:bodyPr/>
+                    <a:lstStyle/>
+                    <a:p>
+                      <a:pPr algn="ctr">
+                        <a:defRPr sz="1100" b="0">
+                          <a:solidFill>
+                            <a:srgbClr val="23272F"/>
+                          </a:solidFill>
+                        </a:defRPr>
+                      </a:pPr>
+                      <a:r>
+                        <a:t>2.14</a:t>
+                      </a:r>
+                    </a:p>
+                  </a:txBody>
+                  <a:tcPr marL="45720" marR="45720">
+                    <a:solidFill>
+                      <a:srgbClr val="FFFFFF"/>
+                    </a:solidFill>
+                  </a:tcPr>
+                </a:tc>
+                <a:tc>
+                  <a:txBody>
+                    <a:bodyPr/>
+                    <a:lstStyle/>
+                    <a:p>
+                      <a:pPr algn="ctr">
+                        <a:defRPr sz="1100" b="0">
+                          <a:solidFill>
+                            <a:srgbClr val="23272F"/>
+                          </a:solidFill>
+                        </a:defRPr>
+                      </a:pPr>
+                      <a:r>
+                        <a:t>0.65</a:t>
+                      </a:r>
+                    </a:p>
+                  </a:txBody>
+                  <a:tcPr marL="45720" marR="45720">
+                    <a:solidFill>
+                      <a:srgbClr val="FFFFFF"/>
+                    </a:solidFill>
+                  </a:tcPr>
+                </a:tc>
+                <a:tc>
+                  <a:txBody>
+                    <a:bodyPr/>
+                    <a:lstStyle/>
+                    <a:p>
+                      <a:pPr algn="ctr">
+                        <a:defRPr sz="1100" b="0">
+                          <a:solidFill>
+                            <a:srgbClr val="23272F"/>
+                          </a:solidFill>
+                        </a:defRPr>
+                      </a:pPr>
+                      <a:r>
+                        <a:t>49.0</a:t>
+                      </a:r>
+                    </a:p>
+                  </a:txBody>
+                  <a:tcPr marL="45720" marR="45720">
+                    <a:solidFill>
+                      <a:srgbClr val="FFFFFF"/>
+                    </a:solidFill>
+                  </a:tcPr>
+                </a:tc>
+                <a:tc>
+                  <a:txBody>
+                    <a:bodyPr/>
+                    <a:lstStyle/>
+                    <a:p>
+                      <a:pPr algn="ctr">
+                        <a:defRPr sz="1100" b="0">
+                          <a:solidFill>
+                            <a:srgbClr val="23272F"/>
+                          </a:solidFill>
+                        </a:defRPr>
+                      </a:pPr>
+                      <a:r>
+                        <a:t>34.5</a:t>
+                      </a:r>
+                    </a:p>
+                  </a:txBody>
+                  <a:tcPr marL="45720" marR="45720">
+                    <a:solidFill>
+                      <a:srgbClr val="FFFFFF"/>
+                    </a:solidFill>
+                  </a:tcPr>
+                </a:tc>
+              </a:tr>
+              <a:tr h="438912">
+                <a:tc>
+                  <a:txBody>
+                    <a:bodyPr/>
+                    <a:lstStyle/>
+                    <a:p>
+                      <a:pPr algn="l">
+                        <a:defRPr sz="1100" b="1">
+                          <a:solidFill>
+                            <a:srgbClr val="23272F"/>
+                          </a:solidFill>
+                        </a:defRPr>
+                      </a:pPr>
+                      <a:r>
+                        <a:t>LLaVA + MDPO</a:t>
+                      </a:r>
+                    </a:p>
+                  </a:txBody>
+                  <a:tcPr marL="45720" marR="45720">
+                    <a:solidFill>
+                      <a:srgbClr val="E0F4EE"/>
+                    </a:solidFill>
+                  </a:tcPr>
+                </a:tc>
+                <a:tc>
+                  <a:txBody>
+                    <a:bodyPr/>
+                    <a:lstStyle/>
+                    <a:p>
+                      <a:pPr algn="ctr">
+                        <a:defRPr sz="1100" b="1">
+                          <a:solidFill>
+                            <a:srgbClr val="23272F"/>
+                          </a:solidFill>
+                        </a:defRPr>
+                      </a:pPr>
+                      <a:r>
+                        <a:t>2.39</a:t>
+                      </a:r>
+                    </a:p>
+                  </a:txBody>
+                  <a:tcPr marL="45720" marR="45720">
+                    <a:solidFill>
+                      <a:srgbClr val="E0F4EE"/>
+                    </a:solidFill>
+                  </a:tcPr>
+                </a:tc>
+                <a:tc>
+                  <a:txBody>
+                    <a:bodyPr/>
+                    <a:lstStyle/>
+                    <a:p>
+                      <a:pPr algn="ctr">
+                        <a:defRPr sz="1100" b="1">
+                          <a:solidFill>
+                            <a:srgbClr val="23272F"/>
+                          </a:solidFill>
+                        </a:defRPr>
+                      </a:pPr>
+                      <a:r>
+                        <a:t>0.54</a:t>
+                      </a:r>
+                    </a:p>
+                  </a:txBody>
+                  <a:tcPr marL="45720" marR="45720">
+                    <a:solidFill>
+                      <a:srgbClr val="E0F4EE"/>
+                    </a:solidFill>
+                  </a:tcPr>
+                </a:tc>
+                <a:tc>
+                  <a:txBody>
+                    <a:bodyPr/>
+                    <a:lstStyle/>
+                    <a:p>
+                      <a:pPr algn="ctr">
+                        <a:defRPr sz="1100" b="1">
+                          <a:solidFill>
+                            <a:srgbClr val="23272F"/>
+                          </a:solidFill>
+                        </a:defRPr>
+                      </a:pPr>
+                      <a:r>
+                        <a:t>35.7</a:t>
+                      </a:r>
+                    </a:p>
+                  </a:txBody>
+                  <a:tcPr marL="45720" marR="45720">
+                    <a:solidFill>
+                      <a:srgbClr val="E0F4EE"/>
+                    </a:solidFill>
+                  </a:tcPr>
+                </a:tc>
+                <a:tc>
+                  <a:txBody>
+                    <a:bodyPr/>
+                    <a:lstStyle/>
+                    <a:p>
+                      <a:pPr algn="ctr">
+                        <a:defRPr sz="1100" b="1">
+                          <a:solidFill>
+                            <a:srgbClr val="23272F"/>
+                          </a:solidFill>
+                        </a:defRPr>
+                      </a:pPr>
+                      <a:r>
+                        <a:t>24.5</a:t>
+                      </a:r>
+                    </a:p>
+                  </a:txBody>
+                  <a:tcPr marL="45720" marR="45720">
+                    <a:solidFill>
+                      <a:srgbClr val="E0F4EE"/>
+                    </a:solidFill>
+                  </a:tcPr>
+                </a:tc>
+              </a:tr>
+            </a:tbl>
+          </a:graphicData>
+        </a:graphic>
+      </p:graphicFrame>
+      <p:sp>
+        <p:nvSpPr>
+          <p:cNvPr id="6" name="Rounded Rectangle 5"/>
+          <p:cNvSpPr/>
+          <p:nvPr/>
+        </p:nvSpPr>
+        <p:spPr>
+          <a:xfrm>
+            <a:off x="914400" y="4224528"/>
+            <a:ext cx="4983480" cy="1143000"/>
+          </a:xfrm>
+          <a:prstGeom prst="roundRect">
+            <a:avLst/>
+          </a:prstGeom>
+          <a:solidFill>
+            <a:srgbClr val="E0F4EE"/>
+          </a:solidFill>
+          <a:ln>
+            <a:solidFill>
+              <a:srgbClr val="DADEE2"/>
+            </a:solidFill>
+          </a:ln>
+        </p:spPr>
+        <p:style>
+          <a:lnRef idx="1">
+            <a:schemeClr val="accent1"/>
+          </a:lnRef>
+          <a:fillRef idx="3">
+            <a:schemeClr val="accent1"/>
+          </a:fillRef>
+          <a:effectRef idx="2">
+            <a:schemeClr val="accent1"/>
+          </a:effectRef>
+          <a:fontRef idx="minor">
+            <a:schemeClr val="lt1"/>
+          </a:fontRef>
+        </p:style>
+        <p:txBody>
+          <a:bodyPr rtlCol="0" anchor="ctr"/>
+          <a:lstStyle/>
+          <a:p>
+            <a:pPr algn="ctr"/>
+          </a:p>
+        </p:txBody>
+      </p:sp>
+      <p:sp>
+        <p:nvSpPr>
+          <p:cNvPr id="7" name="Rectangle 6"/>
+          <p:cNvSpPr/>
+          <p:nvPr/>
+        </p:nvSpPr>
+        <p:spPr>
+          <a:xfrm>
+            <a:off x="914400" y="4224528"/>
+            <a:ext cx="73152" cy="1143000"/>
+          </a:xfrm>
+          <a:prstGeom prst="rect">
+            <a:avLst/>
+          </a:prstGeom>
+          <a:solidFill>
+            <a:srgbClr val="238756"/>
+          </a:solidFill>
+          <a:ln>
+            <a:solidFill>
+              <a:srgbClr val="238756"/>
+            </a:solidFill>
+          </a:ln>
+        </p:spPr>
+        <p:style>
+          <a:lnRef idx="1">
+            <a:schemeClr val="accent1"/>
+          </a:lnRef>
+          <a:fillRef idx="3">
+            <a:schemeClr val="accent1"/>
+          </a:fillRef>
+          <a:effectRef idx="2">
+            <a:schemeClr val="accent1"/>
+          </a:effectRef>
+          <a:fontRef idx="minor">
+            <a:schemeClr val="lt1"/>
+          </a:fontRef>
+        </p:style>
+        <p:txBody>
+          <a:bodyPr rtlCol="0" anchor="ctr"/>
+          <a:lstStyle/>
+          <a:p>
+            <a:pPr algn="ctr"/>
+          </a:p>
+        </p:txBody>
+      </p:sp>
+      <p:sp>
+        <p:nvSpPr>
+          <p:cNvPr id="8" name="TextBox 7"/>
+          <p:cNvSpPr txBox="1"/>
+          <p:nvPr/>
+        </p:nvSpPr>
+        <p:spPr>
+          <a:xfrm>
+            <a:off x="1115568" y="4389120"/>
+            <a:ext cx="4636008" cy="292608"/>
+          </a:xfrm>
+          <a:prstGeom prst="rect">
+            <a:avLst/>
+          </a:prstGeom>
+          <a:noFill/>
+        </p:spPr>
+        <p:txBody>
+          <a:bodyPr wrap="none" lIns="45720" rIns="45720" anchor="t">
+            <a:spAutoFit/>
+          </a:bodyPr>
+          <a:lstStyle/>
+          <a:p>
+            <a:pPr algn="l">
+              <a:defRPr sz="1600" b="1">
+                <a:solidFill>
+                  <a:srgbClr val="162236"/>
+                </a:solidFill>
+              </a:defRPr>
+            </a:pPr>
+            <a:r>
+              <a:t>Interpretation</a:t>
+            </a:r>
+          </a:p>
+        </p:txBody>
+      </p:sp>
+      <p:sp>
+        <p:nvSpPr>
+          <p:cNvPr id="9" name="TextBox 8"/>
+          <p:cNvSpPr txBox="1"/>
+          <p:nvPr/>
+        </p:nvSpPr>
+        <p:spPr>
+          <a:xfrm>
+            <a:off x="1115568" y="4791456"/>
+            <a:ext cx="4599432" cy="466344"/>
+          </a:xfrm>
+          <a:prstGeom prst="rect">
+            <a:avLst/>
+          </a:prstGeom>
+          <a:noFill/>
+        </p:spPr>
+        <p:txBody>
+          <a:bodyPr wrap="square">
+            <a:spAutoFit/>
+          </a:bodyPr>
+          <a:lstStyle/>
+          <a:p>
             <a:pPr>
               <a:spcAft>
-                <a:spcPts val="1400"/>
+                <a:spcPts val="900"/>
               </a:spcAft>
-              <a:defRPr sz="2400">
-                <a:solidFill>
-                  <a:srgbClr val="232323"/>
-                </a:solidFill>
-              </a:defRPr>
-            </a:pPr>
-            <a:r>
-              <a:t>Clear diagnosis through the no-image DPO experiment.</a:t>
-            </a:r>
-          </a:p>
+              <a:defRPr sz="1300">
+                <a:solidFill>
+                  <a:srgbClr val="23272F"/>
+                </a:solidFill>
+              </a:defRPr>
+            </a:pPr>
+            <a:r>
+              <a:t>The strongest evidence is hallucination reduction across both model families.</a:t>
+            </a:r>
+          </a:p>
+        </p:txBody>
+      </p:sp>
+      <p:sp>
+        <p:nvSpPr>
+          <p:cNvPr id="10" name="Rounded Rectangle 9"/>
+          <p:cNvSpPr/>
+          <p:nvPr/>
+        </p:nvSpPr>
+        <p:spPr>
+          <a:xfrm>
+            <a:off x="6172200" y="4224528"/>
+            <a:ext cx="4983480" cy="1143000"/>
+          </a:xfrm>
+          <a:prstGeom prst="roundRect">
+            <a:avLst/>
+          </a:prstGeom>
+          <a:solidFill>
+            <a:srgbClr val="FFF4E6"/>
+          </a:solidFill>
+          <a:ln>
+            <a:solidFill>
+              <a:srgbClr val="DADEE2"/>
+            </a:solidFill>
+          </a:ln>
+        </p:spPr>
+        <p:style>
+          <a:lnRef idx="1">
+            <a:schemeClr val="accent1"/>
+          </a:lnRef>
+          <a:fillRef idx="3">
+            <a:schemeClr val="accent1"/>
+          </a:fillRef>
+          <a:effectRef idx="2">
+            <a:schemeClr val="accent1"/>
+          </a:effectRef>
+          <a:fontRef idx="minor">
+            <a:schemeClr val="lt1"/>
+          </a:fontRef>
+        </p:style>
+        <p:txBody>
+          <a:bodyPr rtlCol="0" anchor="ctr"/>
+          <a:lstStyle/>
+          <a:p>
+            <a:pPr algn="ctr"/>
+          </a:p>
+        </p:txBody>
+      </p:sp>
+      <p:sp>
+        <p:nvSpPr>
+          <p:cNvPr id="11" name="Rectangle 10"/>
+          <p:cNvSpPr/>
+          <p:nvPr/>
+        </p:nvSpPr>
+        <p:spPr>
+          <a:xfrm>
+            <a:off x="6172200" y="4224528"/>
+            <a:ext cx="73152" cy="1143000"/>
+          </a:xfrm>
+          <a:prstGeom prst="rect">
+            <a:avLst/>
+          </a:prstGeom>
+          <a:solidFill>
+            <a:srgbClr val="C2841C"/>
+          </a:solidFill>
+          <a:ln>
+            <a:solidFill>
+              <a:srgbClr val="C2841C"/>
+            </a:solidFill>
+          </a:ln>
+        </p:spPr>
+        <p:style>
+          <a:lnRef idx="1">
+            <a:schemeClr val="accent1"/>
+          </a:lnRef>
+          <a:fillRef idx="3">
+            <a:schemeClr val="accent1"/>
+          </a:fillRef>
+          <a:effectRef idx="2">
+            <a:schemeClr val="accent1"/>
+          </a:effectRef>
+          <a:fontRef idx="minor">
+            <a:schemeClr val="lt1"/>
+          </a:fontRef>
+        </p:style>
+        <p:txBody>
+          <a:bodyPr rtlCol="0" anchor="ctr"/>
+          <a:lstStyle/>
+          <a:p>
+            <a:pPr algn="ctr"/>
+          </a:p>
+        </p:txBody>
+      </p:sp>
+      <p:sp>
+        <p:nvSpPr>
+          <p:cNvPr id="12" name="TextBox 11"/>
+          <p:cNvSpPr txBox="1"/>
+          <p:nvPr/>
+        </p:nvSpPr>
+        <p:spPr>
+          <a:xfrm>
+            <a:off x="6373368" y="4389120"/>
+            <a:ext cx="4636008" cy="292608"/>
+          </a:xfrm>
+          <a:prstGeom prst="rect">
+            <a:avLst/>
+          </a:prstGeom>
+          <a:noFill/>
+        </p:spPr>
+        <p:txBody>
+          <a:bodyPr wrap="none" lIns="45720" rIns="45720" anchor="t">
+            <a:spAutoFit/>
+          </a:bodyPr>
+          <a:lstStyle/>
+          <a:p>
+            <a:pPr algn="l">
+              <a:defRPr sz="1600" b="1">
+                <a:solidFill>
+                  <a:srgbClr val="162236"/>
+                </a:solidFill>
+              </a:defRPr>
+            </a:pPr>
+            <a:r>
+              <a:t>Caution</a:t>
+            </a:r>
+          </a:p>
+        </p:txBody>
+      </p:sp>
+      <p:sp>
+        <p:nvSpPr>
+          <p:cNvPr id="13" name="TextBox 12"/>
+          <p:cNvSpPr txBox="1"/>
+          <p:nvPr/>
+        </p:nvSpPr>
+        <p:spPr>
+          <a:xfrm>
+            <a:off x="6373368" y="4791456"/>
+            <a:ext cx="4599432" cy="466344"/>
+          </a:xfrm>
+          <a:prstGeom prst="rect">
+            <a:avLst/>
+          </a:prstGeom>
+          <a:noFill/>
+        </p:spPr>
+        <p:txBody>
+          <a:bodyPr wrap="square">
+            <a:spAutoFit/>
+          </a:bodyPr>
+          <a:lstStyle/>
           <a:p>
             <a:pPr>
               <a:spcAft>
-                <a:spcPts val="1400"/>
+                <a:spcPts val="900"/>
               </a:spcAft>
-              <a:defRPr sz="2400">
-                <a:solidFill>
-                  <a:srgbClr val="232323"/>
-                </a:solidFill>
-              </a:defRPr>
-            </a:pPr>
-            <a:r>
-              <a:t>Simple method that directly targets the identified failure mode.</a:t>
-            </a:r>
-          </a:p>
-          <a:p>
-            <a:pPr>
-              <a:spcAft>
-                <a:spcPts val="1400"/>
-              </a:spcAft>
-              <a:defRPr sz="2400">
-                <a:solidFill>
-                  <a:srgbClr val="232323"/>
-                </a:solidFill>
-              </a:defRPr>
-            </a:pPr>
-            <a:r>
-              <a:t>Ablations show conditional preference is the key component.</a:t>
-            </a:r>
-          </a:p>
-          <a:p>
-            <a:pPr>
-              <a:spcAft>
-                <a:spcPts val="1400"/>
-              </a:spcAft>
-              <a:defRPr sz="2400">
-                <a:solidFill>
-                  <a:srgbClr val="232323"/>
-                </a:solidFill>
-              </a:defRPr>
-            </a:pPr>
-            <a:r>
-              <a:t>Broader implication for conditional preference learning.</a:t>
-            </a:r>
-          </a:p>
-        </p:txBody>
-      </p:sp>
-      <p:sp>
-        <p:nvSpPr>
-          <p:cNvPr id="4" name="TextBox 3"/>
+              <a:defRPr sz="1300">
+                <a:solidFill>
+                  <a:srgbClr val="23272F"/>
+                </a:solidFill>
+              </a:defRPr>
+            </a:pPr>
+            <a:r>
+              <a:t>The paper should show whether the gains generalize beyond hallucination-focused tests.</a:t>
+            </a:r>
+          </a:p>
+        </p:txBody>
+      </p:sp>
+      <p:sp>
+        <p:nvSpPr>
+          <p:cNvPr id="14" name="TextBox 13"/>
           <p:cNvSpPr txBox="1"/>
           <p:nvPr/>
         </p:nvSpPr>
         <p:spPr>
           <a:xfrm>
-            <a:off x="502920" y="6263640"/>
-            <a:ext cx="11155680" cy="228600"/>
+            <a:off x="594360" y="6446520"/>
+            <a:ext cx="5029200" cy="228600"/>
           </a:xfrm>
           <a:prstGeom prst="rect">
             <a:avLst/>
@@ -4073,20 +7692,55 @@
           <a:noFill/>
         </p:spPr>
         <p:txBody>
-          <a:bodyPr wrap="none">
+          <a:bodyPr wrap="none" lIns="45720" rIns="45720" anchor="t">
             <a:spAutoFit/>
           </a:bodyPr>
           <a:lstStyle/>
           <a:p>
+            <a:pPr algn="l">
+              <a:defRPr sz="800" b="0">
+                <a:solidFill>
+                  <a:srgbClr val="69707A"/>
+                </a:solidFill>
+              </a:defRPr>
+            </a:pPr>
+            <a:r>
+              <a:t>MDPO paper review</a:t>
+            </a:r>
+          </a:p>
+        </p:txBody>
+      </p:sp>
+      <p:sp>
+        <p:nvSpPr>
+          <p:cNvPr id="15" name="TextBox 14"/>
+          <p:cNvSpPr txBox="1"/>
+          <p:nvPr/>
+        </p:nvSpPr>
+        <p:spPr>
+          <a:xfrm>
+            <a:off x="10698480" y="6446520"/>
+            <a:ext cx="822960" cy="228600"/>
+          </a:xfrm>
+          <a:prstGeom prst="rect">
+            <a:avLst/>
+          </a:prstGeom>
+          <a:noFill/>
+        </p:spPr>
+        <p:txBody>
+          <a:bodyPr wrap="none" lIns="45720" rIns="45720" anchor="t">
+            <a:spAutoFit/>
+          </a:bodyPr>
+          <a:lstStyle/>
+          <a:p>
             <a:pPr algn="r">
-              <a:defRPr sz="800">
-                <a:solidFill>
-                  <a:srgbClr val="5F5F5F"/>
-                </a:solidFill>
-              </a:defRPr>
-            </a:pPr>
-            <a:r>
-              <a:t>MDPO paper review | Slide 6</a:t>
+              <a:defRPr sz="800" b="0">
+                <a:solidFill>
+                  <a:srgbClr val="69707A"/>
+                </a:solidFill>
+              </a:defRPr>
+            </a:pPr>
+            <a:r>
+              <a:t>6</a:t>
             </a:r>
           </a:p>
         </p:txBody>
@@ -4105,7 +7759,7 @@
     <p:bg>
       <p:bgPr>
         <a:solidFill>
-          <a:srgbClr val="FAFAF8"/>
+          <a:srgbClr val="FCFCFA"/>
         </a:solidFill>
         <a:effectLst/>
       </p:bgPr>
@@ -4125,8 +7779,8 @@
         </p:nvSpPr>
         <p:spPr>
           <a:xfrm>
-            <a:off x="594360" y="411480"/>
-            <a:ext cx="10881360" cy="731520"/>
+            <a:off x="594360" y="384048"/>
+            <a:ext cx="10789920" cy="502920"/>
           </a:xfrm>
           <a:prstGeom prst="rect">
             <a:avLst/>
@@ -4134,20 +7788,20 @@
           <a:noFill/>
         </p:spPr>
         <p:txBody>
-          <a:bodyPr wrap="none">
+          <a:bodyPr wrap="none" lIns="45720" rIns="45720" anchor="t">
             <a:spAutoFit/>
           </a:bodyPr>
           <a:lstStyle/>
           <a:p>
-            <a:pPr>
-              <a:defRPr b="1" sz="3400">
-                <a:solidFill>
-                  <a:srgbClr val="1E2D46"/>
-                </a:solidFill>
-              </a:defRPr>
-            </a:pPr>
-            <a:r>
-              <a:t>Weaknesses</a:t>
+            <a:pPr algn="l">
+              <a:defRPr sz="3000" b="1">
+                <a:solidFill>
+                  <a:srgbClr val="162236"/>
+                </a:solidFill>
+              </a:defRPr>
+            </a:pPr>
+            <a:r>
+              <a:t>Reviewer Assessment</a:t>
             </a:r>
           </a:p>
         </p:txBody>
@@ -4160,8 +7814,8 @@
         </p:nvSpPr>
         <p:spPr>
           <a:xfrm>
-            <a:off x="822960" y="1417320"/>
-            <a:ext cx="10424160" cy="4389120"/>
+            <a:off x="621792" y="877824"/>
+            <a:ext cx="10424160" cy="320040"/>
           </a:xfrm>
           <a:prstGeom prst="rect">
             <a:avLst/>
@@ -4169,82 +7823,392 @@
           <a:noFill/>
         </p:spPr>
         <p:txBody>
-          <a:bodyPr wrap="none">
+          <a:bodyPr wrap="none" lIns="45720" rIns="45720" anchor="t">
             <a:spAutoFit/>
           </a:bodyPr>
           <a:lstStyle/>
           <a:p>
+            <a:pPr algn="l">
+              <a:defRPr sz="1200" b="0">
+                <a:solidFill>
+                  <a:srgbClr val="69707A"/>
+                </a:solidFill>
+              </a:defRPr>
+            </a:pPr>
+            <a:r>
+              <a:t>Strengths and weaknesses.</a:t>
+            </a:r>
+          </a:p>
+        </p:txBody>
+      </p:sp>
+      <p:sp>
+        <p:nvSpPr>
+          <p:cNvPr id="4" name="Rectangle 3"/>
+          <p:cNvSpPr/>
+          <p:nvPr/>
+        </p:nvSpPr>
+        <p:spPr>
+          <a:xfrm>
+            <a:off x="621792" y="1170432"/>
+            <a:ext cx="1051560" cy="36576"/>
+          </a:xfrm>
+          <a:prstGeom prst="rect">
+            <a:avLst/>
+          </a:prstGeom>
+          <a:solidFill>
+            <a:srgbClr val="008080"/>
+          </a:solidFill>
+          <a:ln>
+            <a:solidFill>
+              <a:srgbClr val="008080"/>
+            </a:solidFill>
+          </a:ln>
+        </p:spPr>
+        <p:style>
+          <a:lnRef idx="1">
+            <a:schemeClr val="accent1"/>
+          </a:lnRef>
+          <a:fillRef idx="3">
+            <a:schemeClr val="accent1"/>
+          </a:fillRef>
+          <a:effectRef idx="2">
+            <a:schemeClr val="accent1"/>
+          </a:effectRef>
+          <a:fontRef idx="minor">
+            <a:schemeClr val="lt1"/>
+          </a:fontRef>
+        </p:style>
+        <p:txBody>
+          <a:bodyPr rtlCol="0" anchor="ctr"/>
+          <a:lstStyle/>
+          <a:p>
+            <a:pPr algn="ctr"/>
+          </a:p>
+        </p:txBody>
+      </p:sp>
+      <p:sp>
+        <p:nvSpPr>
+          <p:cNvPr id="5" name="Rounded Rectangle 4"/>
+          <p:cNvSpPr/>
+          <p:nvPr/>
+        </p:nvSpPr>
+        <p:spPr>
+          <a:xfrm>
+            <a:off x="822960" y="1417320"/>
+            <a:ext cx="5074920" cy="4206240"/>
+          </a:xfrm>
+          <a:prstGeom prst="roundRect">
+            <a:avLst/>
+          </a:prstGeom>
+          <a:solidFill>
+            <a:srgbClr val="E0F4EE"/>
+          </a:solidFill>
+          <a:ln>
+            <a:solidFill>
+              <a:srgbClr val="DADEE2"/>
+            </a:solidFill>
+          </a:ln>
+        </p:spPr>
+        <p:style>
+          <a:lnRef idx="1">
+            <a:schemeClr val="accent1"/>
+          </a:lnRef>
+          <a:fillRef idx="3">
+            <a:schemeClr val="accent1"/>
+          </a:fillRef>
+          <a:effectRef idx="2">
+            <a:schemeClr val="accent1"/>
+          </a:effectRef>
+          <a:fontRef idx="minor">
+            <a:schemeClr val="lt1"/>
+          </a:fontRef>
+        </p:style>
+        <p:txBody>
+          <a:bodyPr rtlCol="0" anchor="ctr"/>
+          <a:lstStyle/>
+          <a:p>
+            <a:pPr algn="ctr"/>
+          </a:p>
+        </p:txBody>
+      </p:sp>
+      <p:sp>
+        <p:nvSpPr>
+          <p:cNvPr id="6" name="Rectangle 5"/>
+          <p:cNvSpPr/>
+          <p:nvPr/>
+        </p:nvSpPr>
+        <p:spPr>
+          <a:xfrm>
+            <a:off x="822960" y="1417320"/>
+            <a:ext cx="73152" cy="4206240"/>
+          </a:xfrm>
+          <a:prstGeom prst="rect">
+            <a:avLst/>
+          </a:prstGeom>
+          <a:solidFill>
+            <a:srgbClr val="238756"/>
+          </a:solidFill>
+          <a:ln>
+            <a:solidFill>
+              <a:srgbClr val="238756"/>
+            </a:solidFill>
+          </a:ln>
+        </p:spPr>
+        <p:style>
+          <a:lnRef idx="1">
+            <a:schemeClr val="accent1"/>
+          </a:lnRef>
+          <a:fillRef idx="3">
+            <a:schemeClr val="accent1"/>
+          </a:fillRef>
+          <a:effectRef idx="2">
+            <a:schemeClr val="accent1"/>
+          </a:effectRef>
+          <a:fontRef idx="minor">
+            <a:schemeClr val="lt1"/>
+          </a:fontRef>
+        </p:style>
+        <p:txBody>
+          <a:bodyPr rtlCol="0" anchor="ctr"/>
+          <a:lstStyle/>
+          <a:p>
+            <a:pPr algn="ctr"/>
+          </a:p>
+        </p:txBody>
+      </p:sp>
+      <p:sp>
+        <p:nvSpPr>
+          <p:cNvPr id="7" name="TextBox 6"/>
+          <p:cNvSpPr txBox="1"/>
+          <p:nvPr/>
+        </p:nvSpPr>
+        <p:spPr>
+          <a:xfrm>
+            <a:off x="1024128" y="1581912"/>
+            <a:ext cx="4727448" cy="292608"/>
+          </a:xfrm>
+          <a:prstGeom prst="rect">
+            <a:avLst/>
+          </a:prstGeom>
+          <a:noFill/>
+        </p:spPr>
+        <p:txBody>
+          <a:bodyPr wrap="none" lIns="45720" rIns="45720" anchor="t">
+            <a:spAutoFit/>
+          </a:bodyPr>
+          <a:lstStyle/>
+          <a:p>
+            <a:pPr algn="l">
+              <a:defRPr sz="1600" b="1">
+                <a:solidFill>
+                  <a:srgbClr val="162236"/>
+                </a:solidFill>
+              </a:defRPr>
+            </a:pPr>
+            <a:r>
+              <a:t>Strengths</a:t>
+            </a:r>
+          </a:p>
+        </p:txBody>
+      </p:sp>
+      <p:sp>
+        <p:nvSpPr>
+          <p:cNvPr id="8" name="TextBox 7"/>
+          <p:cNvSpPr txBox="1"/>
+          <p:nvPr/>
+        </p:nvSpPr>
+        <p:spPr>
+          <a:xfrm>
+            <a:off x="1024128" y="1984248"/>
+            <a:ext cx="4690872" cy="3529583"/>
+          </a:xfrm>
+          <a:prstGeom prst="rect">
+            <a:avLst/>
+          </a:prstGeom>
+          <a:noFill/>
+        </p:spPr>
+        <p:txBody>
+          <a:bodyPr wrap="square">
+            <a:spAutoFit/>
+          </a:bodyPr>
+          <a:lstStyle/>
+          <a:p>
             <a:pPr>
               <a:spcAft>
-                <a:spcPts val="1400"/>
+                <a:spcPts val="900"/>
               </a:spcAft>
-              <a:defRPr sz="2400">
-                <a:solidFill>
-                  <a:srgbClr val="232323"/>
-                </a:solidFill>
-              </a:defRPr>
-            </a:pPr>
-            <a:r>
-              <a:t>Evaluation mainly focuses on hallucination benchmarks.</a:t>
+              <a:defRPr sz="1300">
+                <a:solidFill>
+                  <a:srgbClr val="23272F"/>
+                </a:solidFill>
+              </a:defRPr>
+            </a:pPr>
+            <a:r>
+              <a:t>Clear failure-mode diagnosis.</a:t>
             </a:r>
           </a:p>
           <a:p>
             <a:pPr>
               <a:spcAft>
-                <a:spcPts val="1400"/>
+                <a:spcPts val="900"/>
               </a:spcAft>
-              <a:defRPr sz="2400">
-                <a:solidFill>
-                  <a:srgbClr val="232323"/>
-                </a:solidFill>
-              </a:defRPr>
-            </a:pPr>
-            <a:r>
-              <a:t>Rejected-image construction may be image and task dependent.</a:t>
+              <a:defRPr sz="1300">
+                <a:solidFill>
+                  <a:srgbClr val="23272F"/>
+                </a:solidFill>
+              </a:defRPr>
+            </a:pPr>
+            <a:r>
+              <a:t>No-image DPO control is persuasive.</a:t>
             </a:r>
           </a:p>
           <a:p>
             <a:pPr>
               <a:spcAft>
-                <a:spcPts val="1400"/>
+                <a:spcPts val="900"/>
               </a:spcAft>
-              <a:defRPr sz="2400">
-                <a:solidFill>
-                  <a:srgbClr val="232323"/>
-                </a:solidFill>
-              </a:defRPr>
-            </a:pPr>
-            <a:r>
-              <a:t>Only two base model families are tested.</a:t>
+              <a:defRPr sz="1300">
+                <a:solidFill>
+                  <a:srgbClr val="23272F"/>
+                </a:solidFill>
+              </a:defRPr>
+            </a:pPr>
+            <a:r>
+              <a:t>Method directly follows from the diagnosis.</a:t>
             </a:r>
           </a:p>
           <a:p>
             <a:pPr>
               <a:spcAft>
-                <a:spcPts val="1400"/>
+                <a:spcPts val="900"/>
               </a:spcAft>
-              <a:defRPr sz="2400">
-                <a:solidFill>
-                  <a:srgbClr val="232323"/>
-                </a:solidFill>
-              </a:defRPr>
-            </a:pPr>
-            <a:r>
-              <a:t>Compute overhead and seed robustness need more discussion.</a:t>
-            </a:r>
-          </a:p>
-        </p:txBody>
-      </p:sp>
-      <p:sp>
-        <p:nvSpPr>
-          <p:cNvPr id="4" name="TextBox 3"/>
+              <a:defRPr sz="1300">
+                <a:solidFill>
+                  <a:srgbClr val="23272F"/>
+                </a:solidFill>
+              </a:defRPr>
+            </a:pPr>
+            <a:r>
+              <a:t>Ablations show conditional preference is crucial.</a:t>
+            </a:r>
+          </a:p>
+          <a:p>
+            <a:pPr>
+              <a:spcAft>
+                <a:spcPts val="900"/>
+              </a:spcAft>
+              <a:defRPr sz="1300">
+                <a:solidFill>
+                  <a:srgbClr val="23272F"/>
+                </a:solidFill>
+              </a:defRPr>
+            </a:pPr>
+            <a:r>
+              <a:t>Human evaluation supports automatic metrics.</a:t>
+            </a:r>
+          </a:p>
+        </p:txBody>
+      </p:sp>
+      <p:sp>
+        <p:nvSpPr>
+          <p:cNvPr id="9" name="Rounded Rectangle 8"/>
+          <p:cNvSpPr/>
+          <p:nvPr/>
+        </p:nvSpPr>
+        <p:spPr>
+          <a:xfrm>
+            <a:off x="6309360" y="1417320"/>
+            <a:ext cx="5074920" cy="4206240"/>
+          </a:xfrm>
+          <a:prstGeom prst="roundRect">
+            <a:avLst/>
+          </a:prstGeom>
+          <a:solidFill>
+            <a:srgbClr val="FFEDED"/>
+          </a:solidFill>
+          <a:ln>
+            <a:solidFill>
+              <a:srgbClr val="DADEE2"/>
+            </a:solidFill>
+          </a:ln>
+        </p:spPr>
+        <p:style>
+          <a:lnRef idx="1">
+            <a:schemeClr val="accent1"/>
+          </a:lnRef>
+          <a:fillRef idx="3">
+            <a:schemeClr val="accent1"/>
+          </a:fillRef>
+          <a:effectRef idx="2">
+            <a:schemeClr val="accent1"/>
+          </a:effectRef>
+          <a:fontRef idx="minor">
+            <a:schemeClr val="lt1"/>
+          </a:fontRef>
+        </p:style>
+        <p:txBody>
+          <a:bodyPr rtlCol="0" anchor="ctr"/>
+          <a:lstStyle/>
+          <a:p>
+            <a:pPr algn="ctr"/>
+          </a:p>
+        </p:txBody>
+      </p:sp>
+      <p:sp>
+        <p:nvSpPr>
+          <p:cNvPr id="10" name="Rectangle 9"/>
+          <p:cNvSpPr/>
+          <p:nvPr/>
+        </p:nvSpPr>
+        <p:spPr>
+          <a:xfrm>
+            <a:off x="6309360" y="1417320"/>
+            <a:ext cx="73152" cy="4206240"/>
+          </a:xfrm>
+          <a:prstGeom prst="rect">
+            <a:avLst/>
+          </a:prstGeom>
+          <a:solidFill>
+            <a:srgbClr val="B43A3A"/>
+          </a:solidFill>
+          <a:ln>
+            <a:solidFill>
+              <a:srgbClr val="B43A3A"/>
+            </a:solidFill>
+          </a:ln>
+        </p:spPr>
+        <p:style>
+          <a:lnRef idx="1">
+            <a:schemeClr val="accent1"/>
+          </a:lnRef>
+          <a:fillRef idx="3">
+            <a:schemeClr val="accent1"/>
+          </a:fillRef>
+          <a:effectRef idx="2">
+            <a:schemeClr val="accent1"/>
+          </a:effectRef>
+          <a:fontRef idx="minor">
+            <a:schemeClr val="lt1"/>
+          </a:fontRef>
+        </p:style>
+        <p:txBody>
+          <a:bodyPr rtlCol="0" anchor="ctr"/>
+          <a:lstStyle/>
+          <a:p>
+            <a:pPr algn="ctr"/>
+          </a:p>
+        </p:txBody>
+      </p:sp>
+      <p:sp>
+        <p:nvSpPr>
+          <p:cNvPr id="11" name="TextBox 10"/>
           <p:cNvSpPr txBox="1"/>
           <p:nvPr/>
         </p:nvSpPr>
         <p:spPr>
           <a:xfrm>
-            <a:off x="502920" y="6263640"/>
-            <a:ext cx="11155680" cy="228600"/>
+            <a:off x="6510528" y="1581912"/>
+            <a:ext cx="4727448" cy="292608"/>
           </a:xfrm>
           <a:prstGeom prst="rect">
             <a:avLst/>
@@ -4252,20 +8216,188 @@
           <a:noFill/>
         </p:spPr>
         <p:txBody>
-          <a:bodyPr wrap="none">
+          <a:bodyPr wrap="none" lIns="45720" rIns="45720" anchor="t">
             <a:spAutoFit/>
           </a:bodyPr>
           <a:lstStyle/>
           <a:p>
+            <a:pPr algn="l">
+              <a:defRPr sz="1600" b="1">
+                <a:solidFill>
+                  <a:srgbClr val="162236"/>
+                </a:solidFill>
+              </a:defRPr>
+            </a:pPr>
+            <a:r>
+              <a:t>Weaknesses</a:t>
+            </a:r>
+          </a:p>
+        </p:txBody>
+      </p:sp>
+      <p:sp>
+        <p:nvSpPr>
+          <p:cNvPr id="12" name="TextBox 11"/>
+          <p:cNvSpPr txBox="1"/>
+          <p:nvPr/>
+        </p:nvSpPr>
+        <p:spPr>
+          <a:xfrm>
+            <a:off x="6510528" y="1984248"/>
+            <a:ext cx="4690872" cy="3529583"/>
+          </a:xfrm>
+          <a:prstGeom prst="rect">
+            <a:avLst/>
+          </a:prstGeom>
+          <a:noFill/>
+        </p:spPr>
+        <p:txBody>
+          <a:bodyPr wrap="square">
+            <a:spAutoFit/>
+          </a:bodyPr>
+          <a:lstStyle/>
+          <a:p>
+            <a:pPr>
+              <a:spcAft>
+                <a:spcPts val="900"/>
+              </a:spcAft>
+              <a:defRPr sz="1300">
+                <a:solidFill>
+                  <a:srgbClr val="23272F"/>
+                </a:solidFill>
+              </a:defRPr>
+            </a:pPr>
+            <a:r>
+              <a:t>Evaluation is concentrated on hallucination.</a:t>
+            </a:r>
+          </a:p>
+          <a:p>
+            <a:pPr>
+              <a:spcAft>
+                <a:spcPts val="900"/>
+              </a:spcAft>
+              <a:defRPr sz="1300">
+                <a:solidFill>
+                  <a:srgbClr val="23272F"/>
+                </a:solidFill>
+              </a:defRPr>
+            </a:pPr>
+            <a:r>
+              <a:t>Rejected-image construction may be brittle.</a:t>
+            </a:r>
+          </a:p>
+          <a:p>
+            <a:pPr>
+              <a:spcAft>
+                <a:spcPts val="900"/>
+              </a:spcAft>
+              <a:defRPr sz="1300">
+                <a:solidFill>
+                  <a:srgbClr val="23272F"/>
+                </a:solidFill>
+              </a:defRPr>
+            </a:pPr>
+            <a:r>
+              <a:t>Only two base model families are tested.</a:t>
+            </a:r>
+          </a:p>
+          <a:p>
+            <a:pPr>
+              <a:spcAft>
+                <a:spcPts val="900"/>
+              </a:spcAft>
+              <a:defRPr sz="1300">
+                <a:solidFill>
+                  <a:srgbClr val="23272F"/>
+                </a:solidFill>
+              </a:defRPr>
+            </a:pPr>
+            <a:r>
+              <a:t>Compute overhead and seed robustness are under-discussed.</a:t>
+            </a:r>
+          </a:p>
+          <a:p>
+            <a:pPr>
+              <a:spcAft>
+                <a:spcPts val="900"/>
+              </a:spcAft>
+              <a:defRPr sz="1300">
+                <a:solidFill>
+                  <a:srgbClr val="23272F"/>
+                </a:solidFill>
+              </a:defRPr>
+            </a:pPr>
+            <a:r>
+              <a:t>Little evidence for multilingual multimodal settings.</a:t>
+            </a:r>
+          </a:p>
+        </p:txBody>
+      </p:sp>
+      <p:sp>
+        <p:nvSpPr>
+          <p:cNvPr id="13" name="TextBox 12"/>
+          <p:cNvSpPr txBox="1"/>
+          <p:nvPr/>
+        </p:nvSpPr>
+        <p:spPr>
+          <a:xfrm>
+            <a:off x="594360" y="6446520"/>
+            <a:ext cx="5029200" cy="228600"/>
+          </a:xfrm>
+          <a:prstGeom prst="rect">
+            <a:avLst/>
+          </a:prstGeom>
+          <a:noFill/>
+        </p:spPr>
+        <p:txBody>
+          <a:bodyPr wrap="none" lIns="45720" rIns="45720" anchor="t">
+            <a:spAutoFit/>
+          </a:bodyPr>
+          <a:lstStyle/>
+          <a:p>
+            <a:pPr algn="l">
+              <a:defRPr sz="800" b="0">
+                <a:solidFill>
+                  <a:srgbClr val="69707A"/>
+                </a:solidFill>
+              </a:defRPr>
+            </a:pPr>
+            <a:r>
+              <a:t>MDPO paper review</a:t>
+            </a:r>
+          </a:p>
+        </p:txBody>
+      </p:sp>
+      <p:sp>
+        <p:nvSpPr>
+          <p:cNvPr id="14" name="TextBox 13"/>
+          <p:cNvSpPr txBox="1"/>
+          <p:nvPr/>
+        </p:nvSpPr>
+        <p:spPr>
+          <a:xfrm>
+            <a:off x="10698480" y="6446520"/>
+            <a:ext cx="822960" cy="228600"/>
+          </a:xfrm>
+          <a:prstGeom prst="rect">
+            <a:avLst/>
+          </a:prstGeom>
+          <a:noFill/>
+        </p:spPr>
+        <p:txBody>
+          <a:bodyPr wrap="none" lIns="45720" rIns="45720" anchor="t">
+            <a:spAutoFit/>
+          </a:bodyPr>
+          <a:lstStyle/>
+          <a:p>
             <a:pPr algn="r">
-              <a:defRPr sz="800">
-                <a:solidFill>
-                  <a:srgbClr val="5F5F5F"/>
-                </a:solidFill>
-              </a:defRPr>
-            </a:pPr>
-            <a:r>
-              <a:t>MDPO paper review | Slide 7</a:t>
+              <a:defRPr sz="800" b="0">
+                <a:solidFill>
+                  <a:srgbClr val="69707A"/>
+                </a:solidFill>
+              </a:defRPr>
+            </a:pPr>
+            <a:r>
+              <a:t>7</a:t>
             </a:r>
           </a:p>
         </p:txBody>
@@ -4284,7 +8416,7 @@
     <p:bg>
       <p:bgPr>
         <a:solidFill>
-          <a:srgbClr val="FAFAF8"/>
+          <a:srgbClr val="FCFCFA"/>
         </a:solidFill>
         <a:effectLst/>
       </p:bgPr>
@@ -4304,8 +8436,8 @@
         </p:nvSpPr>
         <p:spPr>
           <a:xfrm>
-            <a:off x="594360" y="411480"/>
-            <a:ext cx="10881360" cy="731520"/>
+            <a:off x="594360" y="384048"/>
+            <a:ext cx="10789920" cy="502920"/>
           </a:xfrm>
           <a:prstGeom prst="rect">
             <a:avLst/>
@@ -4313,20 +8445,20 @@
           <a:noFill/>
         </p:spPr>
         <p:txBody>
-          <a:bodyPr wrap="none">
+          <a:bodyPr wrap="none" lIns="45720" rIns="45720" anchor="t">
             <a:spAutoFit/>
           </a:bodyPr>
           <a:lstStyle/>
           <a:p>
-            <a:pPr>
-              <a:defRPr b="1" sz="3400">
-                <a:solidFill>
-                  <a:srgbClr val="1E2D46"/>
-                </a:solidFill>
-              </a:defRPr>
-            </a:pPr>
-            <a:r>
-              <a:t>Recommendation</a:t>
+            <a:pPr algn="l">
+              <a:defRPr sz="3000" b="1">
+                <a:solidFill>
+                  <a:srgbClr val="162236"/>
+                </a:solidFill>
+              </a:defRPr>
+            </a:pPr>
+            <a:r>
+              <a:t>Verdict and Discussion</a:t>
             </a:r>
           </a:p>
         </p:txBody>
@@ -4339,8 +8471,8 @@
         </p:nvSpPr>
         <p:spPr>
           <a:xfrm>
-            <a:off x="822960" y="1417320"/>
-            <a:ext cx="10424160" cy="4389120"/>
+            <a:off x="621792" y="877824"/>
+            <a:ext cx="10424160" cy="320040"/>
           </a:xfrm>
           <a:prstGeom prst="rect">
             <a:avLst/>
@@ -4348,82 +8480,670 @@
           <a:noFill/>
         </p:spPr>
         <p:txBody>
-          <a:bodyPr wrap="none">
+          <a:bodyPr wrap="none" lIns="45720" rIns="45720" anchor="t">
             <a:spAutoFit/>
           </a:bodyPr>
           <a:lstStyle/>
           <a:p>
+            <a:pPr algn="l">
+              <a:defRPr sz="1200" b="0">
+                <a:solidFill>
+                  <a:srgbClr val="69707A"/>
+                </a:solidFill>
+              </a:defRPr>
+            </a:pPr>
+            <a:r>
+              <a:t>Recommendation: Weak Accept.</a:t>
+            </a:r>
+          </a:p>
+        </p:txBody>
+      </p:sp>
+      <p:sp>
+        <p:nvSpPr>
+          <p:cNvPr id="4" name="Rectangle 3"/>
+          <p:cNvSpPr/>
+          <p:nvPr/>
+        </p:nvSpPr>
+        <p:spPr>
+          <a:xfrm>
+            <a:off x="621792" y="1170432"/>
+            <a:ext cx="1051560" cy="36576"/>
+          </a:xfrm>
+          <a:prstGeom prst="rect">
+            <a:avLst/>
+          </a:prstGeom>
+          <a:solidFill>
+            <a:srgbClr val="008080"/>
+          </a:solidFill>
+          <a:ln>
+            <a:solidFill>
+              <a:srgbClr val="008080"/>
+            </a:solidFill>
+          </a:ln>
+        </p:spPr>
+        <p:style>
+          <a:lnRef idx="1">
+            <a:schemeClr val="accent1"/>
+          </a:lnRef>
+          <a:fillRef idx="3">
+            <a:schemeClr val="accent1"/>
+          </a:fillRef>
+          <a:effectRef idx="2">
+            <a:schemeClr val="accent1"/>
+          </a:effectRef>
+          <a:fontRef idx="minor">
+            <a:schemeClr val="lt1"/>
+          </a:fontRef>
+        </p:style>
+        <p:txBody>
+          <a:bodyPr rtlCol="0" anchor="ctr"/>
+          <a:lstStyle/>
+          <a:p>
+            <a:pPr algn="ctr"/>
+          </a:p>
+        </p:txBody>
+      </p:sp>
+      <p:sp>
+        <p:nvSpPr>
+          <p:cNvPr id="5" name="Rounded Rectangle 4"/>
+          <p:cNvSpPr/>
+          <p:nvPr/>
+        </p:nvSpPr>
+        <p:spPr>
+          <a:xfrm>
+            <a:off x="868680" y="1481328"/>
+            <a:ext cx="2057400" cy="475488"/>
+          </a:xfrm>
+          <a:prstGeom prst="roundRect">
+            <a:avLst/>
+          </a:prstGeom>
+          <a:solidFill>
+            <a:srgbClr val="C2841C"/>
+          </a:solidFill>
+          <a:ln>
+            <a:solidFill>
+              <a:srgbClr val="C2841C"/>
+            </a:solidFill>
+          </a:ln>
+        </p:spPr>
+        <p:style>
+          <a:lnRef idx="1">
+            <a:schemeClr val="accent1"/>
+          </a:lnRef>
+          <a:fillRef idx="3">
+            <a:schemeClr val="accent1"/>
+          </a:fillRef>
+          <a:effectRef idx="2">
+            <a:schemeClr val="accent1"/>
+          </a:effectRef>
+          <a:fontRef idx="minor">
+            <a:schemeClr val="lt1"/>
+          </a:fontRef>
+        </p:style>
+        <p:txBody>
+          <a:bodyPr rtlCol="0" anchor="ctr"/>
+          <a:lstStyle/>
+          <a:p>
+            <a:pPr algn="ctr"/>
+          </a:p>
+        </p:txBody>
+      </p:sp>
+      <p:sp>
+        <p:nvSpPr>
+          <p:cNvPr id="6" name="TextBox 5"/>
+          <p:cNvSpPr txBox="1"/>
+          <p:nvPr/>
+        </p:nvSpPr>
+        <p:spPr>
+          <a:xfrm>
+            <a:off x="868680" y="1536192"/>
+            <a:ext cx="2057400" cy="402336"/>
+          </a:xfrm>
+          <a:prstGeom prst="rect">
+            <a:avLst/>
+          </a:prstGeom>
+          <a:noFill/>
+        </p:spPr>
+        <p:txBody>
+          <a:bodyPr wrap="none" lIns="45720" rIns="45720" anchor="t">
+            <a:spAutoFit/>
+          </a:bodyPr>
+          <a:lstStyle/>
+          <a:p>
+            <a:pPr algn="ctr">
+              <a:defRPr sz="1300" b="1">
+                <a:solidFill>
+                  <a:srgbClr val="FFFFFF"/>
+                </a:solidFill>
+              </a:defRPr>
+            </a:pPr>
+            <a:r>
+              <a:t>Weak Accept</a:t>
+            </a:r>
+          </a:p>
+        </p:txBody>
+      </p:sp>
+      <p:sp>
+        <p:nvSpPr>
+          <p:cNvPr id="7" name="TextBox 6"/>
+          <p:cNvSpPr txBox="1"/>
+          <p:nvPr/>
+        </p:nvSpPr>
+        <p:spPr>
+          <a:xfrm>
+            <a:off x="896112" y="2176272"/>
+            <a:ext cx="10424160" cy="658368"/>
+          </a:xfrm>
+          <a:prstGeom prst="rect">
+            <a:avLst/>
+          </a:prstGeom>
+          <a:noFill/>
+        </p:spPr>
+        <p:txBody>
+          <a:bodyPr wrap="none" lIns="45720" rIns="45720" anchor="t">
+            <a:spAutoFit/>
+          </a:bodyPr>
+          <a:lstStyle/>
+          <a:p>
+            <a:pPr algn="l">
+              <a:defRPr sz="2000" b="1">
+                <a:solidFill>
+                  <a:srgbClr val="162236"/>
+                </a:solidFill>
+              </a:defRPr>
+            </a:pPr>
+            <a:r>
+              <a:t>This is a meaningful contribution: it identifies a real pitfall in multimodal DPO and proposes a simple, effective correction.</a:t>
+            </a:r>
+          </a:p>
+        </p:txBody>
+      </p:sp>
+      <p:sp>
+        <p:nvSpPr>
+          <p:cNvPr id="8" name="Rounded Rectangle 7"/>
+          <p:cNvSpPr/>
+          <p:nvPr/>
+        </p:nvSpPr>
+        <p:spPr>
+          <a:xfrm>
+            <a:off x="914400" y="3218688"/>
+            <a:ext cx="3291840" cy="1417320"/>
+          </a:xfrm>
+          <a:prstGeom prst="roundRect">
+            <a:avLst/>
+          </a:prstGeom>
+          <a:solidFill>
+            <a:srgbClr val="E0F4EE"/>
+          </a:solidFill>
+          <a:ln>
+            <a:solidFill>
+              <a:srgbClr val="DADEE2"/>
+            </a:solidFill>
+          </a:ln>
+        </p:spPr>
+        <p:style>
+          <a:lnRef idx="1">
+            <a:schemeClr val="accent1"/>
+          </a:lnRef>
+          <a:fillRef idx="3">
+            <a:schemeClr val="accent1"/>
+          </a:fillRef>
+          <a:effectRef idx="2">
+            <a:schemeClr val="accent1"/>
+          </a:effectRef>
+          <a:fontRef idx="minor">
+            <a:schemeClr val="lt1"/>
+          </a:fontRef>
+        </p:style>
+        <p:txBody>
+          <a:bodyPr rtlCol="0" anchor="ctr"/>
+          <a:lstStyle/>
+          <a:p>
+            <a:pPr algn="ctr"/>
+          </a:p>
+        </p:txBody>
+      </p:sp>
+      <p:sp>
+        <p:nvSpPr>
+          <p:cNvPr id="9" name="Rectangle 8"/>
+          <p:cNvSpPr/>
+          <p:nvPr/>
+        </p:nvSpPr>
+        <p:spPr>
+          <a:xfrm>
+            <a:off x="914400" y="3218688"/>
+            <a:ext cx="73152" cy="1417320"/>
+          </a:xfrm>
+          <a:prstGeom prst="rect">
+            <a:avLst/>
+          </a:prstGeom>
+          <a:solidFill>
+            <a:srgbClr val="238756"/>
+          </a:solidFill>
+          <a:ln>
+            <a:solidFill>
+              <a:srgbClr val="238756"/>
+            </a:solidFill>
+          </a:ln>
+        </p:spPr>
+        <p:style>
+          <a:lnRef idx="1">
+            <a:schemeClr val="accent1"/>
+          </a:lnRef>
+          <a:fillRef idx="3">
+            <a:schemeClr val="accent1"/>
+          </a:fillRef>
+          <a:effectRef idx="2">
+            <a:schemeClr val="accent1"/>
+          </a:effectRef>
+          <a:fontRef idx="minor">
+            <a:schemeClr val="lt1"/>
+          </a:fontRef>
+        </p:style>
+        <p:txBody>
+          <a:bodyPr rtlCol="0" anchor="ctr"/>
+          <a:lstStyle/>
+          <a:p>
+            <a:pPr algn="ctr"/>
+          </a:p>
+        </p:txBody>
+      </p:sp>
+      <p:sp>
+        <p:nvSpPr>
+          <p:cNvPr id="10" name="TextBox 9"/>
+          <p:cNvSpPr txBox="1"/>
+          <p:nvPr/>
+        </p:nvSpPr>
+        <p:spPr>
+          <a:xfrm>
+            <a:off x="1115568" y="3383280"/>
+            <a:ext cx="2944368" cy="292608"/>
+          </a:xfrm>
+          <a:prstGeom prst="rect">
+            <a:avLst/>
+          </a:prstGeom>
+          <a:noFill/>
+        </p:spPr>
+        <p:txBody>
+          <a:bodyPr wrap="none" lIns="45720" rIns="45720" anchor="t">
+            <a:spAutoFit/>
+          </a:bodyPr>
+          <a:lstStyle/>
+          <a:p>
+            <a:pPr algn="l">
+              <a:defRPr sz="1600" b="1">
+                <a:solidFill>
+                  <a:srgbClr val="162236"/>
+                </a:solidFill>
+              </a:defRPr>
+            </a:pPr>
+            <a:r>
+              <a:t>Why accept?</a:t>
+            </a:r>
+          </a:p>
+        </p:txBody>
+      </p:sp>
+      <p:sp>
+        <p:nvSpPr>
+          <p:cNvPr id="11" name="TextBox 10"/>
+          <p:cNvSpPr txBox="1"/>
+          <p:nvPr/>
+        </p:nvSpPr>
+        <p:spPr>
+          <a:xfrm>
+            <a:off x="1115568" y="3785615"/>
+            <a:ext cx="2907792" cy="740664"/>
+          </a:xfrm>
+          <a:prstGeom prst="rect">
+            <a:avLst/>
+          </a:prstGeom>
+          <a:noFill/>
+        </p:spPr>
+        <p:txBody>
+          <a:bodyPr wrap="square">
+            <a:spAutoFit/>
+          </a:bodyPr>
+          <a:lstStyle/>
+          <a:p>
             <a:pPr>
               <a:spcAft>
-                <a:spcPts val="1400"/>
+                <a:spcPts val="900"/>
               </a:spcAft>
-              <a:defRPr sz="2400">
-                <a:solidFill>
-                  <a:srgbClr val="232323"/>
-                </a:solidFill>
-              </a:defRPr>
-            </a:pPr>
-            <a:r>
-              <a:t>Weak Accept.</a:t>
+              <a:defRPr sz="1300">
+                <a:solidFill>
+                  <a:srgbClr val="23272F"/>
+                </a:solidFill>
+              </a:defRPr>
+            </a:pPr>
+            <a:r>
+              <a:t>Important problem</a:t>
             </a:r>
           </a:p>
           <a:p>
             <a:pPr>
               <a:spcAft>
-                <a:spcPts val="1400"/>
+                <a:spcPts val="900"/>
               </a:spcAft>
-              <a:defRPr sz="2400">
-                <a:solidFill>
-                  <a:srgbClr val="232323"/>
-                </a:solidFill>
-              </a:defRPr>
-            </a:pPr>
-            <a:r>
-              <a:t>The paper identifies an important multimodal DPO failure mode.</a:t>
+              <a:defRPr sz="1300">
+                <a:solidFill>
+                  <a:srgbClr val="23272F"/>
+                </a:solidFill>
+              </a:defRPr>
+            </a:pPr>
+            <a:r>
+              <a:t>Good diagnostic</a:t>
             </a:r>
           </a:p>
           <a:p>
             <a:pPr>
               <a:spcAft>
-                <a:spcPts val="1400"/>
+                <a:spcPts val="900"/>
               </a:spcAft>
-              <a:defRPr sz="2400">
-                <a:solidFill>
-                  <a:srgbClr val="232323"/>
-                </a:solidFill>
-              </a:defRPr>
-            </a:pPr>
-            <a:r>
-              <a:t>MDPO is simple, effective, and supported by useful ablations.</a:t>
-            </a:r>
-          </a:p>
+              <a:defRPr sz="1300">
+                <a:solidFill>
+                  <a:srgbClr val="23272F"/>
+                </a:solidFill>
+              </a:defRPr>
+            </a:pPr>
+            <a:r>
+              <a:t>Useful ablations</a:t>
+            </a:r>
+          </a:p>
+        </p:txBody>
+      </p:sp>
+      <p:sp>
+        <p:nvSpPr>
+          <p:cNvPr id="12" name="Rounded Rectangle 11"/>
+          <p:cNvSpPr/>
+          <p:nvPr/>
+        </p:nvSpPr>
+        <p:spPr>
+          <a:xfrm>
+            <a:off x="4480560" y="3218688"/>
+            <a:ext cx="3291840" cy="1417320"/>
+          </a:xfrm>
+          <a:prstGeom prst="roundRect">
+            <a:avLst/>
+          </a:prstGeom>
+          <a:solidFill>
+            <a:srgbClr val="FFF4E6"/>
+          </a:solidFill>
+          <a:ln>
+            <a:solidFill>
+              <a:srgbClr val="DADEE2"/>
+            </a:solidFill>
+          </a:ln>
+        </p:spPr>
+        <p:style>
+          <a:lnRef idx="1">
+            <a:schemeClr val="accent1"/>
+          </a:lnRef>
+          <a:fillRef idx="3">
+            <a:schemeClr val="accent1"/>
+          </a:fillRef>
+          <a:effectRef idx="2">
+            <a:schemeClr val="accent1"/>
+          </a:effectRef>
+          <a:fontRef idx="minor">
+            <a:schemeClr val="lt1"/>
+          </a:fontRef>
+        </p:style>
+        <p:txBody>
+          <a:bodyPr rtlCol="0" anchor="ctr"/>
+          <a:lstStyle/>
+          <a:p>
+            <a:pPr algn="ctr"/>
+          </a:p>
+        </p:txBody>
+      </p:sp>
+      <p:sp>
+        <p:nvSpPr>
+          <p:cNvPr id="13" name="Rectangle 12"/>
+          <p:cNvSpPr/>
+          <p:nvPr/>
+        </p:nvSpPr>
+        <p:spPr>
+          <a:xfrm>
+            <a:off x="4480560" y="3218688"/>
+            <a:ext cx="73152" cy="1417320"/>
+          </a:xfrm>
+          <a:prstGeom prst="rect">
+            <a:avLst/>
+          </a:prstGeom>
+          <a:solidFill>
+            <a:srgbClr val="C2841C"/>
+          </a:solidFill>
+          <a:ln>
+            <a:solidFill>
+              <a:srgbClr val="C2841C"/>
+            </a:solidFill>
+          </a:ln>
+        </p:spPr>
+        <p:style>
+          <a:lnRef idx="1">
+            <a:schemeClr val="accent1"/>
+          </a:lnRef>
+          <a:fillRef idx="3">
+            <a:schemeClr val="accent1"/>
+          </a:fillRef>
+          <a:effectRef idx="2">
+            <a:schemeClr val="accent1"/>
+          </a:effectRef>
+          <a:fontRef idx="minor">
+            <a:schemeClr val="lt1"/>
+          </a:fontRef>
+        </p:style>
+        <p:txBody>
+          <a:bodyPr rtlCol="0" anchor="ctr"/>
+          <a:lstStyle/>
+          <a:p>
+            <a:pPr algn="ctr"/>
+          </a:p>
+        </p:txBody>
+      </p:sp>
+      <p:sp>
+        <p:nvSpPr>
+          <p:cNvPr id="14" name="TextBox 13"/>
+          <p:cNvSpPr txBox="1"/>
+          <p:nvPr/>
+        </p:nvSpPr>
+        <p:spPr>
+          <a:xfrm>
+            <a:off x="4681728" y="3383280"/>
+            <a:ext cx="2944368" cy="292608"/>
+          </a:xfrm>
+          <a:prstGeom prst="rect">
+            <a:avLst/>
+          </a:prstGeom>
+          <a:noFill/>
+        </p:spPr>
+        <p:txBody>
+          <a:bodyPr wrap="none" lIns="45720" rIns="45720" anchor="t">
+            <a:spAutoFit/>
+          </a:bodyPr>
+          <a:lstStyle/>
+          <a:p>
+            <a:pPr algn="l">
+              <a:defRPr sz="1600" b="1">
+                <a:solidFill>
+                  <a:srgbClr val="162236"/>
+                </a:solidFill>
+              </a:defRPr>
+            </a:pPr>
+            <a:r>
+              <a:t>Why not strong accept?</a:t>
+            </a:r>
+          </a:p>
+        </p:txBody>
+      </p:sp>
+      <p:sp>
+        <p:nvSpPr>
+          <p:cNvPr id="15" name="TextBox 14"/>
+          <p:cNvSpPr txBox="1"/>
+          <p:nvPr/>
+        </p:nvSpPr>
+        <p:spPr>
+          <a:xfrm>
+            <a:off x="4681728" y="3785615"/>
+            <a:ext cx="2907792" cy="740664"/>
+          </a:xfrm>
+          <a:prstGeom prst="rect">
+            <a:avLst/>
+          </a:prstGeom>
+          <a:noFill/>
+        </p:spPr>
+        <p:txBody>
+          <a:bodyPr wrap="square">
+            <a:spAutoFit/>
+          </a:bodyPr>
+          <a:lstStyle/>
           <a:p>
             <a:pPr>
               <a:spcAft>
-                <a:spcPts val="1400"/>
+                <a:spcPts val="900"/>
               </a:spcAft>
-              <a:defRPr sz="2400">
-                <a:solidFill>
-                  <a:srgbClr val="232323"/>
-                </a:solidFill>
-              </a:defRPr>
-            </a:pPr>
-            <a:r>
-              <a:t>A broader evaluation would make the contribution stronger.</a:t>
-            </a:r>
-          </a:p>
-        </p:txBody>
-      </p:sp>
-      <p:sp>
-        <p:nvSpPr>
-          <p:cNvPr id="4" name="TextBox 3"/>
+              <a:defRPr sz="1300">
+                <a:solidFill>
+                  <a:srgbClr val="23272F"/>
+                </a:solidFill>
+              </a:defRPr>
+            </a:pPr>
+            <a:r>
+              <a:t>Narrow benchmark focus</a:t>
+            </a:r>
+          </a:p>
+          <a:p>
+            <a:pPr>
+              <a:spcAft>
+                <a:spcPts val="900"/>
+              </a:spcAft>
+              <a:defRPr sz="1300">
+                <a:solidFill>
+                  <a:srgbClr val="23272F"/>
+                </a:solidFill>
+              </a:defRPr>
+            </a:pPr>
+            <a:r>
+              <a:t>Limited model coverage</a:t>
+            </a:r>
+          </a:p>
+          <a:p>
+            <a:pPr>
+              <a:spcAft>
+                <a:spcPts val="900"/>
+              </a:spcAft>
+              <a:defRPr sz="1300">
+                <a:solidFill>
+                  <a:srgbClr val="23272F"/>
+                </a:solidFill>
+              </a:defRPr>
+            </a:pPr>
+            <a:r>
+              <a:t>More robustness needed</a:t>
+            </a:r>
+          </a:p>
+        </p:txBody>
+      </p:sp>
+      <p:sp>
+        <p:nvSpPr>
+          <p:cNvPr id="16" name="Rounded Rectangle 15"/>
+          <p:cNvSpPr/>
+          <p:nvPr/>
+        </p:nvSpPr>
+        <p:spPr>
+          <a:xfrm>
+            <a:off x="8046720" y="3218688"/>
+            <a:ext cx="3291840" cy="1417320"/>
+          </a:xfrm>
+          <a:prstGeom prst="roundRect">
+            <a:avLst/>
+          </a:prstGeom>
+          <a:solidFill>
+            <a:srgbClr val="FFFFFF"/>
+          </a:solidFill>
+          <a:ln>
+            <a:solidFill>
+              <a:srgbClr val="DADEE2"/>
+            </a:solidFill>
+          </a:ln>
+        </p:spPr>
+        <p:style>
+          <a:lnRef idx="1">
+            <a:schemeClr val="accent1"/>
+          </a:lnRef>
+          <a:fillRef idx="3">
+            <a:schemeClr val="accent1"/>
+          </a:fillRef>
+          <a:effectRef idx="2">
+            <a:schemeClr val="accent1"/>
+          </a:effectRef>
+          <a:fontRef idx="minor">
+            <a:schemeClr val="lt1"/>
+          </a:fontRef>
+        </p:style>
+        <p:txBody>
+          <a:bodyPr rtlCol="0" anchor="ctr"/>
+          <a:lstStyle/>
+          <a:p>
+            <a:pPr algn="ctr"/>
+          </a:p>
+        </p:txBody>
+      </p:sp>
+      <p:sp>
+        <p:nvSpPr>
+          <p:cNvPr id="17" name="Rectangle 16"/>
+          <p:cNvSpPr/>
+          <p:nvPr/>
+        </p:nvSpPr>
+        <p:spPr>
+          <a:xfrm>
+            <a:off x="8046720" y="3218688"/>
+            <a:ext cx="73152" cy="1417320"/>
+          </a:xfrm>
+          <a:prstGeom prst="rect">
+            <a:avLst/>
+          </a:prstGeom>
+          <a:solidFill>
+            <a:srgbClr val="285E96"/>
+          </a:solidFill>
+          <a:ln>
+            <a:solidFill>
+              <a:srgbClr val="285E96"/>
+            </a:solidFill>
+          </a:ln>
+        </p:spPr>
+        <p:style>
+          <a:lnRef idx="1">
+            <a:schemeClr val="accent1"/>
+          </a:lnRef>
+          <a:fillRef idx="3">
+            <a:schemeClr val="accent1"/>
+          </a:fillRef>
+          <a:effectRef idx="2">
+            <a:schemeClr val="accent1"/>
+          </a:effectRef>
+          <a:fontRef idx="minor">
+            <a:schemeClr val="lt1"/>
+          </a:fontRef>
+        </p:style>
+        <p:txBody>
+          <a:bodyPr rtlCol="0" anchor="ctr"/>
+          <a:lstStyle/>
+          <a:p>
+            <a:pPr algn="ctr"/>
+          </a:p>
+        </p:txBody>
+      </p:sp>
+      <p:sp>
+        <p:nvSpPr>
+          <p:cNvPr id="18" name="TextBox 17"/>
           <p:cNvSpPr txBox="1"/>
           <p:nvPr/>
         </p:nvSpPr>
         <p:spPr>
           <a:xfrm>
-            <a:off x="502920" y="6263640"/>
-            <a:ext cx="11155680" cy="228600"/>
+            <a:off x="8247888" y="3383280"/>
+            <a:ext cx="2944368" cy="292608"/>
           </a:xfrm>
           <a:prstGeom prst="rect">
             <a:avLst/>
@@ -4431,20 +9151,128 @@
           <a:noFill/>
         </p:spPr>
         <p:txBody>
-          <a:bodyPr wrap="none">
+          <a:bodyPr wrap="none" lIns="45720" rIns="45720" anchor="t">
             <a:spAutoFit/>
           </a:bodyPr>
           <a:lstStyle/>
           <a:p>
+            <a:pPr algn="l">
+              <a:defRPr sz="1600" b="1">
+                <a:solidFill>
+                  <a:srgbClr val="162236"/>
+                </a:solidFill>
+              </a:defRPr>
+            </a:pPr>
+            <a:r>
+              <a:t>Future question</a:t>
+            </a:r>
+          </a:p>
+        </p:txBody>
+      </p:sp>
+      <p:sp>
+        <p:nvSpPr>
+          <p:cNvPr id="19" name="TextBox 18"/>
+          <p:cNvSpPr txBox="1"/>
+          <p:nvPr/>
+        </p:nvSpPr>
+        <p:spPr>
+          <a:xfrm>
+            <a:off x="8247888" y="3785615"/>
+            <a:ext cx="2907792" cy="740664"/>
+          </a:xfrm>
+          <a:prstGeom prst="rect">
+            <a:avLst/>
+          </a:prstGeom>
+          <a:noFill/>
+        </p:spPr>
+        <p:txBody>
+          <a:bodyPr wrap="square">
+            <a:spAutoFit/>
+          </a:bodyPr>
+          <a:lstStyle/>
+          <a:p>
+            <a:pPr>
+              <a:spcAft>
+                <a:spcPts val="900"/>
+              </a:spcAft>
+              <a:defRPr sz="1300">
+                <a:solidFill>
+                  <a:srgbClr val="23272F"/>
+                </a:solidFill>
+              </a:defRPr>
+            </a:pPr>
+            <a:r>
+              <a:t>Does unconditional preference also affect non-English multimodal prompts?</a:t>
+            </a:r>
+          </a:p>
+        </p:txBody>
+      </p:sp>
+      <p:sp>
+        <p:nvSpPr>
+          <p:cNvPr id="20" name="TextBox 19"/>
+          <p:cNvSpPr txBox="1"/>
+          <p:nvPr/>
+        </p:nvSpPr>
+        <p:spPr>
+          <a:xfrm>
+            <a:off x="594360" y="6446520"/>
+            <a:ext cx="5029200" cy="228600"/>
+          </a:xfrm>
+          <a:prstGeom prst="rect">
+            <a:avLst/>
+          </a:prstGeom>
+          <a:noFill/>
+        </p:spPr>
+        <p:txBody>
+          <a:bodyPr wrap="none" lIns="45720" rIns="45720" anchor="t">
+            <a:spAutoFit/>
+          </a:bodyPr>
+          <a:lstStyle/>
+          <a:p>
+            <a:pPr algn="l">
+              <a:defRPr sz="800" b="0">
+                <a:solidFill>
+                  <a:srgbClr val="69707A"/>
+                </a:solidFill>
+              </a:defRPr>
+            </a:pPr>
+            <a:r>
+              <a:t>MDPO paper review</a:t>
+            </a:r>
+          </a:p>
+        </p:txBody>
+      </p:sp>
+      <p:sp>
+        <p:nvSpPr>
+          <p:cNvPr id="21" name="TextBox 20"/>
+          <p:cNvSpPr txBox="1"/>
+          <p:nvPr/>
+        </p:nvSpPr>
+        <p:spPr>
+          <a:xfrm>
+            <a:off x="10698480" y="6446520"/>
+            <a:ext cx="822960" cy="228600"/>
+          </a:xfrm>
+          <a:prstGeom prst="rect">
+            <a:avLst/>
+          </a:prstGeom>
+          <a:noFill/>
+        </p:spPr>
+        <p:txBody>
+          <a:bodyPr wrap="none" lIns="45720" rIns="45720" anchor="t">
+            <a:spAutoFit/>
+          </a:bodyPr>
+          <a:lstStyle/>
+          <a:p>
             <a:pPr algn="r">
-              <a:defRPr sz="800">
-                <a:solidFill>
-                  <a:srgbClr val="5F5F5F"/>
-                </a:solidFill>
-              </a:defRPr>
-            </a:pPr>
-            <a:r>
-              <a:t>MDPO paper review | Slide 8</a:t>
+              <a:defRPr sz="800" b="0">
+                <a:solidFill>
+                  <a:srgbClr val="69707A"/>
+                </a:solidFill>
+              </a:defRPr>
+            </a:pPr>
+            <a:r>
+              <a:t>8</a:t>
             </a:r>
           </a:p>
         </p:txBody>

--- a/Task3_Paper_Review/part3_mdpo_review_slides.pptx
+++ b/Task3_Paper_Review/part3_mdpo_review_slides.pptx
@@ -5,16 +5,16 @@
     <p:sldMasterId id="2147483648" r:id="rId1"/>
   </p:sldMasterIdLst>
   <p:sldIdLst>
-    <p:sldId id="256" r:id="rId7"/>
-    <p:sldId id="257" r:id="rId8"/>
-    <p:sldId id="258" r:id="rId9"/>
-    <p:sldId id="259" r:id="rId10"/>
-    <p:sldId id="260" r:id="rId11"/>
-    <p:sldId id="261" r:id="rId12"/>
-    <p:sldId id="262" r:id="rId13"/>
-    <p:sldId id="263" r:id="rId14"/>
+    <p:sldId id="256" r:id="rId2"/>
+    <p:sldId id="257" r:id="rId3"/>
+    <p:sldId id="258" r:id="rId4"/>
+    <p:sldId id="259" r:id="rId5"/>
+    <p:sldId id="260" r:id="rId6"/>
+    <p:sldId id="261" r:id="rId7"/>
+    <p:sldId id="262" r:id="rId8"/>
+    <p:sldId id="263" r:id="rId9"/>
   </p:sldIdLst>
-  <p:sldSz cx="12191695" cy="6858000" type="screen4x3"/>
+  <p:sldSz cx="12192000" cy="6858000"/>
   <p:notesSz cx="6858000" cy="9144000"/>
   <p:defaultTextStyle>
     <a:defPPr>
@@ -111,6 +111,22 @@
       </a:defRPr>
     </a:lvl9pPr>
   </p:defaultTextStyle>
+  <p:extLst>
+    <p:ext uri="{EFAFB233-063F-42B5-8137-9DF3F51BA10A}">
+      <p15:sldGuideLst xmlns:p15="http://schemas.microsoft.com/office/powerpoint/2012/main">
+        <p15:guide id="1" orient="horz" pos="2160">
+          <p15:clr>
+            <a:srgbClr val="A4A3A4"/>
+          </p15:clr>
+        </p15:guide>
+        <p15:guide id="2" pos="2880">
+          <p15:clr>
+            <a:srgbClr val="A4A3A4"/>
+          </p15:clr>
+        </p15:guide>
+      </p15:sldGuideLst>
+    </p:ext>
+  </p:extLst>
 </p:presentation>
 </file>
 
@@ -152,10 +168,9 @@
           <a:lstStyle/>
           <a:p>
             <a:r>
-              <a:rPr lang="en-US" smtClean="0"/>
+              <a:rPr lang="en-US"/>
               <a:t>Click to edit Master title style</a:t>
             </a:r>
-            <a:endParaRPr lang="en-US"/>
           </a:p>
         </p:txBody>
       </p:sp>
@@ -271,10 +286,9 @@
           </a:lstStyle>
           <a:p>
             <a:r>
-              <a:rPr lang="en-US" smtClean="0"/>
+              <a:rPr lang="en-US"/>
               <a:t>Click to edit Master subtitle style</a:t>
             </a:r>
-            <a:endParaRPr lang="en-US"/>
           </a:p>
         </p:txBody>
       </p:sp>
@@ -295,7 +309,7 @@
           <a:p>
             <a:fld id="{5BCAD085-E8A6-8845-BD4E-CB4CCA059FC4}" type="datetimeFigureOut">
               <a:rPr lang="en-US" smtClean="0"/>
-              <a:t>1/27/13</a:t>
+              <a:t>7/8/2026</a:t>
             </a:fld>
             <a:endParaRPr lang="en-US"/>
           </a:p>
@@ -389,10 +403,9 @@
           <a:lstStyle/>
           <a:p>
             <a:r>
-              <a:rPr lang="en-US" smtClean="0"/>
+              <a:rPr lang="en-US"/>
               <a:t>Click to edit Master title style</a:t>
             </a:r>
-            <a:endParaRPr lang="en-US"/>
           </a:p>
         </p:txBody>
       </p:sp>
@@ -413,38 +426,37 @@
           <a:p>
             <a:pPr lvl="0"/>
             <a:r>
-              <a:rPr lang="en-US" smtClean="0"/>
+              <a:rPr lang="en-US"/>
               <a:t>Click to edit Master text styles</a:t>
             </a:r>
           </a:p>
           <a:p>
             <a:pPr lvl="1"/>
             <a:r>
-              <a:rPr lang="en-US" smtClean="0"/>
+              <a:rPr lang="en-US"/>
               <a:t>Second level</a:t>
             </a:r>
           </a:p>
           <a:p>
             <a:pPr lvl="2"/>
             <a:r>
-              <a:rPr lang="en-US" smtClean="0"/>
+              <a:rPr lang="en-US"/>
               <a:t>Third level</a:t>
             </a:r>
           </a:p>
           <a:p>
             <a:pPr lvl="3"/>
             <a:r>
-              <a:rPr lang="en-US" smtClean="0"/>
+              <a:rPr lang="en-US"/>
               <a:t>Fourth level</a:t>
             </a:r>
           </a:p>
           <a:p>
             <a:pPr lvl="4"/>
             <a:r>
-              <a:rPr lang="en-US" smtClean="0"/>
+              <a:rPr lang="en-US"/>
               <a:t>Fifth level</a:t>
             </a:r>
-            <a:endParaRPr lang="en-US"/>
           </a:p>
         </p:txBody>
       </p:sp>
@@ -465,7 +477,7 @@
           <a:p>
             <a:fld id="{5BCAD085-E8A6-8845-BD4E-CB4CCA059FC4}" type="datetimeFigureOut">
               <a:rPr lang="en-US" smtClean="0"/>
-              <a:t>1/27/13</a:t>
+              <a:t>7/8/2026</a:t>
             </a:fld>
             <a:endParaRPr lang="en-US"/>
           </a:p>
@@ -564,10 +576,9 @@
           <a:lstStyle/>
           <a:p>
             <a:r>
-              <a:rPr lang="en-US" smtClean="0"/>
+              <a:rPr lang="en-US"/>
               <a:t>Click to edit Master title style</a:t>
             </a:r>
-            <a:endParaRPr lang="en-US"/>
           </a:p>
         </p:txBody>
       </p:sp>
@@ -593,38 +604,37 @@
           <a:p>
             <a:pPr lvl="0"/>
             <a:r>
-              <a:rPr lang="en-US" smtClean="0"/>
+              <a:rPr lang="en-US"/>
               <a:t>Click to edit Master text styles</a:t>
             </a:r>
           </a:p>
           <a:p>
             <a:pPr lvl="1"/>
             <a:r>
-              <a:rPr lang="en-US" smtClean="0"/>
+              <a:rPr lang="en-US"/>
               <a:t>Second level</a:t>
             </a:r>
           </a:p>
           <a:p>
             <a:pPr lvl="2"/>
             <a:r>
-              <a:rPr lang="en-US" smtClean="0"/>
+              <a:rPr lang="en-US"/>
               <a:t>Third level</a:t>
             </a:r>
           </a:p>
           <a:p>
             <a:pPr lvl="3"/>
             <a:r>
-              <a:rPr lang="en-US" smtClean="0"/>
+              <a:rPr lang="en-US"/>
               <a:t>Fourth level</a:t>
             </a:r>
           </a:p>
           <a:p>
             <a:pPr lvl="4"/>
             <a:r>
-              <a:rPr lang="en-US" smtClean="0"/>
+              <a:rPr lang="en-US"/>
               <a:t>Fifth level</a:t>
             </a:r>
-            <a:endParaRPr lang="en-US"/>
           </a:p>
         </p:txBody>
       </p:sp>
@@ -645,7 +655,7 @@
           <a:p>
             <a:fld id="{5BCAD085-E8A6-8845-BD4E-CB4CCA059FC4}" type="datetimeFigureOut">
               <a:rPr lang="en-US" smtClean="0"/>
-              <a:t>1/27/13</a:t>
+              <a:t>7/8/2026</a:t>
             </a:fld>
             <a:endParaRPr lang="en-US"/>
           </a:p>
@@ -739,10 +749,9 @@
           <a:lstStyle/>
           <a:p>
             <a:r>
-              <a:rPr lang="en-US" smtClean="0"/>
+              <a:rPr lang="en-US"/>
               <a:t>Click to edit Master title style</a:t>
             </a:r>
-            <a:endParaRPr lang="en-US"/>
           </a:p>
         </p:txBody>
       </p:sp>
@@ -763,38 +772,37 @@
           <a:p>
             <a:pPr lvl="0"/>
             <a:r>
-              <a:rPr lang="en-US" smtClean="0"/>
+              <a:rPr lang="en-US"/>
               <a:t>Click to edit Master text styles</a:t>
             </a:r>
           </a:p>
           <a:p>
             <a:pPr lvl="1"/>
             <a:r>
-              <a:rPr lang="en-US" smtClean="0"/>
+              <a:rPr lang="en-US"/>
               <a:t>Second level</a:t>
             </a:r>
           </a:p>
           <a:p>
             <a:pPr lvl="2"/>
             <a:r>
-              <a:rPr lang="en-US" smtClean="0"/>
+              <a:rPr lang="en-US"/>
               <a:t>Third level</a:t>
             </a:r>
           </a:p>
           <a:p>
             <a:pPr lvl="3"/>
             <a:r>
-              <a:rPr lang="en-US" smtClean="0"/>
+              <a:rPr lang="en-US"/>
               <a:t>Fourth level</a:t>
             </a:r>
           </a:p>
           <a:p>
             <a:pPr lvl="4"/>
             <a:r>
-              <a:rPr lang="en-US" smtClean="0"/>
+              <a:rPr lang="en-US"/>
               <a:t>Fifth level</a:t>
             </a:r>
-            <a:endParaRPr lang="en-US"/>
           </a:p>
         </p:txBody>
       </p:sp>
@@ -815,7 +823,7 @@
           <a:p>
             <a:fld id="{5BCAD085-E8A6-8845-BD4E-CB4CCA059FC4}" type="datetimeFigureOut">
               <a:rPr lang="en-US" smtClean="0"/>
-              <a:t>1/27/13</a:t>
+              <a:t>7/8/2026</a:t>
             </a:fld>
             <a:endParaRPr lang="en-US"/>
           </a:p>
@@ -918,10 +926,9 @@
           </a:lstStyle>
           <a:p>
             <a:r>
-              <a:rPr lang="en-US" smtClean="0"/>
+              <a:rPr lang="en-US"/>
               <a:t>Click to edit Master title style</a:t>
             </a:r>
-            <a:endParaRPr lang="en-US"/>
           </a:p>
         </p:txBody>
       </p:sp>
@@ -1038,7 +1045,7 @@
           <a:p>
             <a:pPr lvl="0"/>
             <a:r>
-              <a:rPr lang="en-US" smtClean="0"/>
+              <a:rPr lang="en-US"/>
               <a:t>Click to edit Master text styles</a:t>
             </a:r>
           </a:p>
@@ -1061,7 +1068,7 @@
           <a:p>
             <a:fld id="{5BCAD085-E8A6-8845-BD4E-CB4CCA059FC4}" type="datetimeFigureOut">
               <a:rPr lang="en-US" smtClean="0"/>
-              <a:t>1/27/13</a:t>
+              <a:t>7/8/2026</a:t>
             </a:fld>
             <a:endParaRPr lang="en-US"/>
           </a:p>
@@ -1155,10 +1162,9 @@
           <a:lstStyle/>
           <a:p>
             <a:r>
-              <a:rPr lang="en-US" smtClean="0"/>
+              <a:rPr lang="en-US"/>
               <a:t>Click to edit Master title style</a:t>
             </a:r>
-            <a:endParaRPr lang="en-US"/>
           </a:p>
         </p:txBody>
       </p:sp>
@@ -1212,38 +1218,37 @@
           <a:p>
             <a:pPr lvl="0"/>
             <a:r>
-              <a:rPr lang="en-US" smtClean="0"/>
+              <a:rPr lang="en-US"/>
               <a:t>Click to edit Master text styles</a:t>
             </a:r>
           </a:p>
           <a:p>
             <a:pPr lvl="1"/>
             <a:r>
-              <a:rPr lang="en-US" smtClean="0"/>
+              <a:rPr lang="en-US"/>
               <a:t>Second level</a:t>
             </a:r>
           </a:p>
           <a:p>
             <a:pPr lvl="2"/>
             <a:r>
-              <a:rPr lang="en-US" smtClean="0"/>
+              <a:rPr lang="en-US"/>
               <a:t>Third level</a:t>
             </a:r>
           </a:p>
           <a:p>
             <a:pPr lvl="3"/>
             <a:r>
-              <a:rPr lang="en-US" smtClean="0"/>
+              <a:rPr lang="en-US"/>
               <a:t>Fourth level</a:t>
             </a:r>
           </a:p>
           <a:p>
             <a:pPr lvl="4"/>
             <a:r>
-              <a:rPr lang="en-US" smtClean="0"/>
+              <a:rPr lang="en-US"/>
               <a:t>Fifth level</a:t>
             </a:r>
-            <a:endParaRPr lang="en-US"/>
           </a:p>
         </p:txBody>
       </p:sp>
@@ -1297,38 +1302,37 @@
           <a:p>
             <a:pPr lvl="0"/>
             <a:r>
-              <a:rPr lang="en-US" smtClean="0"/>
+              <a:rPr lang="en-US"/>
               <a:t>Click to edit Master text styles</a:t>
             </a:r>
           </a:p>
           <a:p>
             <a:pPr lvl="1"/>
             <a:r>
-              <a:rPr lang="en-US" smtClean="0"/>
+              <a:rPr lang="en-US"/>
               <a:t>Second level</a:t>
             </a:r>
           </a:p>
           <a:p>
             <a:pPr lvl="2"/>
             <a:r>
-              <a:rPr lang="en-US" smtClean="0"/>
+              <a:rPr lang="en-US"/>
               <a:t>Third level</a:t>
             </a:r>
           </a:p>
           <a:p>
             <a:pPr lvl="3"/>
             <a:r>
-              <a:rPr lang="en-US" smtClean="0"/>
+              <a:rPr lang="en-US"/>
               <a:t>Fourth level</a:t>
             </a:r>
           </a:p>
           <a:p>
             <a:pPr lvl="4"/>
             <a:r>
-              <a:rPr lang="en-US" smtClean="0"/>
+              <a:rPr lang="en-US"/>
               <a:t>Fifth level</a:t>
             </a:r>
-            <a:endParaRPr lang="en-US"/>
           </a:p>
         </p:txBody>
       </p:sp>
@@ -1349,7 +1353,7 @@
           <a:p>
             <a:fld id="{5BCAD085-E8A6-8845-BD4E-CB4CCA059FC4}" type="datetimeFigureOut">
               <a:rPr lang="en-US" smtClean="0"/>
-              <a:t>1/27/13</a:t>
+              <a:t>7/8/2026</a:t>
             </a:fld>
             <a:endParaRPr lang="en-US"/>
           </a:p>
@@ -1447,10 +1451,9 @@
           </a:lstStyle>
           <a:p>
             <a:r>
-              <a:rPr lang="en-US" smtClean="0"/>
+              <a:rPr lang="en-US"/>
               <a:t>Click to edit Master title style</a:t>
             </a:r>
-            <a:endParaRPr lang="en-US"/>
           </a:p>
         </p:txBody>
       </p:sp>
@@ -1513,7 +1516,7 @@
           <a:p>
             <a:pPr lvl="0"/>
             <a:r>
-              <a:rPr lang="en-US" smtClean="0"/>
+              <a:rPr lang="en-US"/>
               <a:t>Click to edit Master text styles</a:t>
             </a:r>
           </a:p>
@@ -1569,38 +1572,37 @@
           <a:p>
             <a:pPr lvl="0"/>
             <a:r>
-              <a:rPr lang="en-US" smtClean="0"/>
+              <a:rPr lang="en-US"/>
               <a:t>Click to edit Master text styles</a:t>
             </a:r>
           </a:p>
           <a:p>
             <a:pPr lvl="1"/>
             <a:r>
-              <a:rPr lang="en-US" smtClean="0"/>
+              <a:rPr lang="en-US"/>
               <a:t>Second level</a:t>
             </a:r>
           </a:p>
           <a:p>
             <a:pPr lvl="2"/>
             <a:r>
-              <a:rPr lang="en-US" smtClean="0"/>
+              <a:rPr lang="en-US"/>
               <a:t>Third level</a:t>
             </a:r>
           </a:p>
           <a:p>
             <a:pPr lvl="3"/>
             <a:r>
-              <a:rPr lang="en-US" smtClean="0"/>
+              <a:rPr lang="en-US"/>
               <a:t>Fourth level</a:t>
             </a:r>
           </a:p>
           <a:p>
             <a:pPr lvl="4"/>
             <a:r>
-              <a:rPr lang="en-US" smtClean="0"/>
+              <a:rPr lang="en-US"/>
               <a:t>Fifth level</a:t>
             </a:r>
-            <a:endParaRPr lang="en-US"/>
           </a:p>
         </p:txBody>
       </p:sp>
@@ -1663,7 +1665,7 @@
           <a:p>
             <a:pPr lvl="0"/>
             <a:r>
-              <a:rPr lang="en-US" smtClean="0"/>
+              <a:rPr lang="en-US"/>
               <a:t>Click to edit Master text styles</a:t>
             </a:r>
           </a:p>
@@ -1719,38 +1721,37 @@
           <a:p>
             <a:pPr lvl="0"/>
             <a:r>
-              <a:rPr lang="en-US" smtClean="0"/>
+              <a:rPr lang="en-US"/>
               <a:t>Click to edit Master text styles</a:t>
             </a:r>
           </a:p>
           <a:p>
             <a:pPr lvl="1"/>
             <a:r>
-              <a:rPr lang="en-US" smtClean="0"/>
+              <a:rPr lang="en-US"/>
               <a:t>Second level</a:t>
             </a:r>
           </a:p>
           <a:p>
             <a:pPr lvl="2"/>
             <a:r>
-              <a:rPr lang="en-US" smtClean="0"/>
+              <a:rPr lang="en-US"/>
               <a:t>Third level</a:t>
             </a:r>
           </a:p>
           <a:p>
             <a:pPr lvl="3"/>
             <a:r>
-              <a:rPr lang="en-US" smtClean="0"/>
+              <a:rPr lang="en-US"/>
               <a:t>Fourth level</a:t>
             </a:r>
           </a:p>
           <a:p>
             <a:pPr lvl="4"/>
             <a:r>
-              <a:rPr lang="en-US" smtClean="0"/>
+              <a:rPr lang="en-US"/>
               <a:t>Fifth level</a:t>
             </a:r>
-            <a:endParaRPr lang="en-US"/>
           </a:p>
         </p:txBody>
       </p:sp>
@@ -1771,7 +1772,7 @@
           <a:p>
             <a:fld id="{5BCAD085-E8A6-8845-BD4E-CB4CCA059FC4}" type="datetimeFigureOut">
               <a:rPr lang="en-US" smtClean="0"/>
-              <a:t>1/27/13</a:t>
+              <a:t>7/8/2026</a:t>
             </a:fld>
             <a:endParaRPr lang="en-US"/>
           </a:p>
@@ -1865,10 +1866,9 @@
           <a:lstStyle/>
           <a:p>
             <a:r>
-              <a:rPr lang="en-US" smtClean="0"/>
+              <a:rPr lang="en-US"/>
               <a:t>Click to edit Master title style</a:t>
             </a:r>
-            <a:endParaRPr lang="en-US"/>
           </a:p>
         </p:txBody>
       </p:sp>
@@ -1889,7 +1889,7 @@
           <a:p>
             <a:fld id="{5BCAD085-E8A6-8845-BD4E-CB4CCA059FC4}" type="datetimeFigureOut">
               <a:rPr lang="en-US" smtClean="0"/>
-              <a:t>1/27/13</a:t>
+              <a:t>7/8/2026</a:t>
             </a:fld>
             <a:endParaRPr lang="en-US"/>
           </a:p>
@@ -1984,7 +1984,7 @@
           <a:p>
             <a:fld id="{5BCAD085-E8A6-8845-BD4E-CB4CCA059FC4}" type="datetimeFigureOut">
               <a:rPr lang="en-US" smtClean="0"/>
-              <a:t>1/27/13</a:t>
+              <a:t>7/8/2026</a:t>
             </a:fld>
             <a:endParaRPr lang="en-US"/>
           </a:p>
@@ -2087,10 +2087,9 @@
           </a:lstStyle>
           <a:p>
             <a:r>
-              <a:rPr lang="en-US" smtClean="0"/>
+              <a:rPr lang="en-US"/>
               <a:t>Click to edit Master title style</a:t>
             </a:r>
-            <a:endParaRPr lang="en-US"/>
           </a:p>
         </p:txBody>
       </p:sp>
@@ -2144,38 +2143,37 @@
           <a:p>
             <a:pPr lvl="0"/>
             <a:r>
-              <a:rPr lang="en-US" smtClean="0"/>
+              <a:rPr lang="en-US"/>
               <a:t>Click to edit Master text styles</a:t>
             </a:r>
           </a:p>
           <a:p>
             <a:pPr lvl="1"/>
             <a:r>
-              <a:rPr lang="en-US" smtClean="0"/>
+              <a:rPr lang="en-US"/>
               <a:t>Second level</a:t>
             </a:r>
           </a:p>
           <a:p>
             <a:pPr lvl="2"/>
             <a:r>
-              <a:rPr lang="en-US" smtClean="0"/>
+              <a:rPr lang="en-US"/>
               <a:t>Third level</a:t>
             </a:r>
           </a:p>
           <a:p>
             <a:pPr lvl="3"/>
             <a:r>
-              <a:rPr lang="en-US" smtClean="0"/>
+              <a:rPr lang="en-US"/>
               <a:t>Fourth level</a:t>
             </a:r>
           </a:p>
           <a:p>
             <a:pPr lvl="4"/>
             <a:r>
-              <a:rPr lang="en-US" smtClean="0"/>
+              <a:rPr lang="en-US"/>
               <a:t>Fifth level</a:t>
             </a:r>
-            <a:endParaRPr lang="en-US"/>
           </a:p>
         </p:txBody>
       </p:sp>
@@ -2238,7 +2236,7 @@
           <a:p>
             <a:pPr lvl="0"/>
             <a:r>
-              <a:rPr lang="en-US" smtClean="0"/>
+              <a:rPr lang="en-US"/>
               <a:t>Click to edit Master text styles</a:t>
             </a:r>
           </a:p>
@@ -2261,7 +2259,7 @@
           <a:p>
             <a:fld id="{5BCAD085-E8A6-8845-BD4E-CB4CCA059FC4}" type="datetimeFigureOut">
               <a:rPr lang="en-US" smtClean="0"/>
-              <a:t>1/27/13</a:t>
+              <a:t>7/8/2026</a:t>
             </a:fld>
             <a:endParaRPr lang="en-US"/>
           </a:p>
@@ -2364,10 +2362,9 @@
           </a:lstStyle>
           <a:p>
             <a:r>
-              <a:rPr lang="en-US" smtClean="0"/>
+              <a:rPr lang="en-US"/>
               <a:t>Click to edit Master title style</a:t>
             </a:r>
-            <a:endParaRPr lang="en-US"/>
           </a:p>
         </p:txBody>
       </p:sp>
@@ -2491,7 +2488,7 @@
           <a:p>
             <a:pPr lvl="0"/>
             <a:r>
-              <a:rPr lang="en-US" smtClean="0"/>
+              <a:rPr lang="en-US"/>
               <a:t>Click to edit Master text styles</a:t>
             </a:r>
           </a:p>
@@ -2514,7 +2511,7 @@
           <a:p>
             <a:fld id="{5BCAD085-E8A6-8845-BD4E-CB4CCA059FC4}" type="datetimeFigureOut">
               <a:rPr lang="en-US" smtClean="0"/>
-              <a:t>1/27/13</a:t>
+              <a:t>7/8/2026</a:t>
             </a:fld>
             <a:endParaRPr lang="en-US"/>
           </a:p>
@@ -2623,10 +2620,9 @@
           <a:lstStyle/>
           <a:p>
             <a:r>
-              <a:rPr lang="en-US" smtClean="0"/>
+              <a:rPr lang="en-US"/>
               <a:t>Click to edit Master title style</a:t>
             </a:r>
-            <a:endParaRPr lang="en-US"/>
           </a:p>
         </p:txBody>
       </p:sp>
@@ -2657,38 +2653,37 @@
           <a:p>
             <a:pPr lvl="0"/>
             <a:r>
-              <a:rPr lang="en-US" smtClean="0"/>
+              <a:rPr lang="en-US"/>
               <a:t>Click to edit Master text styles</a:t>
             </a:r>
           </a:p>
           <a:p>
             <a:pPr lvl="1"/>
             <a:r>
-              <a:rPr lang="en-US" smtClean="0"/>
+              <a:rPr lang="en-US"/>
               <a:t>Second level</a:t>
             </a:r>
           </a:p>
           <a:p>
             <a:pPr lvl="2"/>
             <a:r>
-              <a:rPr lang="en-US" smtClean="0"/>
+              <a:rPr lang="en-US"/>
               <a:t>Third level</a:t>
             </a:r>
           </a:p>
           <a:p>
             <a:pPr lvl="3"/>
             <a:r>
-              <a:rPr lang="en-US" smtClean="0"/>
+              <a:rPr lang="en-US"/>
               <a:t>Fourth level</a:t>
             </a:r>
           </a:p>
           <a:p>
             <a:pPr lvl="4"/>
             <a:r>
-              <a:rPr lang="en-US" smtClean="0"/>
+              <a:rPr lang="en-US"/>
               <a:t>Fifth level</a:t>
             </a:r>
-            <a:endParaRPr lang="en-US"/>
           </a:p>
         </p:txBody>
       </p:sp>
@@ -2727,7 +2722,7 @@
           <a:p>
             <a:fld id="{5BCAD085-E8A6-8845-BD4E-CB4CCA059FC4}" type="datetimeFigureOut">
               <a:rPr lang="en-US" smtClean="0"/>
-              <a:t>1/27/13</a:t>
+              <a:t>7/8/2026</a:t>
             </a:fld>
             <a:endParaRPr lang="en-US"/>
           </a:p>
@@ -3086,7 +3081,7 @@
 </file>
 
 <file path=ppt/slides/slide1.xml><?xml version="1.0" encoding="utf-8"?>
-<p:sld xmlns:a="http://schemas.openxmlformats.org/drawingml/2006/main" xmlns:p="http://schemas.openxmlformats.org/presentationml/2006/main" xmlns:r="http://schemas.openxmlformats.org/officeDocument/2006/relationships">
+<p:sld xmlns:a="http://schemas.openxmlformats.org/drawingml/2006/main" xmlns:r="http://schemas.openxmlformats.org/officeDocument/2006/relationships" xmlns:p="http://schemas.openxmlformats.org/presentationml/2006/main">
   <p:cSld>
     <p:bg>
       <p:bgPr>
@@ -3102,7 +3097,14 @@
         <p:cNvGrpSpPr/>
         <p:nvPr/>
       </p:nvGrpSpPr>
-      <p:grpSpPr/>
+      <p:grpSpPr>
+        <a:xfrm>
+          <a:off x="0" y="0"/>
+          <a:ext cx="0" cy="0"/>
+          <a:chOff x="0" y="0"/>
+          <a:chExt cx="0" cy="0"/>
+        </a:xfrm>
+      </p:grpSpPr>
       <p:sp>
         <p:nvSpPr>
           <p:cNvPr id="2" name="TextBox 1"/>
@@ -3147,7 +3149,7 @@
         <p:spPr>
           <a:xfrm>
             <a:off x="658368" y="1143000"/>
-            <a:ext cx="9692640" cy="914400"/>
+            <a:ext cx="11299888" cy="1077218"/>
           </a:xfrm>
           <a:prstGeom prst="rect">
             <a:avLst/>
@@ -3168,7 +3170,22 @@
               </a:defRPr>
             </a:pPr>
             <a:r>
-              <a:t>MDPO: Conditional Preference Optimization for Multimodal Large Language Models</a:t>
+              <a:rPr dirty="0"/>
+              <a:t>MDPO: Conditional Preference Optimization for Multimodal Large</a:t>
+            </a:r>
+            <a:endParaRPr lang="en-US" dirty="0"/>
+          </a:p>
+          <a:p>
+            <a:pPr algn="l">
+              <a:defRPr sz="3200" b="1">
+                <a:solidFill>
+                  <a:srgbClr val="162236"/>
+                </a:solidFill>
+              </a:defRPr>
+            </a:pPr>
+            <a:r>
+              <a:rPr dirty="0"/>
+              <a:t> Language Models</a:t>
             </a:r>
           </a:p>
         </p:txBody>
@@ -3285,6 +3302,7 @@
           <a:lstStyle/>
           <a:p>
             <a:pPr algn="ctr"/>
+            <a:endParaRPr/>
           </a:p>
         </p:txBody>
       </p:sp>
@@ -3365,6 +3383,7 @@
           <a:lstStyle/>
           <a:p>
             <a:pPr algn="ctr"/>
+            <a:endParaRPr/>
           </a:p>
         </p:txBody>
       </p:sp>
@@ -3410,6 +3429,7 @@
           <a:lstStyle/>
           <a:p>
             <a:pPr algn="ctr"/>
+            <a:endParaRPr/>
           </a:p>
         </p:txBody>
       </p:sp>
@@ -3565,7 +3585,7 @@
 </file>
 
 <file path=ppt/slides/slide2.xml><?xml version="1.0" encoding="utf-8"?>
-<p:sld xmlns:a="http://schemas.openxmlformats.org/drawingml/2006/main" xmlns:p="http://schemas.openxmlformats.org/presentationml/2006/main" xmlns:r="http://schemas.openxmlformats.org/officeDocument/2006/relationships">
+<p:sld xmlns:a="http://schemas.openxmlformats.org/drawingml/2006/main" xmlns:r="http://schemas.openxmlformats.org/officeDocument/2006/relationships" xmlns:p="http://schemas.openxmlformats.org/presentationml/2006/main">
   <p:cSld>
     <p:bg>
       <p:bgPr>
@@ -3581,7 +3601,14 @@
         <p:cNvGrpSpPr/>
         <p:nvPr/>
       </p:nvGrpSpPr>
-      <p:grpSpPr/>
+      <p:grpSpPr>
+        <a:xfrm>
+          <a:off x="0" y="0"/>
+          <a:ext cx="0" cy="0"/>
+          <a:chOff x="0" y="0"/>
+          <a:chExt cx="0" cy="0"/>
+        </a:xfrm>
+      </p:grpSpPr>
       <p:sp>
         <p:nvSpPr>
           <p:cNvPr id="2" name="TextBox 1"/>
@@ -3694,6 +3721,7 @@
           <a:lstStyle/>
           <a:p>
             <a:pPr algn="ctr"/>
+            <a:endParaRPr/>
           </a:p>
         </p:txBody>
       </p:sp>
@@ -3739,6 +3767,7 @@
           <a:lstStyle/>
           <a:p>
             <a:pPr algn="ctr"/>
+            <a:endParaRPr/>
           </a:p>
         </p:txBody>
       </p:sp>
@@ -3784,6 +3813,7 @@
           <a:lstStyle/>
           <a:p>
             <a:pPr algn="ctr"/>
+            <a:endParaRPr/>
           </a:p>
         </p:txBody>
       </p:sp>
@@ -3917,6 +3947,7 @@
           <a:lstStyle/>
           <a:p>
             <a:pPr algn="ctr"/>
+            <a:endParaRPr/>
           </a:p>
         </p:txBody>
       </p:sp>
@@ -3962,6 +3993,7 @@
           <a:lstStyle/>
           <a:p>
             <a:pPr algn="ctr"/>
+            <a:endParaRPr/>
           </a:p>
         </p:txBody>
       </p:sp>
@@ -4095,6 +4127,7 @@
           <a:lstStyle/>
           <a:p>
             <a:pPr algn="ctr"/>
+            <a:endParaRPr/>
           </a:p>
         </p:txBody>
       </p:sp>
@@ -4140,6 +4173,7 @@
           <a:lstStyle/>
           <a:p>
             <a:pPr algn="ctr"/>
+            <a:endParaRPr/>
           </a:p>
         </p:txBody>
       </p:sp>
@@ -4310,7 +4344,7 @@
 </file>
 
 <file path=ppt/slides/slide3.xml><?xml version="1.0" encoding="utf-8"?>
-<p:sld xmlns:a="http://schemas.openxmlformats.org/drawingml/2006/main" xmlns:p="http://schemas.openxmlformats.org/presentationml/2006/main" xmlns:r="http://schemas.openxmlformats.org/officeDocument/2006/relationships">
+<p:sld xmlns:a="http://schemas.openxmlformats.org/drawingml/2006/main" xmlns:r="http://schemas.openxmlformats.org/officeDocument/2006/relationships" xmlns:p="http://schemas.openxmlformats.org/presentationml/2006/main">
   <p:cSld>
     <p:bg>
       <p:bgPr>
@@ -4326,7 +4360,14 @@
         <p:cNvGrpSpPr/>
         <p:nvPr/>
       </p:nvGrpSpPr>
-      <p:grpSpPr/>
+      <p:grpSpPr>
+        <a:xfrm>
+          <a:off x="0" y="0"/>
+          <a:ext cx="0" cy="0"/>
+          <a:chOff x="0" y="0"/>
+          <a:chExt cx="0" cy="0"/>
+        </a:xfrm>
+      </p:grpSpPr>
       <p:sp>
         <p:nvSpPr>
           <p:cNvPr id="2" name="TextBox 1"/>
@@ -4439,6 +4480,7 @@
           <a:lstStyle/>
           <a:p>
             <a:pPr algn="ctr"/>
+            <a:endParaRPr/>
           </a:p>
         </p:txBody>
       </p:sp>
@@ -4589,6 +4631,7 @@
           <a:lstStyle/>
           <a:p>
             <a:pPr algn="ctr"/>
+            <a:endParaRPr/>
           </a:p>
         </p:txBody>
       </p:sp>
@@ -4673,6 +4716,7 @@
           <a:lstStyle/>
           <a:p>
             <a:pPr algn="ctr"/>
+            <a:endParaRPr/>
           </a:p>
         </p:txBody>
       </p:sp>
@@ -4757,6 +4801,7 @@
           <a:lstStyle/>
           <a:p>
             <a:pPr algn="ctr"/>
+            <a:endParaRPr/>
           </a:p>
         </p:txBody>
       </p:sp>
@@ -4878,7 +4923,7 @@
         <p:spPr>
           <a:xfrm>
             <a:off x="914400" y="4224528"/>
-            <a:ext cx="10424160" cy="713232"/>
+            <a:ext cx="10730053" cy="646331"/>
           </a:xfrm>
           <a:prstGeom prst="rect">
             <a:avLst/>
@@ -4899,7 +4944,22 @@
               </a:defRPr>
             </a:pPr>
             <a:r>
-              <a:t>Reviewer take: this diagnostic is strong because it isolates the failure mode. If removing images barely hurts DPO, the objective is not reliably enforcing multimodal conditioning.</a:t>
+              <a:rPr dirty="0"/>
+              <a:t>Reviewer take: this diagnostic is strong because it isolates the failure mode. If removing images barely hurts DPO, </a:t>
+            </a:r>
+            <a:endParaRPr lang="en-US" dirty="0"/>
+          </a:p>
+          <a:p>
+            <a:pPr algn="l">
+              <a:defRPr sz="1800" b="0">
+                <a:solidFill>
+                  <a:srgbClr val="23272F"/>
+                </a:solidFill>
+              </a:defRPr>
+            </a:pPr>
+            <a:r>
+              <a:rPr dirty="0"/>
+              <a:t>the objective is not reliably enforcing multimodal conditioning.</a:t>
             </a:r>
           </a:p>
         </p:txBody>
@@ -4983,7 +5043,7 @@
 </file>
 
 <file path=ppt/slides/slide4.xml><?xml version="1.0" encoding="utf-8"?>
-<p:sld xmlns:a="http://schemas.openxmlformats.org/drawingml/2006/main" xmlns:p="http://schemas.openxmlformats.org/presentationml/2006/main" xmlns:r="http://schemas.openxmlformats.org/officeDocument/2006/relationships">
+<p:sld xmlns:a="http://schemas.openxmlformats.org/drawingml/2006/main" xmlns:r="http://schemas.openxmlformats.org/officeDocument/2006/relationships" xmlns:p="http://schemas.openxmlformats.org/presentationml/2006/main">
   <p:cSld>
     <p:bg>
       <p:bgPr>
@@ -4999,7 +5059,14 @@
         <p:cNvGrpSpPr/>
         <p:nvPr/>
       </p:nvGrpSpPr>
-      <p:grpSpPr/>
+      <p:grpSpPr>
+        <a:xfrm>
+          <a:off x="0" y="0"/>
+          <a:ext cx="0" cy="0"/>
+          <a:chOff x="0" y="0"/>
+          <a:chExt cx="0" cy="0"/>
+        </a:xfrm>
+      </p:grpSpPr>
       <p:sp>
         <p:nvSpPr>
           <p:cNvPr id="2" name="TextBox 1"/>
@@ -5112,6 +5179,7 @@
           <a:lstStyle/>
           <a:p>
             <a:pPr algn="ctr"/>
+            <a:endParaRPr/>
           </a:p>
         </p:txBody>
       </p:sp>
@@ -5157,6 +5225,7 @@
           <a:lstStyle/>
           <a:p>
             <a:pPr algn="ctr"/>
+            <a:endParaRPr/>
           </a:p>
         </p:txBody>
       </p:sp>
@@ -5202,6 +5271,7 @@
           <a:lstStyle/>
           <a:p>
             <a:pPr algn="ctr"/>
+            <a:endParaRPr/>
           </a:p>
         </p:txBody>
       </p:sp>
@@ -5335,6 +5405,7 @@
           <a:lstStyle/>
           <a:p>
             <a:pPr algn="ctr"/>
+            <a:endParaRPr/>
           </a:p>
         </p:txBody>
       </p:sp>
@@ -5380,6 +5451,7 @@
           <a:lstStyle/>
           <a:p>
             <a:pPr algn="ctr"/>
+            <a:endParaRPr/>
           </a:p>
         </p:txBody>
       </p:sp>
@@ -5528,6 +5600,7 @@
           <a:lstStyle/>
           <a:p>
             <a:pPr algn="ctr"/>
+            <a:endParaRPr/>
           </a:p>
         </p:txBody>
       </p:sp>
@@ -5573,6 +5646,7 @@
           <a:lstStyle/>
           <a:p>
             <a:pPr algn="ctr"/>
+            <a:endParaRPr/>
           </a:p>
         </p:txBody>
       </p:sp>
@@ -5778,7 +5852,7 @@
 </file>
 
 <file path=ppt/slides/slide5.xml><?xml version="1.0" encoding="utf-8"?>
-<p:sld xmlns:a="http://schemas.openxmlformats.org/drawingml/2006/main" xmlns:p="http://schemas.openxmlformats.org/presentationml/2006/main" xmlns:r="http://schemas.openxmlformats.org/officeDocument/2006/relationships">
+<p:sld xmlns:a="http://schemas.openxmlformats.org/drawingml/2006/main" xmlns:r="http://schemas.openxmlformats.org/officeDocument/2006/relationships" xmlns:p="http://schemas.openxmlformats.org/presentationml/2006/main">
   <p:cSld>
     <p:bg>
       <p:bgPr>
@@ -5794,7 +5868,14 @@
         <p:cNvGrpSpPr/>
         <p:nvPr/>
       </p:nvGrpSpPr>
-      <p:grpSpPr/>
+      <p:grpSpPr>
+        <a:xfrm>
+          <a:off x="0" y="0"/>
+          <a:ext cx="0" cy="0"/>
+          <a:chOff x="0" y="0"/>
+          <a:chExt cx="0" cy="0"/>
+        </a:xfrm>
+      </p:grpSpPr>
       <p:sp>
         <p:nvSpPr>
           <p:cNvPr id="2" name="TextBox 1"/>
@@ -5907,6 +5988,7 @@
           <a:lstStyle/>
           <a:p>
             <a:pPr algn="ctr"/>
+            <a:endParaRPr/>
           </a:p>
         </p:txBody>
       </p:sp>
@@ -5952,6 +6034,7 @@
           <a:lstStyle/>
           <a:p>
             <a:pPr algn="ctr"/>
+            <a:endParaRPr/>
           </a:p>
         </p:txBody>
       </p:sp>
@@ -5997,6 +6080,7 @@
           <a:lstStyle/>
           <a:p>
             <a:pPr algn="ctr"/>
+            <a:endParaRPr/>
           </a:p>
         </p:txBody>
       </p:sp>
@@ -6145,6 +6229,7 @@
           <a:lstStyle/>
           <a:p>
             <a:pPr algn="ctr"/>
+            <a:endParaRPr/>
           </a:p>
         </p:txBody>
       </p:sp>
@@ -6190,6 +6275,7 @@
           <a:lstStyle/>
           <a:p>
             <a:pPr algn="ctr"/>
+            <a:endParaRPr/>
           </a:p>
         </p:txBody>
       </p:sp>
@@ -6323,6 +6409,7 @@
           <a:lstStyle/>
           <a:p>
             <a:pPr algn="ctr"/>
+            <a:endParaRPr/>
           </a:p>
         </p:txBody>
       </p:sp>
@@ -6368,6 +6455,7 @@
           <a:lstStyle/>
           <a:p>
             <a:pPr algn="ctr"/>
+            <a:endParaRPr/>
           </a:p>
         </p:txBody>
       </p:sp>
@@ -6603,7 +6691,7 @@
 </file>
 
 <file path=ppt/slides/slide6.xml><?xml version="1.0" encoding="utf-8"?>
-<p:sld xmlns:a="http://schemas.openxmlformats.org/drawingml/2006/main" xmlns:p="http://schemas.openxmlformats.org/presentationml/2006/main" xmlns:r="http://schemas.openxmlformats.org/officeDocument/2006/relationships">
+<p:sld xmlns:a="http://schemas.openxmlformats.org/drawingml/2006/main" xmlns:r="http://schemas.openxmlformats.org/officeDocument/2006/relationships" xmlns:p="http://schemas.openxmlformats.org/presentationml/2006/main">
   <p:cSld>
     <p:bg>
       <p:bgPr>
@@ -6619,7 +6707,14 @@
         <p:cNvGrpSpPr/>
         <p:nvPr/>
       </p:nvGrpSpPr>
-      <p:grpSpPr/>
+      <p:grpSpPr>
+        <a:xfrm>
+          <a:off x="0" y="0"/>
+          <a:ext cx="0" cy="0"/>
+          <a:chOff x="0" y="0"/>
+          <a:chExt cx="0" cy="0"/>
+        </a:xfrm>
+      </p:grpSpPr>
       <p:sp>
         <p:nvSpPr>
           <p:cNvPr id="2" name="TextBox 1"/>
@@ -6732,6 +6827,7 @@
           <a:lstStyle/>
           <a:p>
             <a:pPr algn="ctr"/>
+            <a:endParaRPr/>
           </a:p>
         </p:txBody>
       </p:sp>
@@ -6754,11 +6850,41 @@
                 <a:tableStyleId>{5C22544A-7EE6-4342-B048-85BDC9FD1C3A}</a:tableStyleId>
               </a:tblPr>
               <a:tblGrid>
-                <a:gridCol w="2057400"/>
-                <a:gridCol w="1508760"/>
-                <a:gridCol w="1508760"/>
-                <a:gridCol w="1508760"/>
-                <a:gridCol w="1508760"/>
+                <a:gridCol w="2057400">
+                  <a:extLst>
+                    <a:ext uri="{9D8B030D-6E8A-4147-A177-3AD203B41FA5}">
+                      <a16:colId xmlns:a16="http://schemas.microsoft.com/office/drawing/2014/main" val="20000"/>
+                    </a:ext>
+                  </a:extLst>
+                </a:gridCol>
+                <a:gridCol w="1508760">
+                  <a:extLst>
+                    <a:ext uri="{9D8B030D-6E8A-4147-A177-3AD203B41FA5}">
+                      <a16:colId xmlns:a16="http://schemas.microsoft.com/office/drawing/2014/main" val="20001"/>
+                    </a:ext>
+                  </a:extLst>
+                </a:gridCol>
+                <a:gridCol w="1508760">
+                  <a:extLst>
+                    <a:ext uri="{9D8B030D-6E8A-4147-A177-3AD203B41FA5}">
+                      <a16:colId xmlns:a16="http://schemas.microsoft.com/office/drawing/2014/main" val="20002"/>
+                    </a:ext>
+                  </a:extLst>
+                </a:gridCol>
+                <a:gridCol w="1508760">
+                  <a:extLst>
+                    <a:ext uri="{9D8B030D-6E8A-4147-A177-3AD203B41FA5}">
+                      <a16:colId xmlns:a16="http://schemas.microsoft.com/office/drawing/2014/main" val="20003"/>
+                    </a:ext>
+                  </a:extLst>
+                </a:gridCol>
+                <a:gridCol w="1508760">
+                  <a:extLst>
+                    <a:ext uri="{9D8B030D-6E8A-4147-A177-3AD203B41FA5}">
+                      <a16:colId xmlns:a16="http://schemas.microsoft.com/office/drawing/2014/main" val="20004"/>
+                    </a:ext>
+                  </a:extLst>
+                </a:gridCol>
               </a:tblGrid>
               <a:tr h="438912">
                 <a:tc>
@@ -6876,6 +7002,11 @@
                     </a:solidFill>
                   </a:tcPr>
                 </a:tc>
+                <a:extLst>
+                  <a:ext uri="{0D108BD9-81ED-4DB2-BD59-A6C34878D82A}">
+                    <a16:rowId xmlns:a16="http://schemas.microsoft.com/office/drawing/2014/main" val="10000"/>
+                  </a:ext>
+                </a:extLst>
               </a:tr>
               <a:tr h="438912">
                 <a:tc>
@@ -6993,6 +7124,11 @@
                     </a:solidFill>
                   </a:tcPr>
                 </a:tc>
+                <a:extLst>
+                  <a:ext uri="{0D108BD9-81ED-4DB2-BD59-A6C34878D82A}">
+                    <a16:rowId xmlns:a16="http://schemas.microsoft.com/office/drawing/2014/main" val="10001"/>
+                  </a:ext>
+                </a:extLst>
               </a:tr>
               <a:tr h="438912">
                 <a:tc>
@@ -7110,6 +7246,11 @@
                     </a:solidFill>
                   </a:tcPr>
                 </a:tc>
+                <a:extLst>
+                  <a:ext uri="{0D108BD9-81ED-4DB2-BD59-A6C34878D82A}">
+                    <a16:rowId xmlns:a16="http://schemas.microsoft.com/office/drawing/2014/main" val="10002"/>
+                  </a:ext>
+                </a:extLst>
               </a:tr>
               <a:tr h="438912">
                 <a:tc>
@@ -7227,6 +7368,11 @@
                     </a:solidFill>
                   </a:tcPr>
                 </a:tc>
+                <a:extLst>
+                  <a:ext uri="{0D108BD9-81ED-4DB2-BD59-A6C34878D82A}">
+                    <a16:rowId xmlns:a16="http://schemas.microsoft.com/office/drawing/2014/main" val="10003"/>
+                  </a:ext>
+                </a:extLst>
               </a:tr>
               <a:tr h="438912">
                 <a:tc>
@@ -7344,6 +7490,11 @@
                     </a:solidFill>
                   </a:tcPr>
                 </a:tc>
+                <a:extLst>
+                  <a:ext uri="{0D108BD9-81ED-4DB2-BD59-A6C34878D82A}">
+                    <a16:rowId xmlns:a16="http://schemas.microsoft.com/office/drawing/2014/main" val="10004"/>
+                  </a:ext>
+                </a:extLst>
               </a:tr>
             </a:tbl>
           </a:graphicData>
@@ -7391,6 +7542,7 @@
           <a:lstStyle/>
           <a:p>
             <a:pPr algn="ctr"/>
+            <a:endParaRPr/>
           </a:p>
         </p:txBody>
       </p:sp>
@@ -7436,6 +7588,7 @@
           <a:lstStyle/>
           <a:p>
             <a:pPr algn="ctr"/>
+            <a:endParaRPr/>
           </a:p>
         </p:txBody>
       </p:sp>
@@ -7554,6 +7707,7 @@
           <a:lstStyle/>
           <a:p>
             <a:pPr algn="ctr"/>
+            <a:endParaRPr/>
           </a:p>
         </p:txBody>
       </p:sp>
@@ -7599,6 +7753,7 @@
           <a:lstStyle/>
           <a:p>
             <a:pPr algn="ctr"/>
+            <a:endParaRPr/>
           </a:p>
         </p:txBody>
       </p:sp>
@@ -7754,7 +7909,7 @@
 </file>
 
 <file path=ppt/slides/slide7.xml><?xml version="1.0" encoding="utf-8"?>
-<p:sld xmlns:a="http://schemas.openxmlformats.org/drawingml/2006/main" xmlns:p="http://schemas.openxmlformats.org/presentationml/2006/main" xmlns:r="http://schemas.openxmlformats.org/officeDocument/2006/relationships">
+<p:sld xmlns:a="http://schemas.openxmlformats.org/drawingml/2006/main" xmlns:r="http://schemas.openxmlformats.org/officeDocument/2006/relationships" xmlns:p="http://schemas.openxmlformats.org/presentationml/2006/main">
   <p:cSld>
     <p:bg>
       <p:bgPr>
@@ -7770,7 +7925,14 @@
         <p:cNvGrpSpPr/>
         <p:nvPr/>
       </p:nvGrpSpPr>
-      <p:grpSpPr/>
+      <p:grpSpPr>
+        <a:xfrm>
+          <a:off x="0" y="0"/>
+          <a:ext cx="0" cy="0"/>
+          <a:chOff x="0" y="0"/>
+          <a:chExt cx="0" cy="0"/>
+        </a:xfrm>
+      </p:grpSpPr>
       <p:sp>
         <p:nvSpPr>
           <p:cNvPr id="2" name="TextBox 1"/>
@@ -7883,6 +8045,7 @@
           <a:lstStyle/>
           <a:p>
             <a:pPr algn="ctr"/>
+            <a:endParaRPr/>
           </a:p>
         </p:txBody>
       </p:sp>
@@ -7928,6 +8091,7 @@
           <a:lstStyle/>
           <a:p>
             <a:pPr algn="ctr"/>
+            <a:endParaRPr/>
           </a:p>
         </p:txBody>
       </p:sp>
@@ -7973,6 +8137,7 @@
           <a:lstStyle/>
           <a:p>
             <a:pPr algn="ctr"/>
+            <a:endParaRPr/>
           </a:p>
         </p:txBody>
       </p:sp>
@@ -8151,6 +8316,7 @@
           <a:lstStyle/>
           <a:p>
             <a:pPr algn="ctr"/>
+            <a:endParaRPr/>
           </a:p>
         </p:txBody>
       </p:sp>
@@ -8196,6 +8362,7 @@
           <a:lstStyle/>
           <a:p>
             <a:pPr algn="ctr"/>
+            <a:endParaRPr/>
           </a:p>
         </p:txBody>
       </p:sp>
@@ -8411,7 +8578,7 @@
 </file>
 
 <file path=ppt/slides/slide8.xml><?xml version="1.0" encoding="utf-8"?>
-<p:sld xmlns:a="http://schemas.openxmlformats.org/drawingml/2006/main" xmlns:p="http://schemas.openxmlformats.org/presentationml/2006/main" xmlns:r="http://schemas.openxmlformats.org/officeDocument/2006/relationships">
+<p:sld xmlns:a="http://schemas.openxmlformats.org/drawingml/2006/main" xmlns:r="http://schemas.openxmlformats.org/officeDocument/2006/relationships" xmlns:p="http://schemas.openxmlformats.org/presentationml/2006/main">
   <p:cSld>
     <p:bg>
       <p:bgPr>
@@ -8427,7 +8594,14 @@
         <p:cNvGrpSpPr/>
         <p:nvPr/>
       </p:nvGrpSpPr>
-      <p:grpSpPr/>
+      <p:grpSpPr>
+        <a:xfrm>
+          <a:off x="0" y="0"/>
+          <a:ext cx="0" cy="0"/>
+          <a:chOff x="0" y="0"/>
+          <a:chExt cx="0" cy="0"/>
+        </a:xfrm>
+      </p:grpSpPr>
       <p:sp>
         <p:nvSpPr>
           <p:cNvPr id="2" name="TextBox 1"/>
@@ -8540,6 +8714,7 @@
           <a:lstStyle/>
           <a:p>
             <a:pPr algn="ctr"/>
+            <a:endParaRPr/>
           </a:p>
         </p:txBody>
       </p:sp>
@@ -8585,6 +8760,7 @@
           <a:lstStyle/>
           <a:p>
             <a:pPr algn="ctr"/>
+            <a:endParaRPr/>
           </a:p>
         </p:txBody>
       </p:sp>
@@ -8632,7 +8808,7 @@
         <p:spPr>
           <a:xfrm>
             <a:off x="896112" y="2176272"/>
-            <a:ext cx="10424160" cy="658368"/>
+            <a:ext cx="10869194" cy="707886"/>
           </a:xfrm>
           <a:prstGeom prst="rect">
             <a:avLst/>
@@ -8653,7 +8829,22 @@
               </a:defRPr>
             </a:pPr>
             <a:r>
-              <a:t>This is a meaningful contribution: it identifies a real pitfall in multimodal DPO and proposes a simple, effective correction.</a:t>
+              <a:rPr dirty="0"/>
+              <a:t>This is a meaningful contribution: it identifies a real pitfall in multimodal DPO and proposes a simple, </a:t>
+            </a:r>
+            <a:endParaRPr lang="en-US" dirty="0"/>
+          </a:p>
+          <a:p>
+            <a:pPr algn="l">
+              <a:defRPr sz="2000" b="1">
+                <a:solidFill>
+                  <a:srgbClr val="162236"/>
+                </a:solidFill>
+              </a:defRPr>
+            </a:pPr>
+            <a:r>
+              <a:rPr dirty="0"/>
+              <a:t>effective correction.</a:t>
             </a:r>
           </a:p>
         </p:txBody>
@@ -8700,6 +8891,7 @@
           <a:lstStyle/>
           <a:p>
             <a:pPr algn="ctr"/>
+            <a:endParaRPr/>
           </a:p>
         </p:txBody>
       </p:sp>
@@ -8745,6 +8937,7 @@
           <a:lstStyle/>
           <a:p>
             <a:pPr algn="ctr"/>
+            <a:endParaRPr/>
           </a:p>
         </p:txBody>
       </p:sp>
@@ -8893,6 +9086,7 @@
           <a:lstStyle/>
           <a:p>
             <a:pPr algn="ctr"/>
+            <a:endParaRPr/>
           </a:p>
         </p:txBody>
       </p:sp>
@@ -8938,6 +9132,7 @@
           <a:lstStyle/>
           <a:p>
             <a:pPr algn="ctr"/>
+            <a:endParaRPr/>
           </a:p>
         </p:txBody>
       </p:sp>
@@ -9086,6 +9281,7 @@
           <a:lstStyle/>
           <a:p>
             <a:pPr algn="ctr"/>
+            <a:endParaRPr/>
           </a:p>
         </p:txBody>
       </p:sp>
@@ -9131,6 +9327,7 @@
           <a:lstStyle/>
           <a:p>
             <a:pPr algn="ctr"/>
+            <a:endParaRPr/>
           </a:p>
         </p:txBody>
       </p:sp>
